--- a/第2章  信息系统项目的立项与评价.pptx
+++ b/第2章  信息系统项目的立项与评价.pptx
@@ -6,7 +6,7 @@
     <p:sldMasterId id="2147483676" r:id="rId2"/>
   </p:sldMasterIdLst>
   <p:notesMasterIdLst>
-    <p:notesMasterId r:id="rId61"/>
+    <p:notesMasterId r:id="rId66"/>
   </p:notesMasterIdLst>
   <p:sldIdLst>
     <p:sldId id="327" r:id="rId3"/>
@@ -60,13 +60,18 @@
     <p:sldId id="268" r:id="rId51"/>
     <p:sldId id="348" r:id="rId52"/>
     <p:sldId id="349" r:id="rId53"/>
-    <p:sldId id="350" r:id="rId54"/>
-    <p:sldId id="352" r:id="rId55"/>
-    <p:sldId id="351" r:id="rId56"/>
-    <p:sldId id="353" r:id="rId57"/>
-    <p:sldId id="354" r:id="rId58"/>
-    <p:sldId id="269" r:id="rId59"/>
-    <p:sldId id="307" r:id="rId60"/>
+    <p:sldId id="355" r:id="rId54"/>
+    <p:sldId id="350" r:id="rId55"/>
+    <p:sldId id="352" r:id="rId56"/>
+    <p:sldId id="351" r:id="rId57"/>
+    <p:sldId id="353" r:id="rId58"/>
+    <p:sldId id="354" r:id="rId59"/>
+    <p:sldId id="269" r:id="rId60"/>
+    <p:sldId id="359" r:id="rId61"/>
+    <p:sldId id="358" r:id="rId62"/>
+    <p:sldId id="357" r:id="rId63"/>
+    <p:sldId id="356" r:id="rId64"/>
+    <p:sldId id="307" r:id="rId65"/>
   </p:sldIdLst>
   <p:sldSz cx="9144000" cy="6858000" type="screen4x3"/>
   <p:notesSz cx="6858000" cy="9144000"/>
@@ -268,7 +273,6 @@
             <a:noFill/>
           </a:ln>
           <a:effectLst/>
-          <a:extLst/>
         </p:spPr>
         <p:txBody>
           <a:bodyPr vert="horz" wrap="square" lIns="91440" tIns="45720" rIns="91440" bIns="45720" numCol="1" anchor="t" anchorCtr="0" compatLnSpc="1">
@@ -320,7 +324,6 @@
             <a:noFill/>
           </a:ln>
           <a:effectLst/>
-          <a:extLst/>
         </p:spPr>
         <p:txBody>
           <a:bodyPr vert="horz" wrap="square" lIns="91440" tIns="45720" rIns="91440" bIns="45720" numCol="1" anchor="t" anchorCtr="0" compatLnSpc="1">
@@ -416,7 +419,6 @@
             <a:noFill/>
           </a:ln>
           <a:effectLst/>
-          <a:extLst/>
         </p:spPr>
         <p:txBody>
           <a:bodyPr vert="horz" wrap="square" lIns="91440" tIns="45720" rIns="91440" bIns="45720" numCol="1" anchor="t" anchorCtr="0" compatLnSpc="1">
@@ -491,7 +493,6 @@
             <a:noFill/>
           </a:ln>
           <a:effectLst/>
-          <a:extLst/>
         </p:spPr>
         <p:txBody>
           <a:bodyPr vert="horz" wrap="square" lIns="91440" tIns="45720" rIns="91440" bIns="45720" numCol="1" anchor="b" anchorCtr="0" compatLnSpc="1">
@@ -543,7 +544,6 @@
             <a:noFill/>
           </a:ln>
           <a:effectLst/>
-          <a:extLst/>
         </p:spPr>
         <p:txBody>
           <a:bodyPr vert="horz" wrap="square" lIns="91440" tIns="45720" rIns="91440" bIns="45720" numCol="1" anchor="b" anchorCtr="0" compatLnSpc="1">
@@ -13439,7 +13439,7 @@
     </p:spTree>
     <p:extLst>
       <p:ext uri="{BB962C8B-B14F-4D97-AF65-F5344CB8AC3E}">
-        <p14:creationId xmlns:p14="http://schemas.microsoft.com/office/powerpoint/2010/main" val="3522718164"/>
+        <p14:creationId xmlns:p14="http://schemas.microsoft.com/office/powerpoint/2010/main" val="293792974"/>
       </p:ext>
     </p:extLst>
   </p:cSld>
@@ -13719,7 +13719,7 @@
     </p:spTree>
     <p:extLst>
       <p:ext uri="{BB962C8B-B14F-4D97-AF65-F5344CB8AC3E}">
-        <p14:creationId xmlns:p14="http://schemas.microsoft.com/office/powerpoint/2010/main" val="1924859763"/>
+        <p14:creationId xmlns:p14="http://schemas.microsoft.com/office/powerpoint/2010/main" val="3522718164"/>
       </p:ext>
     </p:extLst>
   </p:cSld>
@@ -13999,7 +13999,7 @@
     </p:spTree>
     <p:extLst>
       <p:ext uri="{BB962C8B-B14F-4D97-AF65-F5344CB8AC3E}">
-        <p14:creationId xmlns:p14="http://schemas.microsoft.com/office/powerpoint/2010/main" val="721735285"/>
+        <p14:creationId xmlns:p14="http://schemas.microsoft.com/office/powerpoint/2010/main" val="1924859763"/>
       </p:ext>
     </p:extLst>
   </p:cSld>
@@ -14279,7 +14279,7 @@
     </p:spTree>
     <p:extLst>
       <p:ext uri="{BB962C8B-B14F-4D97-AF65-F5344CB8AC3E}">
-        <p14:creationId xmlns:p14="http://schemas.microsoft.com/office/powerpoint/2010/main" val="1377923115"/>
+        <p14:creationId xmlns:p14="http://schemas.microsoft.com/office/powerpoint/2010/main" val="721735285"/>
       </p:ext>
     </p:extLst>
   </p:cSld>
@@ -14559,7 +14559,7 @@
     </p:spTree>
     <p:extLst>
       <p:ext uri="{BB962C8B-B14F-4D97-AF65-F5344CB8AC3E}">
-        <p14:creationId xmlns:p14="http://schemas.microsoft.com/office/powerpoint/2010/main" val="1236615065"/>
+        <p14:creationId xmlns:p14="http://schemas.microsoft.com/office/powerpoint/2010/main" val="1377923115"/>
       </p:ext>
     </p:extLst>
   </p:cSld>
@@ -14588,10 +14588,10 @@
       </p:grpSpPr>
       <p:sp>
         <p:nvSpPr>
-          <p:cNvPr id="67586" name="Rectangle 7">
+          <p:cNvPr id="65538" name="Rectangle 7">
             <a:extLst>
               <a:ext uri="{FF2B5EF4-FFF2-40B4-BE49-F238E27FC236}">
-                <a16:creationId xmlns:a16="http://schemas.microsoft.com/office/drawing/2014/main" id="{C3416AB8-FE7C-448F-B3FB-3B09CEC98CF3}"/>
+                <a16:creationId xmlns:a16="http://schemas.microsoft.com/office/drawing/2014/main" id="{5E9EE2D8-36D1-49BB-B210-EA325E9BBFCC}"/>
               </a:ext>
             </a:extLst>
           </p:cNvPr>
@@ -14754,7 +14754,7 @@
                 <a:spcPct val="0"/>
               </a:spcBef>
             </a:pPr>
-            <a:fld id="{1CF1D127-6EB4-47AD-8A7D-E6B0ADC3D512}" type="slidenum">
+            <a:fld id="{C7682626-04B4-47D6-ADC5-9F06A6A559FF}" type="slidenum">
               <a:rPr lang="en-US" altLang="zh-CN"/>
               <a:pPr>
                 <a:spcBef>
@@ -14769,10 +14769,10 @@
       </p:sp>
       <p:sp>
         <p:nvSpPr>
-          <p:cNvPr id="67587" name="Rectangle 2">
+          <p:cNvPr id="65539" name="Rectangle 2">
             <a:extLst>
               <a:ext uri="{FF2B5EF4-FFF2-40B4-BE49-F238E27FC236}">
-                <a16:creationId xmlns:a16="http://schemas.microsoft.com/office/drawing/2014/main" id="{D641FF14-1514-4082-A14F-41B970A9A422}"/>
+                <a16:creationId xmlns:a16="http://schemas.microsoft.com/office/drawing/2014/main" id="{B33571F7-FFCE-48C1-80EB-AE26D5885EB5}"/>
               </a:ext>
             </a:extLst>
           </p:cNvPr>
@@ -14789,10 +14789,10 @@
       </p:sp>
       <p:sp>
         <p:nvSpPr>
-          <p:cNvPr id="67588" name="Rectangle 3">
+          <p:cNvPr id="65540" name="Rectangle 3">
             <a:extLst>
               <a:ext uri="{FF2B5EF4-FFF2-40B4-BE49-F238E27FC236}">
-                <a16:creationId xmlns:a16="http://schemas.microsoft.com/office/drawing/2014/main" id="{61AD62ED-4F3B-43C0-87C2-FC10A2DC9A9B}"/>
+                <a16:creationId xmlns:a16="http://schemas.microsoft.com/office/drawing/2014/main" id="{705D42A9-FC32-4EE5-8BB4-6F6F71D497C0}"/>
               </a:ext>
             </a:extLst>
           </p:cNvPr>
@@ -14837,6 +14837,1126 @@
         </p:txBody>
       </p:sp>
     </p:spTree>
+    <p:extLst>
+      <p:ext uri="{BB962C8B-B14F-4D97-AF65-F5344CB8AC3E}">
+        <p14:creationId xmlns:p14="http://schemas.microsoft.com/office/powerpoint/2010/main" val="1236615065"/>
+      </p:ext>
+    </p:extLst>
+  </p:cSld>
+  <p:clrMapOvr>
+    <a:masterClrMapping/>
+  </p:clrMapOvr>
+</p:notes>
+</file>
+
+<file path=ppt/notesSlides/notesSlide56.xml><?xml version="1.0" encoding="utf-8"?>
+<p:notes xmlns:a="http://schemas.openxmlformats.org/drawingml/2006/main" xmlns:r="http://schemas.openxmlformats.org/officeDocument/2006/relationships" xmlns:p="http://schemas.openxmlformats.org/presentationml/2006/main">
+  <p:cSld>
+    <p:spTree>
+      <p:nvGrpSpPr>
+        <p:cNvPr id="1" name=""/>
+        <p:cNvGrpSpPr/>
+        <p:nvPr/>
+      </p:nvGrpSpPr>
+      <p:grpSpPr>
+        <a:xfrm>
+          <a:off x="0" y="0"/>
+          <a:ext cx="0" cy="0"/>
+          <a:chOff x="0" y="0"/>
+          <a:chExt cx="0" cy="0"/>
+        </a:xfrm>
+      </p:grpSpPr>
+      <p:sp>
+        <p:nvSpPr>
+          <p:cNvPr id="67586" name="Rectangle 7">
+            <a:extLst>
+              <a:ext uri="{FF2B5EF4-FFF2-40B4-BE49-F238E27FC236}">
+                <a16:creationId xmlns:a16="http://schemas.microsoft.com/office/drawing/2014/main" id="{C3416AB8-FE7C-448F-B3FB-3B09CEC98CF3}"/>
+              </a:ext>
+            </a:extLst>
+          </p:cNvPr>
+          <p:cNvSpPr>
+            <a:spLocks noGrp="1" noChangeArrowheads="1"/>
+          </p:cNvSpPr>
+          <p:nvPr>
+            <p:ph type="sldNum" sz="quarter" idx="5"/>
+          </p:nvPr>
+        </p:nvSpPr>
+        <p:spPr>
+          <a:noFill/>
+          <a:extLst>
+            <a:ext uri="{909E8E84-426E-40DD-AFC4-6F175D3DCCD1}">
+              <a14:hiddenFill xmlns:a14="http://schemas.microsoft.com/office/drawing/2010/main">
+                <a:solidFill>
+                  <a:srgbClr val="FFFFFF"/>
+                </a:solidFill>
+              </a14:hiddenFill>
+            </a:ext>
+            <a:ext uri="{91240B29-F687-4F45-9708-019B960494DF}">
+              <a14:hiddenLine xmlns:a14="http://schemas.microsoft.com/office/drawing/2010/main" w="9525">
+                <a:solidFill>
+                  <a:srgbClr val="000000"/>
+                </a:solidFill>
+                <a:miter lim="800000"/>
+                <a:headEnd/>
+                <a:tailEnd/>
+              </a14:hiddenLine>
+            </a:ext>
+          </a:extLst>
+        </p:spPr>
+        <p:txBody>
+          <a:bodyPr/>
+          <a:lstStyle>
+            <a:lvl1pPr>
+              <a:spcBef>
+                <a:spcPct val="30000"/>
+              </a:spcBef>
+              <a:defRPr sz="1200">
+                <a:solidFill>
+                  <a:schemeClr val="tx1"/>
+                </a:solidFill>
+                <a:latin typeface="Arial" panose="020B0604020202020204" pitchFamily="34" charset="0"/>
+                <a:ea typeface="宋体" panose="02010600030101010101" pitchFamily="2" charset="-122"/>
+              </a:defRPr>
+            </a:lvl1pPr>
+            <a:lvl2pPr marL="742950" indent="-285750">
+              <a:spcBef>
+                <a:spcPct val="30000"/>
+              </a:spcBef>
+              <a:defRPr sz="1200">
+                <a:solidFill>
+                  <a:schemeClr val="tx1"/>
+                </a:solidFill>
+                <a:latin typeface="Arial" panose="020B0604020202020204" pitchFamily="34" charset="0"/>
+                <a:ea typeface="宋体" panose="02010600030101010101" pitchFamily="2" charset="-122"/>
+              </a:defRPr>
+            </a:lvl2pPr>
+            <a:lvl3pPr marL="1143000" indent="-228600">
+              <a:spcBef>
+                <a:spcPct val="30000"/>
+              </a:spcBef>
+              <a:defRPr sz="1200">
+                <a:solidFill>
+                  <a:schemeClr val="tx1"/>
+                </a:solidFill>
+                <a:latin typeface="Arial" panose="020B0604020202020204" pitchFamily="34" charset="0"/>
+                <a:ea typeface="宋体" panose="02010600030101010101" pitchFamily="2" charset="-122"/>
+              </a:defRPr>
+            </a:lvl3pPr>
+            <a:lvl4pPr marL="1600200" indent="-228600">
+              <a:spcBef>
+                <a:spcPct val="30000"/>
+              </a:spcBef>
+              <a:defRPr sz="1200">
+                <a:solidFill>
+                  <a:schemeClr val="tx1"/>
+                </a:solidFill>
+                <a:latin typeface="Arial" panose="020B0604020202020204" pitchFamily="34" charset="0"/>
+                <a:ea typeface="宋体" panose="02010600030101010101" pitchFamily="2" charset="-122"/>
+              </a:defRPr>
+            </a:lvl4pPr>
+            <a:lvl5pPr marL="2057400" indent="-228600">
+              <a:spcBef>
+                <a:spcPct val="30000"/>
+              </a:spcBef>
+              <a:defRPr sz="1200">
+                <a:solidFill>
+                  <a:schemeClr val="tx1"/>
+                </a:solidFill>
+                <a:latin typeface="Arial" panose="020B0604020202020204" pitchFamily="34" charset="0"/>
+                <a:ea typeface="宋体" panose="02010600030101010101" pitchFamily="2" charset="-122"/>
+              </a:defRPr>
+            </a:lvl5pPr>
+            <a:lvl6pPr marL="2514600" indent="-228600" eaLnBrk="0" fontAlgn="base" hangingPunct="0">
+              <a:spcBef>
+                <a:spcPct val="30000"/>
+              </a:spcBef>
+              <a:spcAft>
+                <a:spcPct val="0"/>
+              </a:spcAft>
+              <a:defRPr sz="1200">
+                <a:solidFill>
+                  <a:schemeClr val="tx1"/>
+                </a:solidFill>
+                <a:latin typeface="Arial" panose="020B0604020202020204" pitchFamily="34" charset="0"/>
+                <a:ea typeface="宋体" panose="02010600030101010101" pitchFamily="2" charset="-122"/>
+              </a:defRPr>
+            </a:lvl6pPr>
+            <a:lvl7pPr marL="2971800" indent="-228600" eaLnBrk="0" fontAlgn="base" hangingPunct="0">
+              <a:spcBef>
+                <a:spcPct val="30000"/>
+              </a:spcBef>
+              <a:spcAft>
+                <a:spcPct val="0"/>
+              </a:spcAft>
+              <a:defRPr sz="1200">
+                <a:solidFill>
+                  <a:schemeClr val="tx1"/>
+                </a:solidFill>
+                <a:latin typeface="Arial" panose="020B0604020202020204" pitchFamily="34" charset="0"/>
+                <a:ea typeface="宋体" panose="02010600030101010101" pitchFamily="2" charset="-122"/>
+              </a:defRPr>
+            </a:lvl7pPr>
+            <a:lvl8pPr marL="3429000" indent="-228600" eaLnBrk="0" fontAlgn="base" hangingPunct="0">
+              <a:spcBef>
+                <a:spcPct val="30000"/>
+              </a:spcBef>
+              <a:spcAft>
+                <a:spcPct val="0"/>
+              </a:spcAft>
+              <a:defRPr sz="1200">
+                <a:solidFill>
+                  <a:schemeClr val="tx1"/>
+                </a:solidFill>
+                <a:latin typeface="Arial" panose="020B0604020202020204" pitchFamily="34" charset="0"/>
+                <a:ea typeface="宋体" panose="02010600030101010101" pitchFamily="2" charset="-122"/>
+              </a:defRPr>
+            </a:lvl8pPr>
+            <a:lvl9pPr marL="3886200" indent="-228600" eaLnBrk="0" fontAlgn="base" hangingPunct="0">
+              <a:spcBef>
+                <a:spcPct val="30000"/>
+              </a:spcBef>
+              <a:spcAft>
+                <a:spcPct val="0"/>
+              </a:spcAft>
+              <a:defRPr sz="1200">
+                <a:solidFill>
+                  <a:schemeClr val="tx1"/>
+                </a:solidFill>
+                <a:latin typeface="Arial" panose="020B0604020202020204" pitchFamily="34" charset="0"/>
+                <a:ea typeface="宋体" panose="02010600030101010101" pitchFamily="2" charset="-122"/>
+              </a:defRPr>
+            </a:lvl9pPr>
+          </a:lstStyle>
+          <a:p>
+            <a:pPr>
+              <a:spcBef>
+                <a:spcPct val="0"/>
+              </a:spcBef>
+            </a:pPr>
+            <a:fld id="{1CF1D127-6EB4-47AD-8A7D-E6B0ADC3D512}" type="slidenum">
+              <a:rPr lang="en-US" altLang="zh-CN"/>
+              <a:pPr>
+                <a:spcBef>
+                  <a:spcPct val="0"/>
+                </a:spcBef>
+              </a:pPr>
+              <a:t>58</a:t>
+            </a:fld>
+            <a:endParaRPr lang="en-US" altLang="zh-CN"/>
+          </a:p>
+        </p:txBody>
+      </p:sp>
+      <p:sp>
+        <p:nvSpPr>
+          <p:cNvPr id="67587" name="Rectangle 2">
+            <a:extLst>
+              <a:ext uri="{FF2B5EF4-FFF2-40B4-BE49-F238E27FC236}">
+                <a16:creationId xmlns:a16="http://schemas.microsoft.com/office/drawing/2014/main" id="{D641FF14-1514-4082-A14F-41B970A9A422}"/>
+              </a:ext>
+            </a:extLst>
+          </p:cNvPr>
+          <p:cNvSpPr>
+            <a:spLocks noGrp="1" noRot="1" noChangeAspect="1" noChangeArrowheads="1" noTextEdit="1"/>
+          </p:cNvSpPr>
+          <p:nvPr>
+            <p:ph type="sldImg"/>
+          </p:nvPr>
+        </p:nvSpPr>
+        <p:spPr>
+          <a:ln/>
+        </p:spPr>
+      </p:sp>
+      <p:sp>
+        <p:nvSpPr>
+          <p:cNvPr id="67588" name="Rectangle 3">
+            <a:extLst>
+              <a:ext uri="{FF2B5EF4-FFF2-40B4-BE49-F238E27FC236}">
+                <a16:creationId xmlns:a16="http://schemas.microsoft.com/office/drawing/2014/main" id="{61AD62ED-4F3B-43C0-87C2-FC10A2DC9A9B}"/>
+              </a:ext>
+            </a:extLst>
+          </p:cNvPr>
+          <p:cNvSpPr>
+            <a:spLocks noGrp="1" noChangeArrowheads="1"/>
+          </p:cNvSpPr>
+          <p:nvPr>
+            <p:ph type="body" idx="1"/>
+          </p:nvPr>
+        </p:nvSpPr>
+        <p:spPr>
+          <a:noFill/>
+          <a:extLst>
+            <a:ext uri="{909E8E84-426E-40DD-AFC4-6F175D3DCCD1}">
+              <a14:hiddenFill xmlns:a14="http://schemas.microsoft.com/office/drawing/2010/main">
+                <a:solidFill>
+                  <a:srgbClr val="FFFFFF"/>
+                </a:solidFill>
+              </a14:hiddenFill>
+            </a:ext>
+            <a:ext uri="{91240B29-F687-4F45-9708-019B960494DF}">
+              <a14:hiddenLine xmlns:a14="http://schemas.microsoft.com/office/drawing/2010/main" w="9525">
+                <a:solidFill>
+                  <a:srgbClr val="000000"/>
+                </a:solidFill>
+                <a:miter lim="800000"/>
+                <a:headEnd/>
+                <a:tailEnd/>
+              </a14:hiddenLine>
+            </a:ext>
+          </a:extLst>
+        </p:spPr>
+        <p:txBody>
+          <a:bodyPr/>
+          <a:lstStyle/>
+          <a:p>
+            <a:pPr eaLnBrk="1" hangingPunct="1"/>
+            <a:endParaRPr lang="zh-CN" altLang="zh-CN">
+              <a:latin typeface="Arial" panose="020B0604020202020204" pitchFamily="34" charset="0"/>
+            </a:endParaRPr>
+          </a:p>
+        </p:txBody>
+      </p:sp>
+    </p:spTree>
+  </p:cSld>
+  <p:clrMapOvr>
+    <a:masterClrMapping/>
+  </p:clrMapOvr>
+</p:notes>
+</file>
+
+<file path=ppt/notesSlides/notesSlide57.xml><?xml version="1.0" encoding="utf-8"?>
+<p:notes xmlns:a="http://schemas.openxmlformats.org/drawingml/2006/main" xmlns:r="http://schemas.openxmlformats.org/officeDocument/2006/relationships" xmlns:p="http://schemas.openxmlformats.org/presentationml/2006/main">
+  <p:cSld>
+    <p:spTree>
+      <p:nvGrpSpPr>
+        <p:cNvPr id="1" name=""/>
+        <p:cNvGrpSpPr/>
+        <p:nvPr/>
+      </p:nvGrpSpPr>
+      <p:grpSpPr>
+        <a:xfrm>
+          <a:off x="0" y="0"/>
+          <a:ext cx="0" cy="0"/>
+          <a:chOff x="0" y="0"/>
+          <a:chExt cx="0" cy="0"/>
+        </a:xfrm>
+      </p:grpSpPr>
+      <p:sp>
+        <p:nvSpPr>
+          <p:cNvPr id="67586" name="Rectangle 7">
+            <a:extLst>
+              <a:ext uri="{FF2B5EF4-FFF2-40B4-BE49-F238E27FC236}">
+                <a16:creationId xmlns:a16="http://schemas.microsoft.com/office/drawing/2014/main" id="{C3416AB8-FE7C-448F-B3FB-3B09CEC98CF3}"/>
+              </a:ext>
+            </a:extLst>
+          </p:cNvPr>
+          <p:cNvSpPr>
+            <a:spLocks noGrp="1" noChangeArrowheads="1"/>
+          </p:cNvSpPr>
+          <p:nvPr>
+            <p:ph type="sldNum" sz="quarter" idx="5"/>
+          </p:nvPr>
+        </p:nvSpPr>
+        <p:spPr>
+          <a:noFill/>
+          <a:extLst>
+            <a:ext uri="{909E8E84-426E-40DD-AFC4-6F175D3DCCD1}">
+              <a14:hiddenFill xmlns:a14="http://schemas.microsoft.com/office/drawing/2010/main">
+                <a:solidFill>
+                  <a:srgbClr val="FFFFFF"/>
+                </a:solidFill>
+              </a14:hiddenFill>
+            </a:ext>
+            <a:ext uri="{91240B29-F687-4F45-9708-019B960494DF}">
+              <a14:hiddenLine xmlns:a14="http://schemas.microsoft.com/office/drawing/2010/main" w="9525">
+                <a:solidFill>
+                  <a:srgbClr val="000000"/>
+                </a:solidFill>
+                <a:miter lim="800000"/>
+                <a:headEnd/>
+                <a:tailEnd/>
+              </a14:hiddenLine>
+            </a:ext>
+          </a:extLst>
+        </p:spPr>
+        <p:txBody>
+          <a:bodyPr/>
+          <a:lstStyle>
+            <a:lvl1pPr>
+              <a:spcBef>
+                <a:spcPct val="30000"/>
+              </a:spcBef>
+              <a:defRPr sz="1200">
+                <a:solidFill>
+                  <a:schemeClr val="tx1"/>
+                </a:solidFill>
+                <a:latin typeface="Arial" panose="020B0604020202020204" pitchFamily="34" charset="0"/>
+                <a:ea typeface="宋体" panose="02010600030101010101" pitchFamily="2" charset="-122"/>
+              </a:defRPr>
+            </a:lvl1pPr>
+            <a:lvl2pPr marL="742950" indent="-285750">
+              <a:spcBef>
+                <a:spcPct val="30000"/>
+              </a:spcBef>
+              <a:defRPr sz="1200">
+                <a:solidFill>
+                  <a:schemeClr val="tx1"/>
+                </a:solidFill>
+                <a:latin typeface="Arial" panose="020B0604020202020204" pitchFamily="34" charset="0"/>
+                <a:ea typeface="宋体" panose="02010600030101010101" pitchFamily="2" charset="-122"/>
+              </a:defRPr>
+            </a:lvl2pPr>
+            <a:lvl3pPr marL="1143000" indent="-228600">
+              <a:spcBef>
+                <a:spcPct val="30000"/>
+              </a:spcBef>
+              <a:defRPr sz="1200">
+                <a:solidFill>
+                  <a:schemeClr val="tx1"/>
+                </a:solidFill>
+                <a:latin typeface="Arial" panose="020B0604020202020204" pitchFamily="34" charset="0"/>
+                <a:ea typeface="宋体" panose="02010600030101010101" pitchFamily="2" charset="-122"/>
+              </a:defRPr>
+            </a:lvl3pPr>
+            <a:lvl4pPr marL="1600200" indent="-228600">
+              <a:spcBef>
+                <a:spcPct val="30000"/>
+              </a:spcBef>
+              <a:defRPr sz="1200">
+                <a:solidFill>
+                  <a:schemeClr val="tx1"/>
+                </a:solidFill>
+                <a:latin typeface="Arial" panose="020B0604020202020204" pitchFamily="34" charset="0"/>
+                <a:ea typeface="宋体" panose="02010600030101010101" pitchFamily="2" charset="-122"/>
+              </a:defRPr>
+            </a:lvl4pPr>
+            <a:lvl5pPr marL="2057400" indent="-228600">
+              <a:spcBef>
+                <a:spcPct val="30000"/>
+              </a:spcBef>
+              <a:defRPr sz="1200">
+                <a:solidFill>
+                  <a:schemeClr val="tx1"/>
+                </a:solidFill>
+                <a:latin typeface="Arial" panose="020B0604020202020204" pitchFamily="34" charset="0"/>
+                <a:ea typeface="宋体" panose="02010600030101010101" pitchFamily="2" charset="-122"/>
+              </a:defRPr>
+            </a:lvl5pPr>
+            <a:lvl6pPr marL="2514600" indent="-228600" eaLnBrk="0" fontAlgn="base" hangingPunct="0">
+              <a:spcBef>
+                <a:spcPct val="30000"/>
+              </a:spcBef>
+              <a:spcAft>
+                <a:spcPct val="0"/>
+              </a:spcAft>
+              <a:defRPr sz="1200">
+                <a:solidFill>
+                  <a:schemeClr val="tx1"/>
+                </a:solidFill>
+                <a:latin typeface="Arial" panose="020B0604020202020204" pitchFamily="34" charset="0"/>
+                <a:ea typeface="宋体" panose="02010600030101010101" pitchFamily="2" charset="-122"/>
+              </a:defRPr>
+            </a:lvl6pPr>
+            <a:lvl7pPr marL="2971800" indent="-228600" eaLnBrk="0" fontAlgn="base" hangingPunct="0">
+              <a:spcBef>
+                <a:spcPct val="30000"/>
+              </a:spcBef>
+              <a:spcAft>
+                <a:spcPct val="0"/>
+              </a:spcAft>
+              <a:defRPr sz="1200">
+                <a:solidFill>
+                  <a:schemeClr val="tx1"/>
+                </a:solidFill>
+                <a:latin typeface="Arial" panose="020B0604020202020204" pitchFamily="34" charset="0"/>
+                <a:ea typeface="宋体" panose="02010600030101010101" pitchFamily="2" charset="-122"/>
+              </a:defRPr>
+            </a:lvl7pPr>
+            <a:lvl8pPr marL="3429000" indent="-228600" eaLnBrk="0" fontAlgn="base" hangingPunct="0">
+              <a:spcBef>
+                <a:spcPct val="30000"/>
+              </a:spcBef>
+              <a:spcAft>
+                <a:spcPct val="0"/>
+              </a:spcAft>
+              <a:defRPr sz="1200">
+                <a:solidFill>
+                  <a:schemeClr val="tx1"/>
+                </a:solidFill>
+                <a:latin typeface="Arial" panose="020B0604020202020204" pitchFamily="34" charset="0"/>
+                <a:ea typeface="宋体" panose="02010600030101010101" pitchFamily="2" charset="-122"/>
+              </a:defRPr>
+            </a:lvl8pPr>
+            <a:lvl9pPr marL="3886200" indent="-228600" eaLnBrk="0" fontAlgn="base" hangingPunct="0">
+              <a:spcBef>
+                <a:spcPct val="30000"/>
+              </a:spcBef>
+              <a:spcAft>
+                <a:spcPct val="0"/>
+              </a:spcAft>
+              <a:defRPr sz="1200">
+                <a:solidFill>
+                  <a:schemeClr val="tx1"/>
+                </a:solidFill>
+                <a:latin typeface="Arial" panose="020B0604020202020204" pitchFamily="34" charset="0"/>
+                <a:ea typeface="宋体" panose="02010600030101010101" pitchFamily="2" charset="-122"/>
+              </a:defRPr>
+            </a:lvl9pPr>
+          </a:lstStyle>
+          <a:p>
+            <a:pPr>
+              <a:spcBef>
+                <a:spcPct val="0"/>
+              </a:spcBef>
+            </a:pPr>
+            <a:fld id="{1CF1D127-6EB4-47AD-8A7D-E6B0ADC3D512}" type="slidenum">
+              <a:rPr lang="en-US" altLang="zh-CN"/>
+              <a:pPr>
+                <a:spcBef>
+                  <a:spcPct val="0"/>
+                </a:spcBef>
+              </a:pPr>
+              <a:t>59</a:t>
+            </a:fld>
+            <a:endParaRPr lang="en-US" altLang="zh-CN"/>
+          </a:p>
+        </p:txBody>
+      </p:sp>
+      <p:sp>
+        <p:nvSpPr>
+          <p:cNvPr id="67587" name="Rectangle 2">
+            <a:extLst>
+              <a:ext uri="{FF2B5EF4-FFF2-40B4-BE49-F238E27FC236}">
+                <a16:creationId xmlns:a16="http://schemas.microsoft.com/office/drawing/2014/main" id="{D641FF14-1514-4082-A14F-41B970A9A422}"/>
+              </a:ext>
+            </a:extLst>
+          </p:cNvPr>
+          <p:cNvSpPr>
+            <a:spLocks noGrp="1" noRot="1" noChangeAspect="1" noChangeArrowheads="1" noTextEdit="1"/>
+          </p:cNvSpPr>
+          <p:nvPr>
+            <p:ph type="sldImg"/>
+          </p:nvPr>
+        </p:nvSpPr>
+        <p:spPr>
+          <a:ln/>
+        </p:spPr>
+      </p:sp>
+      <p:sp>
+        <p:nvSpPr>
+          <p:cNvPr id="67588" name="Rectangle 3">
+            <a:extLst>
+              <a:ext uri="{FF2B5EF4-FFF2-40B4-BE49-F238E27FC236}">
+                <a16:creationId xmlns:a16="http://schemas.microsoft.com/office/drawing/2014/main" id="{61AD62ED-4F3B-43C0-87C2-FC10A2DC9A9B}"/>
+              </a:ext>
+            </a:extLst>
+          </p:cNvPr>
+          <p:cNvSpPr>
+            <a:spLocks noGrp="1" noChangeArrowheads="1"/>
+          </p:cNvSpPr>
+          <p:nvPr>
+            <p:ph type="body" idx="1"/>
+          </p:nvPr>
+        </p:nvSpPr>
+        <p:spPr>
+          <a:noFill/>
+          <a:extLst>
+            <a:ext uri="{909E8E84-426E-40DD-AFC4-6F175D3DCCD1}">
+              <a14:hiddenFill xmlns:a14="http://schemas.microsoft.com/office/drawing/2010/main">
+                <a:solidFill>
+                  <a:srgbClr val="FFFFFF"/>
+                </a:solidFill>
+              </a14:hiddenFill>
+            </a:ext>
+            <a:ext uri="{91240B29-F687-4F45-9708-019B960494DF}">
+              <a14:hiddenLine xmlns:a14="http://schemas.microsoft.com/office/drawing/2010/main" w="9525">
+                <a:solidFill>
+                  <a:srgbClr val="000000"/>
+                </a:solidFill>
+                <a:miter lim="800000"/>
+                <a:headEnd/>
+                <a:tailEnd/>
+              </a14:hiddenLine>
+            </a:ext>
+          </a:extLst>
+        </p:spPr>
+        <p:txBody>
+          <a:bodyPr/>
+          <a:lstStyle/>
+          <a:p>
+            <a:pPr eaLnBrk="1" hangingPunct="1"/>
+            <a:endParaRPr lang="zh-CN" altLang="zh-CN">
+              <a:latin typeface="Arial" panose="020B0604020202020204" pitchFamily="34" charset="0"/>
+            </a:endParaRPr>
+          </a:p>
+        </p:txBody>
+      </p:sp>
+    </p:spTree>
+    <p:extLst>
+      <p:ext uri="{BB962C8B-B14F-4D97-AF65-F5344CB8AC3E}">
+        <p14:creationId xmlns:p14="http://schemas.microsoft.com/office/powerpoint/2010/main" val="2264291066"/>
+      </p:ext>
+    </p:extLst>
+  </p:cSld>
+  <p:clrMapOvr>
+    <a:masterClrMapping/>
+  </p:clrMapOvr>
+</p:notes>
+</file>
+
+<file path=ppt/notesSlides/notesSlide58.xml><?xml version="1.0" encoding="utf-8"?>
+<p:notes xmlns:a="http://schemas.openxmlformats.org/drawingml/2006/main" xmlns:r="http://schemas.openxmlformats.org/officeDocument/2006/relationships" xmlns:p="http://schemas.openxmlformats.org/presentationml/2006/main">
+  <p:cSld>
+    <p:spTree>
+      <p:nvGrpSpPr>
+        <p:cNvPr id="1" name=""/>
+        <p:cNvGrpSpPr/>
+        <p:nvPr/>
+      </p:nvGrpSpPr>
+      <p:grpSpPr>
+        <a:xfrm>
+          <a:off x="0" y="0"/>
+          <a:ext cx="0" cy="0"/>
+          <a:chOff x="0" y="0"/>
+          <a:chExt cx="0" cy="0"/>
+        </a:xfrm>
+      </p:grpSpPr>
+      <p:sp>
+        <p:nvSpPr>
+          <p:cNvPr id="67586" name="Rectangle 7">
+            <a:extLst>
+              <a:ext uri="{FF2B5EF4-FFF2-40B4-BE49-F238E27FC236}">
+                <a16:creationId xmlns:a16="http://schemas.microsoft.com/office/drawing/2014/main" id="{C3416AB8-FE7C-448F-B3FB-3B09CEC98CF3}"/>
+              </a:ext>
+            </a:extLst>
+          </p:cNvPr>
+          <p:cNvSpPr>
+            <a:spLocks noGrp="1" noChangeArrowheads="1"/>
+          </p:cNvSpPr>
+          <p:nvPr>
+            <p:ph type="sldNum" sz="quarter" idx="5"/>
+          </p:nvPr>
+        </p:nvSpPr>
+        <p:spPr>
+          <a:noFill/>
+          <a:extLst>
+            <a:ext uri="{909E8E84-426E-40DD-AFC4-6F175D3DCCD1}">
+              <a14:hiddenFill xmlns:a14="http://schemas.microsoft.com/office/drawing/2010/main">
+                <a:solidFill>
+                  <a:srgbClr val="FFFFFF"/>
+                </a:solidFill>
+              </a14:hiddenFill>
+            </a:ext>
+            <a:ext uri="{91240B29-F687-4F45-9708-019B960494DF}">
+              <a14:hiddenLine xmlns:a14="http://schemas.microsoft.com/office/drawing/2010/main" w="9525">
+                <a:solidFill>
+                  <a:srgbClr val="000000"/>
+                </a:solidFill>
+                <a:miter lim="800000"/>
+                <a:headEnd/>
+                <a:tailEnd/>
+              </a14:hiddenLine>
+            </a:ext>
+          </a:extLst>
+        </p:spPr>
+        <p:txBody>
+          <a:bodyPr/>
+          <a:lstStyle>
+            <a:lvl1pPr>
+              <a:spcBef>
+                <a:spcPct val="30000"/>
+              </a:spcBef>
+              <a:defRPr sz="1200">
+                <a:solidFill>
+                  <a:schemeClr val="tx1"/>
+                </a:solidFill>
+                <a:latin typeface="Arial" panose="020B0604020202020204" pitchFamily="34" charset="0"/>
+                <a:ea typeface="宋体" panose="02010600030101010101" pitchFamily="2" charset="-122"/>
+              </a:defRPr>
+            </a:lvl1pPr>
+            <a:lvl2pPr marL="742950" indent="-285750">
+              <a:spcBef>
+                <a:spcPct val="30000"/>
+              </a:spcBef>
+              <a:defRPr sz="1200">
+                <a:solidFill>
+                  <a:schemeClr val="tx1"/>
+                </a:solidFill>
+                <a:latin typeface="Arial" panose="020B0604020202020204" pitchFamily="34" charset="0"/>
+                <a:ea typeface="宋体" panose="02010600030101010101" pitchFamily="2" charset="-122"/>
+              </a:defRPr>
+            </a:lvl2pPr>
+            <a:lvl3pPr marL="1143000" indent="-228600">
+              <a:spcBef>
+                <a:spcPct val="30000"/>
+              </a:spcBef>
+              <a:defRPr sz="1200">
+                <a:solidFill>
+                  <a:schemeClr val="tx1"/>
+                </a:solidFill>
+                <a:latin typeface="Arial" panose="020B0604020202020204" pitchFamily="34" charset="0"/>
+                <a:ea typeface="宋体" panose="02010600030101010101" pitchFamily="2" charset="-122"/>
+              </a:defRPr>
+            </a:lvl3pPr>
+            <a:lvl4pPr marL="1600200" indent="-228600">
+              <a:spcBef>
+                <a:spcPct val="30000"/>
+              </a:spcBef>
+              <a:defRPr sz="1200">
+                <a:solidFill>
+                  <a:schemeClr val="tx1"/>
+                </a:solidFill>
+                <a:latin typeface="Arial" panose="020B0604020202020204" pitchFamily="34" charset="0"/>
+                <a:ea typeface="宋体" panose="02010600030101010101" pitchFamily="2" charset="-122"/>
+              </a:defRPr>
+            </a:lvl4pPr>
+            <a:lvl5pPr marL="2057400" indent="-228600">
+              <a:spcBef>
+                <a:spcPct val="30000"/>
+              </a:spcBef>
+              <a:defRPr sz="1200">
+                <a:solidFill>
+                  <a:schemeClr val="tx1"/>
+                </a:solidFill>
+                <a:latin typeface="Arial" panose="020B0604020202020204" pitchFamily="34" charset="0"/>
+                <a:ea typeface="宋体" panose="02010600030101010101" pitchFamily="2" charset="-122"/>
+              </a:defRPr>
+            </a:lvl5pPr>
+            <a:lvl6pPr marL="2514600" indent="-228600" eaLnBrk="0" fontAlgn="base" hangingPunct="0">
+              <a:spcBef>
+                <a:spcPct val="30000"/>
+              </a:spcBef>
+              <a:spcAft>
+                <a:spcPct val="0"/>
+              </a:spcAft>
+              <a:defRPr sz="1200">
+                <a:solidFill>
+                  <a:schemeClr val="tx1"/>
+                </a:solidFill>
+                <a:latin typeface="Arial" panose="020B0604020202020204" pitchFamily="34" charset="0"/>
+                <a:ea typeface="宋体" panose="02010600030101010101" pitchFamily="2" charset="-122"/>
+              </a:defRPr>
+            </a:lvl6pPr>
+            <a:lvl7pPr marL="2971800" indent="-228600" eaLnBrk="0" fontAlgn="base" hangingPunct="0">
+              <a:spcBef>
+                <a:spcPct val="30000"/>
+              </a:spcBef>
+              <a:spcAft>
+                <a:spcPct val="0"/>
+              </a:spcAft>
+              <a:defRPr sz="1200">
+                <a:solidFill>
+                  <a:schemeClr val="tx1"/>
+                </a:solidFill>
+                <a:latin typeface="Arial" panose="020B0604020202020204" pitchFamily="34" charset="0"/>
+                <a:ea typeface="宋体" panose="02010600030101010101" pitchFamily="2" charset="-122"/>
+              </a:defRPr>
+            </a:lvl7pPr>
+            <a:lvl8pPr marL="3429000" indent="-228600" eaLnBrk="0" fontAlgn="base" hangingPunct="0">
+              <a:spcBef>
+                <a:spcPct val="30000"/>
+              </a:spcBef>
+              <a:spcAft>
+                <a:spcPct val="0"/>
+              </a:spcAft>
+              <a:defRPr sz="1200">
+                <a:solidFill>
+                  <a:schemeClr val="tx1"/>
+                </a:solidFill>
+                <a:latin typeface="Arial" panose="020B0604020202020204" pitchFamily="34" charset="0"/>
+                <a:ea typeface="宋体" panose="02010600030101010101" pitchFamily="2" charset="-122"/>
+              </a:defRPr>
+            </a:lvl8pPr>
+            <a:lvl9pPr marL="3886200" indent="-228600" eaLnBrk="0" fontAlgn="base" hangingPunct="0">
+              <a:spcBef>
+                <a:spcPct val="30000"/>
+              </a:spcBef>
+              <a:spcAft>
+                <a:spcPct val="0"/>
+              </a:spcAft>
+              <a:defRPr sz="1200">
+                <a:solidFill>
+                  <a:schemeClr val="tx1"/>
+                </a:solidFill>
+                <a:latin typeface="Arial" panose="020B0604020202020204" pitchFamily="34" charset="0"/>
+                <a:ea typeface="宋体" panose="02010600030101010101" pitchFamily="2" charset="-122"/>
+              </a:defRPr>
+            </a:lvl9pPr>
+          </a:lstStyle>
+          <a:p>
+            <a:pPr>
+              <a:spcBef>
+                <a:spcPct val="0"/>
+              </a:spcBef>
+            </a:pPr>
+            <a:fld id="{1CF1D127-6EB4-47AD-8A7D-E6B0ADC3D512}" type="slidenum">
+              <a:rPr lang="en-US" altLang="zh-CN"/>
+              <a:pPr>
+                <a:spcBef>
+                  <a:spcPct val="0"/>
+                </a:spcBef>
+              </a:pPr>
+              <a:t>60</a:t>
+            </a:fld>
+            <a:endParaRPr lang="en-US" altLang="zh-CN"/>
+          </a:p>
+        </p:txBody>
+      </p:sp>
+      <p:sp>
+        <p:nvSpPr>
+          <p:cNvPr id="67587" name="Rectangle 2">
+            <a:extLst>
+              <a:ext uri="{FF2B5EF4-FFF2-40B4-BE49-F238E27FC236}">
+                <a16:creationId xmlns:a16="http://schemas.microsoft.com/office/drawing/2014/main" id="{D641FF14-1514-4082-A14F-41B970A9A422}"/>
+              </a:ext>
+            </a:extLst>
+          </p:cNvPr>
+          <p:cNvSpPr>
+            <a:spLocks noGrp="1" noRot="1" noChangeAspect="1" noChangeArrowheads="1" noTextEdit="1"/>
+          </p:cNvSpPr>
+          <p:nvPr>
+            <p:ph type="sldImg"/>
+          </p:nvPr>
+        </p:nvSpPr>
+        <p:spPr>
+          <a:ln/>
+        </p:spPr>
+      </p:sp>
+      <p:sp>
+        <p:nvSpPr>
+          <p:cNvPr id="67588" name="Rectangle 3">
+            <a:extLst>
+              <a:ext uri="{FF2B5EF4-FFF2-40B4-BE49-F238E27FC236}">
+                <a16:creationId xmlns:a16="http://schemas.microsoft.com/office/drawing/2014/main" id="{61AD62ED-4F3B-43C0-87C2-FC10A2DC9A9B}"/>
+              </a:ext>
+            </a:extLst>
+          </p:cNvPr>
+          <p:cNvSpPr>
+            <a:spLocks noGrp="1" noChangeArrowheads="1"/>
+          </p:cNvSpPr>
+          <p:nvPr>
+            <p:ph type="body" idx="1"/>
+          </p:nvPr>
+        </p:nvSpPr>
+        <p:spPr>
+          <a:noFill/>
+          <a:extLst>
+            <a:ext uri="{909E8E84-426E-40DD-AFC4-6F175D3DCCD1}">
+              <a14:hiddenFill xmlns:a14="http://schemas.microsoft.com/office/drawing/2010/main">
+                <a:solidFill>
+                  <a:srgbClr val="FFFFFF"/>
+                </a:solidFill>
+              </a14:hiddenFill>
+            </a:ext>
+            <a:ext uri="{91240B29-F687-4F45-9708-019B960494DF}">
+              <a14:hiddenLine xmlns:a14="http://schemas.microsoft.com/office/drawing/2010/main" w="9525">
+                <a:solidFill>
+                  <a:srgbClr val="000000"/>
+                </a:solidFill>
+                <a:miter lim="800000"/>
+                <a:headEnd/>
+                <a:tailEnd/>
+              </a14:hiddenLine>
+            </a:ext>
+          </a:extLst>
+        </p:spPr>
+        <p:txBody>
+          <a:bodyPr/>
+          <a:lstStyle/>
+          <a:p>
+            <a:pPr eaLnBrk="1" hangingPunct="1"/>
+            <a:endParaRPr lang="zh-CN" altLang="zh-CN">
+              <a:latin typeface="Arial" panose="020B0604020202020204" pitchFamily="34" charset="0"/>
+            </a:endParaRPr>
+          </a:p>
+        </p:txBody>
+      </p:sp>
+    </p:spTree>
+    <p:extLst>
+      <p:ext uri="{BB962C8B-B14F-4D97-AF65-F5344CB8AC3E}">
+        <p14:creationId xmlns:p14="http://schemas.microsoft.com/office/powerpoint/2010/main" val="2811795021"/>
+      </p:ext>
+    </p:extLst>
+  </p:cSld>
+  <p:clrMapOvr>
+    <a:masterClrMapping/>
+  </p:clrMapOvr>
+</p:notes>
+</file>
+
+<file path=ppt/notesSlides/notesSlide59.xml><?xml version="1.0" encoding="utf-8"?>
+<p:notes xmlns:a="http://schemas.openxmlformats.org/drawingml/2006/main" xmlns:r="http://schemas.openxmlformats.org/officeDocument/2006/relationships" xmlns:p="http://schemas.openxmlformats.org/presentationml/2006/main">
+  <p:cSld>
+    <p:spTree>
+      <p:nvGrpSpPr>
+        <p:cNvPr id="1" name=""/>
+        <p:cNvGrpSpPr/>
+        <p:nvPr/>
+      </p:nvGrpSpPr>
+      <p:grpSpPr>
+        <a:xfrm>
+          <a:off x="0" y="0"/>
+          <a:ext cx="0" cy="0"/>
+          <a:chOff x="0" y="0"/>
+          <a:chExt cx="0" cy="0"/>
+        </a:xfrm>
+      </p:grpSpPr>
+      <p:sp>
+        <p:nvSpPr>
+          <p:cNvPr id="67586" name="Rectangle 7">
+            <a:extLst>
+              <a:ext uri="{FF2B5EF4-FFF2-40B4-BE49-F238E27FC236}">
+                <a16:creationId xmlns:a16="http://schemas.microsoft.com/office/drawing/2014/main" id="{C3416AB8-FE7C-448F-B3FB-3B09CEC98CF3}"/>
+              </a:ext>
+            </a:extLst>
+          </p:cNvPr>
+          <p:cNvSpPr>
+            <a:spLocks noGrp="1" noChangeArrowheads="1"/>
+          </p:cNvSpPr>
+          <p:nvPr>
+            <p:ph type="sldNum" sz="quarter" idx="5"/>
+          </p:nvPr>
+        </p:nvSpPr>
+        <p:spPr>
+          <a:noFill/>
+          <a:extLst>
+            <a:ext uri="{909E8E84-426E-40DD-AFC4-6F175D3DCCD1}">
+              <a14:hiddenFill xmlns:a14="http://schemas.microsoft.com/office/drawing/2010/main">
+                <a:solidFill>
+                  <a:srgbClr val="FFFFFF"/>
+                </a:solidFill>
+              </a14:hiddenFill>
+            </a:ext>
+            <a:ext uri="{91240B29-F687-4F45-9708-019B960494DF}">
+              <a14:hiddenLine xmlns:a14="http://schemas.microsoft.com/office/drawing/2010/main" w="9525">
+                <a:solidFill>
+                  <a:srgbClr val="000000"/>
+                </a:solidFill>
+                <a:miter lim="800000"/>
+                <a:headEnd/>
+                <a:tailEnd/>
+              </a14:hiddenLine>
+            </a:ext>
+          </a:extLst>
+        </p:spPr>
+        <p:txBody>
+          <a:bodyPr/>
+          <a:lstStyle>
+            <a:lvl1pPr>
+              <a:spcBef>
+                <a:spcPct val="30000"/>
+              </a:spcBef>
+              <a:defRPr sz="1200">
+                <a:solidFill>
+                  <a:schemeClr val="tx1"/>
+                </a:solidFill>
+                <a:latin typeface="Arial" panose="020B0604020202020204" pitchFamily="34" charset="0"/>
+                <a:ea typeface="宋体" panose="02010600030101010101" pitchFamily="2" charset="-122"/>
+              </a:defRPr>
+            </a:lvl1pPr>
+            <a:lvl2pPr marL="742950" indent="-285750">
+              <a:spcBef>
+                <a:spcPct val="30000"/>
+              </a:spcBef>
+              <a:defRPr sz="1200">
+                <a:solidFill>
+                  <a:schemeClr val="tx1"/>
+                </a:solidFill>
+                <a:latin typeface="Arial" panose="020B0604020202020204" pitchFamily="34" charset="0"/>
+                <a:ea typeface="宋体" panose="02010600030101010101" pitchFamily="2" charset="-122"/>
+              </a:defRPr>
+            </a:lvl2pPr>
+            <a:lvl3pPr marL="1143000" indent="-228600">
+              <a:spcBef>
+                <a:spcPct val="30000"/>
+              </a:spcBef>
+              <a:defRPr sz="1200">
+                <a:solidFill>
+                  <a:schemeClr val="tx1"/>
+                </a:solidFill>
+                <a:latin typeface="Arial" panose="020B0604020202020204" pitchFamily="34" charset="0"/>
+                <a:ea typeface="宋体" panose="02010600030101010101" pitchFamily="2" charset="-122"/>
+              </a:defRPr>
+            </a:lvl3pPr>
+            <a:lvl4pPr marL="1600200" indent="-228600">
+              <a:spcBef>
+                <a:spcPct val="30000"/>
+              </a:spcBef>
+              <a:defRPr sz="1200">
+                <a:solidFill>
+                  <a:schemeClr val="tx1"/>
+                </a:solidFill>
+                <a:latin typeface="Arial" panose="020B0604020202020204" pitchFamily="34" charset="0"/>
+                <a:ea typeface="宋体" panose="02010600030101010101" pitchFamily="2" charset="-122"/>
+              </a:defRPr>
+            </a:lvl4pPr>
+            <a:lvl5pPr marL="2057400" indent="-228600">
+              <a:spcBef>
+                <a:spcPct val="30000"/>
+              </a:spcBef>
+              <a:defRPr sz="1200">
+                <a:solidFill>
+                  <a:schemeClr val="tx1"/>
+                </a:solidFill>
+                <a:latin typeface="Arial" panose="020B0604020202020204" pitchFamily="34" charset="0"/>
+                <a:ea typeface="宋体" panose="02010600030101010101" pitchFamily="2" charset="-122"/>
+              </a:defRPr>
+            </a:lvl5pPr>
+            <a:lvl6pPr marL="2514600" indent="-228600" eaLnBrk="0" fontAlgn="base" hangingPunct="0">
+              <a:spcBef>
+                <a:spcPct val="30000"/>
+              </a:spcBef>
+              <a:spcAft>
+                <a:spcPct val="0"/>
+              </a:spcAft>
+              <a:defRPr sz="1200">
+                <a:solidFill>
+                  <a:schemeClr val="tx1"/>
+                </a:solidFill>
+                <a:latin typeface="Arial" panose="020B0604020202020204" pitchFamily="34" charset="0"/>
+                <a:ea typeface="宋体" panose="02010600030101010101" pitchFamily="2" charset="-122"/>
+              </a:defRPr>
+            </a:lvl6pPr>
+            <a:lvl7pPr marL="2971800" indent="-228600" eaLnBrk="0" fontAlgn="base" hangingPunct="0">
+              <a:spcBef>
+                <a:spcPct val="30000"/>
+              </a:spcBef>
+              <a:spcAft>
+                <a:spcPct val="0"/>
+              </a:spcAft>
+              <a:defRPr sz="1200">
+                <a:solidFill>
+                  <a:schemeClr val="tx1"/>
+                </a:solidFill>
+                <a:latin typeface="Arial" panose="020B0604020202020204" pitchFamily="34" charset="0"/>
+                <a:ea typeface="宋体" panose="02010600030101010101" pitchFamily="2" charset="-122"/>
+              </a:defRPr>
+            </a:lvl7pPr>
+            <a:lvl8pPr marL="3429000" indent="-228600" eaLnBrk="0" fontAlgn="base" hangingPunct="0">
+              <a:spcBef>
+                <a:spcPct val="30000"/>
+              </a:spcBef>
+              <a:spcAft>
+                <a:spcPct val="0"/>
+              </a:spcAft>
+              <a:defRPr sz="1200">
+                <a:solidFill>
+                  <a:schemeClr val="tx1"/>
+                </a:solidFill>
+                <a:latin typeface="Arial" panose="020B0604020202020204" pitchFamily="34" charset="0"/>
+                <a:ea typeface="宋体" panose="02010600030101010101" pitchFamily="2" charset="-122"/>
+              </a:defRPr>
+            </a:lvl8pPr>
+            <a:lvl9pPr marL="3886200" indent="-228600" eaLnBrk="0" fontAlgn="base" hangingPunct="0">
+              <a:spcBef>
+                <a:spcPct val="30000"/>
+              </a:spcBef>
+              <a:spcAft>
+                <a:spcPct val="0"/>
+              </a:spcAft>
+              <a:defRPr sz="1200">
+                <a:solidFill>
+                  <a:schemeClr val="tx1"/>
+                </a:solidFill>
+                <a:latin typeface="Arial" panose="020B0604020202020204" pitchFamily="34" charset="0"/>
+                <a:ea typeface="宋体" panose="02010600030101010101" pitchFamily="2" charset="-122"/>
+              </a:defRPr>
+            </a:lvl9pPr>
+          </a:lstStyle>
+          <a:p>
+            <a:pPr>
+              <a:spcBef>
+                <a:spcPct val="0"/>
+              </a:spcBef>
+            </a:pPr>
+            <a:fld id="{1CF1D127-6EB4-47AD-8A7D-E6B0ADC3D512}" type="slidenum">
+              <a:rPr lang="en-US" altLang="zh-CN"/>
+              <a:pPr>
+                <a:spcBef>
+                  <a:spcPct val="0"/>
+                </a:spcBef>
+              </a:pPr>
+              <a:t>61</a:t>
+            </a:fld>
+            <a:endParaRPr lang="en-US" altLang="zh-CN"/>
+          </a:p>
+        </p:txBody>
+      </p:sp>
+      <p:sp>
+        <p:nvSpPr>
+          <p:cNvPr id="67587" name="Rectangle 2">
+            <a:extLst>
+              <a:ext uri="{FF2B5EF4-FFF2-40B4-BE49-F238E27FC236}">
+                <a16:creationId xmlns:a16="http://schemas.microsoft.com/office/drawing/2014/main" id="{D641FF14-1514-4082-A14F-41B970A9A422}"/>
+              </a:ext>
+            </a:extLst>
+          </p:cNvPr>
+          <p:cNvSpPr>
+            <a:spLocks noGrp="1" noRot="1" noChangeAspect="1" noChangeArrowheads="1" noTextEdit="1"/>
+          </p:cNvSpPr>
+          <p:nvPr>
+            <p:ph type="sldImg"/>
+          </p:nvPr>
+        </p:nvSpPr>
+        <p:spPr>
+          <a:ln/>
+        </p:spPr>
+      </p:sp>
+      <p:sp>
+        <p:nvSpPr>
+          <p:cNvPr id="67588" name="Rectangle 3">
+            <a:extLst>
+              <a:ext uri="{FF2B5EF4-FFF2-40B4-BE49-F238E27FC236}">
+                <a16:creationId xmlns:a16="http://schemas.microsoft.com/office/drawing/2014/main" id="{61AD62ED-4F3B-43C0-87C2-FC10A2DC9A9B}"/>
+              </a:ext>
+            </a:extLst>
+          </p:cNvPr>
+          <p:cNvSpPr>
+            <a:spLocks noGrp="1" noChangeArrowheads="1"/>
+          </p:cNvSpPr>
+          <p:nvPr>
+            <p:ph type="body" idx="1"/>
+          </p:nvPr>
+        </p:nvSpPr>
+        <p:spPr>
+          <a:noFill/>
+          <a:extLst>
+            <a:ext uri="{909E8E84-426E-40DD-AFC4-6F175D3DCCD1}">
+              <a14:hiddenFill xmlns:a14="http://schemas.microsoft.com/office/drawing/2010/main">
+                <a:solidFill>
+                  <a:srgbClr val="FFFFFF"/>
+                </a:solidFill>
+              </a14:hiddenFill>
+            </a:ext>
+            <a:ext uri="{91240B29-F687-4F45-9708-019B960494DF}">
+              <a14:hiddenLine xmlns:a14="http://schemas.microsoft.com/office/drawing/2010/main" w="9525">
+                <a:solidFill>
+                  <a:srgbClr val="000000"/>
+                </a:solidFill>
+                <a:miter lim="800000"/>
+                <a:headEnd/>
+                <a:tailEnd/>
+              </a14:hiddenLine>
+            </a:ext>
+          </a:extLst>
+        </p:spPr>
+        <p:txBody>
+          <a:bodyPr/>
+          <a:lstStyle/>
+          <a:p>
+            <a:pPr eaLnBrk="1" hangingPunct="1"/>
+            <a:endParaRPr lang="zh-CN" altLang="zh-CN">
+              <a:latin typeface="Arial" panose="020B0604020202020204" pitchFamily="34" charset="0"/>
+            </a:endParaRPr>
+          </a:p>
+        </p:txBody>
+      </p:sp>
+    </p:spTree>
+    <p:extLst>
+      <p:ext uri="{BB962C8B-B14F-4D97-AF65-F5344CB8AC3E}">
+        <p14:creationId xmlns:p14="http://schemas.microsoft.com/office/powerpoint/2010/main" val="1505126468"/>
+      </p:ext>
+    </p:extLst>
   </p:cSld>
   <p:clrMapOvr>
     <a:masterClrMapping/>
@@ -15112,6 +16232,286 @@
         </p:txBody>
       </p:sp>
     </p:spTree>
+  </p:cSld>
+  <p:clrMapOvr>
+    <a:masterClrMapping/>
+  </p:clrMapOvr>
+</p:notes>
+</file>
+
+<file path=ppt/notesSlides/notesSlide60.xml><?xml version="1.0" encoding="utf-8"?>
+<p:notes xmlns:a="http://schemas.openxmlformats.org/drawingml/2006/main" xmlns:r="http://schemas.openxmlformats.org/officeDocument/2006/relationships" xmlns:p="http://schemas.openxmlformats.org/presentationml/2006/main">
+  <p:cSld>
+    <p:spTree>
+      <p:nvGrpSpPr>
+        <p:cNvPr id="1" name=""/>
+        <p:cNvGrpSpPr/>
+        <p:nvPr/>
+      </p:nvGrpSpPr>
+      <p:grpSpPr>
+        <a:xfrm>
+          <a:off x="0" y="0"/>
+          <a:ext cx="0" cy="0"/>
+          <a:chOff x="0" y="0"/>
+          <a:chExt cx="0" cy="0"/>
+        </a:xfrm>
+      </p:grpSpPr>
+      <p:sp>
+        <p:nvSpPr>
+          <p:cNvPr id="67586" name="Rectangle 7">
+            <a:extLst>
+              <a:ext uri="{FF2B5EF4-FFF2-40B4-BE49-F238E27FC236}">
+                <a16:creationId xmlns:a16="http://schemas.microsoft.com/office/drawing/2014/main" id="{C3416AB8-FE7C-448F-B3FB-3B09CEC98CF3}"/>
+              </a:ext>
+            </a:extLst>
+          </p:cNvPr>
+          <p:cNvSpPr>
+            <a:spLocks noGrp="1" noChangeArrowheads="1"/>
+          </p:cNvSpPr>
+          <p:nvPr>
+            <p:ph type="sldNum" sz="quarter" idx="5"/>
+          </p:nvPr>
+        </p:nvSpPr>
+        <p:spPr>
+          <a:noFill/>
+          <a:extLst>
+            <a:ext uri="{909E8E84-426E-40DD-AFC4-6F175D3DCCD1}">
+              <a14:hiddenFill xmlns:a14="http://schemas.microsoft.com/office/drawing/2010/main">
+                <a:solidFill>
+                  <a:srgbClr val="FFFFFF"/>
+                </a:solidFill>
+              </a14:hiddenFill>
+            </a:ext>
+            <a:ext uri="{91240B29-F687-4F45-9708-019B960494DF}">
+              <a14:hiddenLine xmlns:a14="http://schemas.microsoft.com/office/drawing/2010/main" w="9525">
+                <a:solidFill>
+                  <a:srgbClr val="000000"/>
+                </a:solidFill>
+                <a:miter lim="800000"/>
+                <a:headEnd/>
+                <a:tailEnd/>
+              </a14:hiddenLine>
+            </a:ext>
+          </a:extLst>
+        </p:spPr>
+        <p:txBody>
+          <a:bodyPr/>
+          <a:lstStyle>
+            <a:lvl1pPr>
+              <a:spcBef>
+                <a:spcPct val="30000"/>
+              </a:spcBef>
+              <a:defRPr sz="1200">
+                <a:solidFill>
+                  <a:schemeClr val="tx1"/>
+                </a:solidFill>
+                <a:latin typeface="Arial" panose="020B0604020202020204" pitchFamily="34" charset="0"/>
+                <a:ea typeface="宋体" panose="02010600030101010101" pitchFamily="2" charset="-122"/>
+              </a:defRPr>
+            </a:lvl1pPr>
+            <a:lvl2pPr marL="742950" indent="-285750">
+              <a:spcBef>
+                <a:spcPct val="30000"/>
+              </a:spcBef>
+              <a:defRPr sz="1200">
+                <a:solidFill>
+                  <a:schemeClr val="tx1"/>
+                </a:solidFill>
+                <a:latin typeface="Arial" panose="020B0604020202020204" pitchFamily="34" charset="0"/>
+                <a:ea typeface="宋体" panose="02010600030101010101" pitchFamily="2" charset="-122"/>
+              </a:defRPr>
+            </a:lvl2pPr>
+            <a:lvl3pPr marL="1143000" indent="-228600">
+              <a:spcBef>
+                <a:spcPct val="30000"/>
+              </a:spcBef>
+              <a:defRPr sz="1200">
+                <a:solidFill>
+                  <a:schemeClr val="tx1"/>
+                </a:solidFill>
+                <a:latin typeface="Arial" panose="020B0604020202020204" pitchFamily="34" charset="0"/>
+                <a:ea typeface="宋体" panose="02010600030101010101" pitchFamily="2" charset="-122"/>
+              </a:defRPr>
+            </a:lvl3pPr>
+            <a:lvl4pPr marL="1600200" indent="-228600">
+              <a:spcBef>
+                <a:spcPct val="30000"/>
+              </a:spcBef>
+              <a:defRPr sz="1200">
+                <a:solidFill>
+                  <a:schemeClr val="tx1"/>
+                </a:solidFill>
+                <a:latin typeface="Arial" panose="020B0604020202020204" pitchFamily="34" charset="0"/>
+                <a:ea typeface="宋体" panose="02010600030101010101" pitchFamily="2" charset="-122"/>
+              </a:defRPr>
+            </a:lvl4pPr>
+            <a:lvl5pPr marL="2057400" indent="-228600">
+              <a:spcBef>
+                <a:spcPct val="30000"/>
+              </a:spcBef>
+              <a:defRPr sz="1200">
+                <a:solidFill>
+                  <a:schemeClr val="tx1"/>
+                </a:solidFill>
+                <a:latin typeface="Arial" panose="020B0604020202020204" pitchFamily="34" charset="0"/>
+                <a:ea typeface="宋体" panose="02010600030101010101" pitchFamily="2" charset="-122"/>
+              </a:defRPr>
+            </a:lvl5pPr>
+            <a:lvl6pPr marL="2514600" indent="-228600" eaLnBrk="0" fontAlgn="base" hangingPunct="0">
+              <a:spcBef>
+                <a:spcPct val="30000"/>
+              </a:spcBef>
+              <a:spcAft>
+                <a:spcPct val="0"/>
+              </a:spcAft>
+              <a:defRPr sz="1200">
+                <a:solidFill>
+                  <a:schemeClr val="tx1"/>
+                </a:solidFill>
+                <a:latin typeface="Arial" panose="020B0604020202020204" pitchFamily="34" charset="0"/>
+                <a:ea typeface="宋体" panose="02010600030101010101" pitchFamily="2" charset="-122"/>
+              </a:defRPr>
+            </a:lvl6pPr>
+            <a:lvl7pPr marL="2971800" indent="-228600" eaLnBrk="0" fontAlgn="base" hangingPunct="0">
+              <a:spcBef>
+                <a:spcPct val="30000"/>
+              </a:spcBef>
+              <a:spcAft>
+                <a:spcPct val="0"/>
+              </a:spcAft>
+              <a:defRPr sz="1200">
+                <a:solidFill>
+                  <a:schemeClr val="tx1"/>
+                </a:solidFill>
+                <a:latin typeface="Arial" panose="020B0604020202020204" pitchFamily="34" charset="0"/>
+                <a:ea typeface="宋体" panose="02010600030101010101" pitchFamily="2" charset="-122"/>
+              </a:defRPr>
+            </a:lvl7pPr>
+            <a:lvl8pPr marL="3429000" indent="-228600" eaLnBrk="0" fontAlgn="base" hangingPunct="0">
+              <a:spcBef>
+                <a:spcPct val="30000"/>
+              </a:spcBef>
+              <a:spcAft>
+                <a:spcPct val="0"/>
+              </a:spcAft>
+              <a:defRPr sz="1200">
+                <a:solidFill>
+                  <a:schemeClr val="tx1"/>
+                </a:solidFill>
+                <a:latin typeface="Arial" panose="020B0604020202020204" pitchFamily="34" charset="0"/>
+                <a:ea typeface="宋体" panose="02010600030101010101" pitchFamily="2" charset="-122"/>
+              </a:defRPr>
+            </a:lvl8pPr>
+            <a:lvl9pPr marL="3886200" indent="-228600" eaLnBrk="0" fontAlgn="base" hangingPunct="0">
+              <a:spcBef>
+                <a:spcPct val="30000"/>
+              </a:spcBef>
+              <a:spcAft>
+                <a:spcPct val="0"/>
+              </a:spcAft>
+              <a:defRPr sz="1200">
+                <a:solidFill>
+                  <a:schemeClr val="tx1"/>
+                </a:solidFill>
+                <a:latin typeface="Arial" panose="020B0604020202020204" pitchFamily="34" charset="0"/>
+                <a:ea typeface="宋体" panose="02010600030101010101" pitchFamily="2" charset="-122"/>
+              </a:defRPr>
+            </a:lvl9pPr>
+          </a:lstStyle>
+          <a:p>
+            <a:pPr>
+              <a:spcBef>
+                <a:spcPct val="0"/>
+              </a:spcBef>
+            </a:pPr>
+            <a:fld id="{1CF1D127-6EB4-47AD-8A7D-E6B0ADC3D512}" type="slidenum">
+              <a:rPr lang="en-US" altLang="zh-CN"/>
+              <a:pPr>
+                <a:spcBef>
+                  <a:spcPct val="0"/>
+                </a:spcBef>
+              </a:pPr>
+              <a:t>62</a:t>
+            </a:fld>
+            <a:endParaRPr lang="en-US" altLang="zh-CN"/>
+          </a:p>
+        </p:txBody>
+      </p:sp>
+      <p:sp>
+        <p:nvSpPr>
+          <p:cNvPr id="67587" name="Rectangle 2">
+            <a:extLst>
+              <a:ext uri="{FF2B5EF4-FFF2-40B4-BE49-F238E27FC236}">
+                <a16:creationId xmlns:a16="http://schemas.microsoft.com/office/drawing/2014/main" id="{D641FF14-1514-4082-A14F-41B970A9A422}"/>
+              </a:ext>
+            </a:extLst>
+          </p:cNvPr>
+          <p:cNvSpPr>
+            <a:spLocks noGrp="1" noRot="1" noChangeAspect="1" noChangeArrowheads="1" noTextEdit="1"/>
+          </p:cNvSpPr>
+          <p:nvPr>
+            <p:ph type="sldImg"/>
+          </p:nvPr>
+        </p:nvSpPr>
+        <p:spPr>
+          <a:ln/>
+        </p:spPr>
+      </p:sp>
+      <p:sp>
+        <p:nvSpPr>
+          <p:cNvPr id="67588" name="Rectangle 3">
+            <a:extLst>
+              <a:ext uri="{FF2B5EF4-FFF2-40B4-BE49-F238E27FC236}">
+                <a16:creationId xmlns:a16="http://schemas.microsoft.com/office/drawing/2014/main" id="{61AD62ED-4F3B-43C0-87C2-FC10A2DC9A9B}"/>
+              </a:ext>
+            </a:extLst>
+          </p:cNvPr>
+          <p:cNvSpPr>
+            <a:spLocks noGrp="1" noChangeArrowheads="1"/>
+          </p:cNvSpPr>
+          <p:nvPr>
+            <p:ph type="body" idx="1"/>
+          </p:nvPr>
+        </p:nvSpPr>
+        <p:spPr>
+          <a:noFill/>
+          <a:extLst>
+            <a:ext uri="{909E8E84-426E-40DD-AFC4-6F175D3DCCD1}">
+              <a14:hiddenFill xmlns:a14="http://schemas.microsoft.com/office/drawing/2010/main">
+                <a:solidFill>
+                  <a:srgbClr val="FFFFFF"/>
+                </a:solidFill>
+              </a14:hiddenFill>
+            </a:ext>
+            <a:ext uri="{91240B29-F687-4F45-9708-019B960494DF}">
+              <a14:hiddenLine xmlns:a14="http://schemas.microsoft.com/office/drawing/2010/main" w="9525">
+                <a:solidFill>
+                  <a:srgbClr val="000000"/>
+                </a:solidFill>
+                <a:miter lim="800000"/>
+                <a:headEnd/>
+                <a:tailEnd/>
+              </a14:hiddenLine>
+            </a:ext>
+          </a:extLst>
+        </p:spPr>
+        <p:txBody>
+          <a:bodyPr/>
+          <a:lstStyle/>
+          <a:p>
+            <a:pPr eaLnBrk="1" hangingPunct="1"/>
+            <a:endParaRPr lang="zh-CN" altLang="zh-CN">
+              <a:latin typeface="Arial" panose="020B0604020202020204" pitchFamily="34" charset="0"/>
+            </a:endParaRPr>
+          </a:p>
+        </p:txBody>
+      </p:sp>
+    </p:spTree>
+    <p:extLst>
+      <p:ext uri="{BB962C8B-B14F-4D97-AF65-F5344CB8AC3E}">
+        <p14:creationId xmlns:p14="http://schemas.microsoft.com/office/powerpoint/2010/main" val="1005444356"/>
+      </p:ext>
+    </p:extLst>
   </p:cSld>
   <p:clrMapOvr>
     <a:masterClrMapping/>
@@ -17344,7 +18744,7 @@
           <a:p>
             <a:fld id="{48A87A34-81AB-432B-8DAE-1953F412C126}" type="datetimeFigureOut">
               <a:rPr lang="en-US" smtClean="0"/>
-              <a:t>3/4/2026</a:t>
+              <a:t>3/8/2026</a:t>
             </a:fld>
             <a:endParaRPr lang="en-US" dirty="0"/>
           </a:p>
@@ -17514,7 +18914,7 @@
           <a:p>
             <a:fld id="{48A87A34-81AB-432B-8DAE-1953F412C126}" type="datetimeFigureOut">
               <a:rPr lang="en-US" smtClean="0"/>
-              <a:t>3/4/2026</a:t>
+              <a:t>3/8/2026</a:t>
             </a:fld>
             <a:endParaRPr lang="en-US" dirty="0"/>
           </a:p>
@@ -17758,7 +19158,7 @@
           <a:p>
             <a:fld id="{48A87A34-81AB-432B-8DAE-1953F412C126}" type="datetimeFigureOut">
               <a:rPr lang="en-US" smtClean="0"/>
-              <a:t>3/4/2026</a:t>
+              <a:t>3/8/2026</a:t>
             </a:fld>
             <a:endParaRPr lang="en-US" dirty="0"/>
           </a:p>
@@ -17990,7 +19390,7 @@
           <a:p>
             <a:fld id="{48A87A34-81AB-432B-8DAE-1953F412C126}" type="datetimeFigureOut">
               <a:rPr lang="en-US" smtClean="0"/>
-              <a:t>3/4/2026</a:t>
+              <a:t>3/8/2026</a:t>
             </a:fld>
             <a:endParaRPr lang="en-US" dirty="0"/>
           </a:p>
@@ -18461,7 +19861,7 @@
           <a:p>
             <a:fld id="{48A87A34-81AB-432B-8DAE-1953F412C126}" type="datetimeFigureOut">
               <a:rPr lang="en-US" smtClean="0"/>
-              <a:t>3/4/2026</a:t>
+              <a:t>3/8/2026</a:t>
             </a:fld>
             <a:endParaRPr lang="en-US" dirty="0"/>
           </a:p>
@@ -18579,7 +19979,7 @@
           <a:p>
             <a:fld id="{48A87A34-81AB-432B-8DAE-1953F412C126}" type="datetimeFigureOut">
               <a:rPr lang="en-US" smtClean="0"/>
-              <a:t>3/4/2026</a:t>
+              <a:t>3/8/2026</a:t>
             </a:fld>
             <a:endParaRPr lang="en-US" dirty="0"/>
           </a:p>
@@ -18674,7 +20074,7 @@
           <a:p>
             <a:fld id="{48A87A34-81AB-432B-8DAE-1953F412C126}" type="datetimeFigureOut">
               <a:rPr lang="en-US" smtClean="0"/>
-              <a:t>3/4/2026</a:t>
+              <a:t>3/8/2026</a:t>
             </a:fld>
             <a:endParaRPr lang="en-US" dirty="0"/>
           </a:p>
@@ -18951,7 +20351,7 @@
           <a:p>
             <a:fld id="{48A87A34-81AB-432B-8DAE-1953F412C126}" type="datetimeFigureOut">
               <a:rPr lang="en-US" smtClean="0"/>
-              <a:t>3/4/2026</a:t>
+              <a:t>3/8/2026</a:t>
             </a:fld>
             <a:endParaRPr lang="en-US" dirty="0"/>
           </a:p>
@@ -19209,7 +20609,7 @@
             <a:fld id="{48A87A34-81AB-432B-8DAE-1953F412C126}" type="datetimeFigureOut">
               <a:rPr lang="en-US" smtClean="0"/>
               <a:pPr/>
-              <a:t>3/4/2026</a:t>
+              <a:t>3/8/2026</a:t>
             </a:fld>
             <a:endParaRPr lang="en-US" dirty="0"/>
           </a:p>
@@ -19379,7 +20779,7 @@
           <a:p>
             <a:fld id="{48A87A34-81AB-432B-8DAE-1953F412C126}" type="datetimeFigureOut">
               <a:rPr lang="en-US" smtClean="0"/>
-              <a:t>3/4/2026</a:t>
+              <a:t>3/8/2026</a:t>
             </a:fld>
             <a:endParaRPr lang="en-US" dirty="0"/>
           </a:p>
@@ -19559,7 +20959,7 @@
           <a:p>
             <a:fld id="{48A87A34-81AB-432B-8DAE-1953F412C126}" type="datetimeFigureOut">
               <a:rPr lang="en-US" smtClean="0"/>
-              <a:t>3/4/2026</a:t>
+              <a:t>3/8/2026</a:t>
             </a:fld>
             <a:endParaRPr lang="en-US" dirty="0"/>
           </a:p>
@@ -21906,7 +23306,7 @@
           <a:p>
             <a:fld id="{C764DE79-268F-4C1A-8933-263129D2AF90}" type="datetimeFigureOut">
               <a:rPr lang="en-US" dirty="0"/>
-              <a:t>3/4/2026</a:t>
+              <a:t>3/8/2026</a:t>
             </a:fld>
             <a:endParaRPr lang="en-US" dirty="0"/>
           </a:p>
@@ -40263,6 +41663,58 @@
           </a:extLst>
         </p:spPr>
       </p:pic>
+      <p:sp>
+        <p:nvSpPr>
+          <p:cNvPr id="2" name="矩形 1">
+            <a:extLst>
+              <a:ext uri="{FF2B5EF4-FFF2-40B4-BE49-F238E27FC236}">
+                <a16:creationId xmlns:a16="http://schemas.microsoft.com/office/drawing/2014/main" id="{E53B5B17-9D6B-4719-A7C5-1EF85B482316}"/>
+              </a:ext>
+            </a:extLst>
+          </p:cNvPr>
+          <p:cNvSpPr/>
+          <p:nvPr/>
+        </p:nvSpPr>
+        <p:spPr>
+          <a:xfrm>
+            <a:off x="1331640" y="1268760"/>
+            <a:ext cx="1656000" cy="288000"/>
+          </a:xfrm>
+          <a:prstGeom prst="rect">
+            <a:avLst/>
+          </a:prstGeom>
+          <a:noFill/>
+          <a:ln>
+            <a:solidFill>
+              <a:srgbClr val="FF0000"/>
+            </a:solidFill>
+          </a:ln>
+        </p:spPr>
+        <p:style>
+          <a:lnRef idx="2">
+            <a:schemeClr val="accent1">
+              <a:shade val="50000"/>
+            </a:schemeClr>
+          </a:lnRef>
+          <a:fillRef idx="1">
+            <a:schemeClr val="accent1"/>
+          </a:fillRef>
+          <a:effectRef idx="0">
+            <a:schemeClr val="accent1"/>
+          </a:effectRef>
+          <a:fontRef idx="minor">
+            <a:schemeClr val="lt1"/>
+          </a:fontRef>
+        </p:style>
+        <p:txBody>
+          <a:bodyPr rtlCol="0" anchor="ctr"/>
+          <a:lstStyle/>
+          <a:p>
+            <a:pPr algn="ctr"/>
+            <a:endParaRPr lang="zh-CN" altLang="en-US"/>
+          </a:p>
+        </p:txBody>
+      </p:sp>
     </p:spTree>
     <p:extLst>
       <p:ext uri="{BB962C8B-B14F-4D97-AF65-F5344CB8AC3E}">
@@ -40295,278 +41747,6 @@
       </p:grpSpPr>
       <p:sp>
         <p:nvSpPr>
-          <p:cNvPr id="64514" name="Rectangle 2">
-            <a:extLst>
-              <a:ext uri="{FF2B5EF4-FFF2-40B4-BE49-F238E27FC236}">
-                <a16:creationId xmlns:a16="http://schemas.microsoft.com/office/drawing/2014/main" id="{1C9B6BD9-3FA1-4CA2-8312-7B390F0B4FB1}"/>
-              </a:ext>
-            </a:extLst>
-          </p:cNvPr>
-          <p:cNvSpPr>
-            <a:spLocks noGrp="1" noChangeArrowheads="1"/>
-          </p:cNvSpPr>
-          <p:nvPr>
-            <p:ph type="title"/>
-          </p:nvPr>
-        </p:nvSpPr>
-        <p:spPr>
-          <a:xfrm>
-            <a:off x="457200" y="510081"/>
-            <a:ext cx="8229600" cy="1325563"/>
-          </a:xfrm>
-        </p:spPr>
-        <p:txBody>
-          <a:bodyPr/>
-          <a:lstStyle/>
-          <a:p>
-            <a:pPr algn="l" eaLnBrk="1" hangingPunct="1"/>
-            <a:r>
-              <a:rPr lang="en-US" altLang="zh-CN" sz="4000" b="1" dirty="0"/>
-              <a:t>2.4.3  </a:t>
-            </a:r>
-            <a:r>
-              <a:rPr lang="zh-CN" altLang="en-US" sz="4000" b="1" dirty="0"/>
-              <a:t>项目章程的颁布和合同的管理</a:t>
-            </a:r>
-          </a:p>
-        </p:txBody>
-      </p:sp>
-      <p:sp>
-        <p:nvSpPr>
-          <p:cNvPr id="64515" name="Rectangle 3">
-            <a:extLst>
-              <a:ext uri="{FF2B5EF4-FFF2-40B4-BE49-F238E27FC236}">
-                <a16:creationId xmlns:a16="http://schemas.microsoft.com/office/drawing/2014/main" id="{085F0872-A2C2-4008-81F8-2EB948266EDF}"/>
-              </a:ext>
-            </a:extLst>
-          </p:cNvPr>
-          <p:cNvSpPr>
-            <a:spLocks noGrp="1" noChangeArrowheads="1"/>
-          </p:cNvSpPr>
-          <p:nvPr>
-            <p:ph idx="1"/>
-          </p:nvPr>
-        </p:nvSpPr>
-        <p:spPr>
-          <a:xfrm>
-            <a:off x="539552" y="1825624"/>
-            <a:ext cx="8280920" cy="4483695"/>
-          </a:xfrm>
-        </p:spPr>
-        <p:txBody>
-          <a:bodyPr>
-            <a:noAutofit/>
-          </a:bodyPr>
-          <a:lstStyle/>
-          <a:p>
-            <a:pPr marL="0" indent="0" algn="just">
-              <a:buNone/>
-            </a:pPr>
-            <a:r>
-              <a:rPr lang="zh-CN" altLang="en-US" sz="2400" dirty="0"/>
-              <a:t>五大管理过程组：</a:t>
-            </a:r>
-            <a:endParaRPr lang="en-US" altLang="zh-CN" sz="2400" dirty="0"/>
-          </a:p>
-          <a:p>
-            <a:pPr marL="0" indent="0" algn="just">
-              <a:buNone/>
-            </a:pPr>
-            <a:r>
-              <a:rPr lang="en-US" altLang="zh-CN" sz="2400" dirty="0">
-                <a:solidFill>
-                  <a:srgbClr val="FF0000"/>
-                </a:solidFill>
-                <a:latin typeface="Times New Roman" panose="02020603050405020304" pitchFamily="18" charset="0"/>
-                <a:ea typeface="黑体" panose="02010609060101010101" pitchFamily="49" charset="-122"/>
-              </a:rPr>
-              <a:t>(1)</a:t>
-            </a:r>
-            <a:r>
-              <a:rPr lang="zh-CN" altLang="en-US" sz="2400" dirty="0">
-                <a:solidFill>
-                  <a:srgbClr val="FF0000"/>
-                </a:solidFill>
-                <a:latin typeface="Times New Roman" panose="02020603050405020304" pitchFamily="18" charset="0"/>
-                <a:ea typeface="黑体" panose="02010609060101010101" pitchFamily="49" charset="-122"/>
-              </a:rPr>
-              <a:t>启动过程组</a:t>
-            </a:r>
-            <a:r>
-              <a:rPr lang="zh-CN" altLang="en-US" sz="2400" dirty="0">
-                <a:latin typeface="Times New Roman" panose="02020603050405020304" pitchFamily="18" charset="0"/>
-                <a:ea typeface="黑体" panose="02010609060101010101" pitchFamily="49" charset="-122"/>
-              </a:rPr>
-              <a:t>：定义了新项目或者现有项目的新阶段，启动过程组授权一个项目或者阶段的开始；</a:t>
-            </a:r>
-            <a:endParaRPr lang="en-US" altLang="zh-CN" sz="2400" dirty="0">
-              <a:latin typeface="Times New Roman" panose="02020603050405020304" pitchFamily="18" charset="0"/>
-              <a:ea typeface="黑体" panose="02010609060101010101" pitchFamily="49" charset="-122"/>
-            </a:endParaRPr>
-          </a:p>
-          <a:p>
-            <a:pPr marL="0" indent="0" algn="just">
-              <a:buNone/>
-            </a:pPr>
-            <a:r>
-              <a:rPr lang="en-US" altLang="zh-CN" sz="2400" dirty="0">
-                <a:solidFill>
-                  <a:srgbClr val="FF0000"/>
-                </a:solidFill>
-                <a:latin typeface="Times New Roman" panose="02020603050405020304" pitchFamily="18" charset="0"/>
-                <a:ea typeface="黑体" panose="02010609060101010101" pitchFamily="49" charset="-122"/>
-              </a:rPr>
-              <a:t>(2)</a:t>
-            </a:r>
-            <a:r>
-              <a:rPr lang="zh-CN" altLang="en-US" sz="2400" dirty="0">
-                <a:solidFill>
-                  <a:srgbClr val="FF0000"/>
-                </a:solidFill>
-                <a:latin typeface="Times New Roman" panose="02020603050405020304" pitchFamily="18" charset="0"/>
-                <a:ea typeface="黑体" panose="02010609060101010101" pitchFamily="49" charset="-122"/>
-              </a:rPr>
-              <a:t>计划过程组</a:t>
-            </a:r>
-            <a:r>
-              <a:rPr lang="zh-CN" altLang="en-US" sz="2400" dirty="0">
-                <a:latin typeface="Times New Roman" panose="02020603050405020304" pitchFamily="18" charset="0"/>
-                <a:ea typeface="黑体" panose="02010609060101010101" pitchFamily="49" charset="-122"/>
-              </a:rPr>
-              <a:t>：明确项目范围、优化目标，并为实现目标制定行动计划；</a:t>
-            </a:r>
-            <a:endParaRPr lang="en-US" altLang="zh-CN" sz="2400" dirty="0">
-              <a:latin typeface="Times New Roman" panose="02020603050405020304" pitchFamily="18" charset="0"/>
-              <a:ea typeface="黑体" panose="02010609060101010101" pitchFamily="49" charset="-122"/>
-            </a:endParaRPr>
-          </a:p>
-          <a:p>
-            <a:pPr marL="0" indent="0" algn="just">
-              <a:buNone/>
-            </a:pPr>
-            <a:r>
-              <a:rPr lang="en-US" altLang="zh-CN" sz="2400" dirty="0">
-                <a:solidFill>
-                  <a:srgbClr val="FF0000"/>
-                </a:solidFill>
-                <a:latin typeface="Times New Roman" panose="02020603050405020304" pitchFamily="18" charset="0"/>
-                <a:ea typeface="黑体" panose="02010609060101010101" pitchFamily="49" charset="-122"/>
-              </a:rPr>
-              <a:t>(3)</a:t>
-            </a:r>
-            <a:r>
-              <a:rPr lang="zh-CN" altLang="en-US" sz="2400" dirty="0">
-                <a:solidFill>
-                  <a:srgbClr val="FF0000"/>
-                </a:solidFill>
-                <a:latin typeface="Times New Roman" panose="02020603050405020304" pitchFamily="18" charset="0"/>
-                <a:ea typeface="黑体" panose="02010609060101010101" pitchFamily="49" charset="-122"/>
-              </a:rPr>
-              <a:t>执行过程组</a:t>
-            </a:r>
-            <a:r>
-              <a:rPr lang="zh-CN" altLang="en-US" sz="2400" dirty="0">
-                <a:latin typeface="Times New Roman" panose="02020603050405020304" pitchFamily="18" charset="0"/>
-                <a:ea typeface="黑体" panose="02010609060101010101" pitchFamily="49" charset="-122"/>
-              </a:rPr>
-              <a:t>：完成项目管理计划中明确的工作，以满足项目要求；</a:t>
-            </a:r>
-            <a:endParaRPr lang="en-US" altLang="zh-CN" sz="2400" dirty="0">
-              <a:latin typeface="Times New Roman" panose="02020603050405020304" pitchFamily="18" charset="0"/>
-              <a:ea typeface="黑体" panose="02010609060101010101" pitchFamily="49" charset="-122"/>
-            </a:endParaRPr>
-          </a:p>
-          <a:p>
-            <a:pPr marL="0" indent="0" algn="just">
-              <a:buNone/>
-            </a:pPr>
-            <a:r>
-              <a:rPr lang="en-US" altLang="zh-CN" sz="2400" dirty="0">
-                <a:solidFill>
-                  <a:srgbClr val="FF0000"/>
-                </a:solidFill>
-                <a:latin typeface="Times New Roman" panose="02020603050405020304" pitchFamily="18" charset="0"/>
-                <a:ea typeface="黑体" panose="02010609060101010101" pitchFamily="49" charset="-122"/>
-              </a:rPr>
-              <a:t>(4)</a:t>
-            </a:r>
-            <a:r>
-              <a:rPr lang="zh-CN" altLang="en-US" sz="2400" dirty="0">
-                <a:solidFill>
-                  <a:srgbClr val="FF0000"/>
-                </a:solidFill>
-                <a:latin typeface="Times New Roman" panose="02020603050405020304" pitchFamily="18" charset="0"/>
-                <a:ea typeface="黑体" panose="02010609060101010101" pitchFamily="49" charset="-122"/>
-              </a:rPr>
-              <a:t>控制过程组</a:t>
-            </a:r>
-            <a:r>
-              <a:rPr lang="zh-CN" altLang="en-US" sz="2400" dirty="0">
-                <a:latin typeface="Times New Roman" panose="02020603050405020304" pitchFamily="18" charset="0"/>
-                <a:ea typeface="黑体" panose="02010609060101010101" pitchFamily="49" charset="-122"/>
-              </a:rPr>
-              <a:t>：跟踪、审查和调整项目进度和绩效，识别变更并启动相应的变更；</a:t>
-            </a:r>
-            <a:endParaRPr lang="en-US" altLang="zh-CN" sz="2400" dirty="0">
-              <a:latin typeface="Times New Roman" panose="02020603050405020304" pitchFamily="18" charset="0"/>
-              <a:ea typeface="黑体" panose="02010609060101010101" pitchFamily="49" charset="-122"/>
-            </a:endParaRPr>
-          </a:p>
-          <a:p>
-            <a:pPr marL="0" indent="0" algn="just">
-              <a:buNone/>
-            </a:pPr>
-            <a:r>
-              <a:rPr lang="en-US" altLang="zh-CN" sz="2400" dirty="0">
-                <a:solidFill>
-                  <a:srgbClr val="FF0000"/>
-                </a:solidFill>
-                <a:latin typeface="Times New Roman" panose="02020603050405020304" pitchFamily="18" charset="0"/>
-                <a:ea typeface="黑体" panose="02010609060101010101" pitchFamily="49" charset="-122"/>
-              </a:rPr>
-              <a:t>(5)</a:t>
-            </a:r>
-            <a:r>
-              <a:rPr lang="zh-CN" altLang="en-US" sz="2400" dirty="0">
-                <a:solidFill>
-                  <a:srgbClr val="FF0000"/>
-                </a:solidFill>
-                <a:latin typeface="Times New Roman" panose="02020603050405020304" pitchFamily="18" charset="0"/>
-                <a:ea typeface="黑体" panose="02010609060101010101" pitchFamily="49" charset="-122"/>
-              </a:rPr>
-              <a:t>收尾过程组</a:t>
-            </a:r>
-            <a:r>
-              <a:rPr lang="zh-CN" altLang="en-US" sz="2400" dirty="0">
-                <a:latin typeface="Times New Roman" panose="02020603050405020304" pitchFamily="18" charset="0"/>
-                <a:ea typeface="黑体" panose="02010609060101010101" pitchFamily="49" charset="-122"/>
-              </a:rPr>
-              <a:t>：正式完成或者结束项目、阶段和合同。</a:t>
-            </a:r>
-            <a:endParaRPr lang="en-US" altLang="zh-CN" sz="2400" b="1" dirty="0"/>
-          </a:p>
-          <a:p>
-            <a:pPr marL="0" indent="0" algn="just" eaLnBrk="1" hangingPunct="1">
-              <a:buNone/>
-            </a:pPr>
-            <a:endParaRPr lang="en-US" altLang="zh-CN" sz="2400" dirty="0"/>
-          </a:p>
-          <a:p>
-            <a:pPr marL="0" indent="0" algn="just" eaLnBrk="1" hangingPunct="1">
-              <a:buNone/>
-            </a:pPr>
-            <a:endParaRPr lang="en-US" altLang="zh-CN" sz="2400" dirty="0"/>
-          </a:p>
-          <a:p>
-            <a:pPr marL="0" indent="0" algn="just" eaLnBrk="1" hangingPunct="1">
-              <a:buNone/>
-            </a:pPr>
-            <a:endParaRPr lang="en-US" altLang="zh-CN" sz="2400" dirty="0"/>
-          </a:p>
-        </p:txBody>
-      </p:sp>
-      <p:sp>
-        <p:nvSpPr>
           <p:cNvPr id="64516" name="Rectangle 4">
             <a:extLst>
               <a:ext uri="{FF2B5EF4-FFF2-40B4-BE49-F238E27FC236}">
@@ -40685,6 +41865,458 @@
           </a:p>
         </p:txBody>
       </p:sp>
+      <p:pic>
+        <p:nvPicPr>
+          <p:cNvPr id="2" name="图片 1">
+            <a:extLst>
+              <a:ext uri="{FF2B5EF4-FFF2-40B4-BE49-F238E27FC236}">
+                <a16:creationId xmlns:a16="http://schemas.microsoft.com/office/drawing/2014/main" id="{DD108EB2-B96F-47F7-8965-57C43C0761C7}"/>
+              </a:ext>
+            </a:extLst>
+          </p:cNvPr>
+          <p:cNvPicPr>
+            <a:picLocks noChangeAspect="1"/>
+          </p:cNvPicPr>
+          <p:nvPr/>
+        </p:nvPicPr>
+        <p:blipFill>
+          <a:blip r:embed="rId3"/>
+          <a:stretch>
+            <a:fillRect/>
+          </a:stretch>
+        </p:blipFill>
+        <p:spPr>
+          <a:xfrm>
+            <a:off x="1475656" y="552720"/>
+            <a:ext cx="5904656" cy="6142605"/>
+          </a:xfrm>
+          <a:prstGeom prst="rect">
+            <a:avLst/>
+          </a:prstGeom>
+        </p:spPr>
+      </p:pic>
+    </p:spTree>
+    <p:extLst>
+      <p:ext uri="{BB962C8B-B14F-4D97-AF65-F5344CB8AC3E}">
+        <p14:creationId xmlns:p14="http://schemas.microsoft.com/office/powerpoint/2010/main" val="2876740745"/>
+      </p:ext>
+    </p:extLst>
+  </p:cSld>
+  <p:clrMapOvr>
+    <a:masterClrMapping/>
+  </p:clrMapOvr>
+</p:sld>
+</file>
+
+<file path=ppt/slides/slide53.xml><?xml version="1.0" encoding="utf-8"?>
+<p:sld xmlns:a="http://schemas.openxmlformats.org/drawingml/2006/main" xmlns:r="http://schemas.openxmlformats.org/officeDocument/2006/relationships" xmlns:p="http://schemas.openxmlformats.org/presentationml/2006/main">
+  <p:cSld>
+    <p:spTree>
+      <p:nvGrpSpPr>
+        <p:cNvPr id="1" name=""/>
+        <p:cNvGrpSpPr/>
+        <p:nvPr/>
+      </p:nvGrpSpPr>
+      <p:grpSpPr>
+        <a:xfrm>
+          <a:off x="0" y="0"/>
+          <a:ext cx="0" cy="0"/>
+          <a:chOff x="0" y="0"/>
+          <a:chExt cx="0" cy="0"/>
+        </a:xfrm>
+      </p:grpSpPr>
+      <p:sp>
+        <p:nvSpPr>
+          <p:cNvPr id="64514" name="Rectangle 2">
+            <a:extLst>
+              <a:ext uri="{FF2B5EF4-FFF2-40B4-BE49-F238E27FC236}">
+                <a16:creationId xmlns:a16="http://schemas.microsoft.com/office/drawing/2014/main" id="{1C9B6BD9-3FA1-4CA2-8312-7B390F0B4FB1}"/>
+              </a:ext>
+            </a:extLst>
+          </p:cNvPr>
+          <p:cNvSpPr>
+            <a:spLocks noGrp="1" noChangeArrowheads="1"/>
+          </p:cNvSpPr>
+          <p:nvPr>
+            <p:ph type="title"/>
+          </p:nvPr>
+        </p:nvSpPr>
+        <p:spPr>
+          <a:xfrm>
+            <a:off x="457200" y="510081"/>
+            <a:ext cx="8229600" cy="1325563"/>
+          </a:xfrm>
+        </p:spPr>
+        <p:txBody>
+          <a:bodyPr/>
+          <a:lstStyle/>
+          <a:p>
+            <a:pPr algn="l" eaLnBrk="1" hangingPunct="1"/>
+            <a:r>
+              <a:rPr lang="en-US" altLang="zh-CN" sz="4000" b="1" dirty="0"/>
+              <a:t>2.4.3  </a:t>
+            </a:r>
+            <a:r>
+              <a:rPr lang="zh-CN" altLang="en-US" sz="4000" b="1" dirty="0"/>
+              <a:t>项目章程的颁布和合同的管理</a:t>
+            </a:r>
+          </a:p>
+        </p:txBody>
+      </p:sp>
+      <p:sp>
+        <p:nvSpPr>
+          <p:cNvPr id="64515" name="Rectangle 3">
+            <a:extLst>
+              <a:ext uri="{FF2B5EF4-FFF2-40B4-BE49-F238E27FC236}">
+                <a16:creationId xmlns:a16="http://schemas.microsoft.com/office/drawing/2014/main" id="{085F0872-A2C2-4008-81F8-2EB948266EDF}"/>
+              </a:ext>
+            </a:extLst>
+          </p:cNvPr>
+          <p:cNvSpPr>
+            <a:spLocks noGrp="1" noChangeArrowheads="1"/>
+          </p:cNvSpPr>
+          <p:nvPr>
+            <p:ph idx="1"/>
+          </p:nvPr>
+        </p:nvSpPr>
+        <p:spPr>
+          <a:xfrm>
+            <a:off x="539552" y="1825624"/>
+            <a:ext cx="8280920" cy="4483695"/>
+          </a:xfrm>
+        </p:spPr>
+        <p:txBody>
+          <a:bodyPr>
+            <a:noAutofit/>
+          </a:bodyPr>
+          <a:lstStyle/>
+          <a:p>
+            <a:pPr marL="0" indent="0" algn="just">
+              <a:buNone/>
+            </a:pPr>
+            <a:r>
+              <a:rPr lang="zh-CN" altLang="en-US" sz="2400" dirty="0"/>
+              <a:t>五大管理过程组：</a:t>
+            </a:r>
+            <a:endParaRPr lang="en-US" altLang="zh-CN" sz="2400" dirty="0"/>
+          </a:p>
+          <a:p>
+            <a:pPr marL="0" indent="0" algn="just">
+              <a:buNone/>
+            </a:pPr>
+            <a:r>
+              <a:rPr lang="en-US" altLang="zh-CN" sz="2400" dirty="0">
+                <a:solidFill>
+                  <a:srgbClr val="FF0000"/>
+                </a:solidFill>
+                <a:latin typeface="Times New Roman" panose="02020603050405020304" pitchFamily="18" charset="0"/>
+                <a:ea typeface="黑体" panose="02010609060101010101" pitchFamily="49" charset="-122"/>
+              </a:rPr>
+              <a:t>(1)</a:t>
+            </a:r>
+            <a:r>
+              <a:rPr lang="zh-CN" altLang="en-US" sz="2400" dirty="0">
+                <a:solidFill>
+                  <a:srgbClr val="FF0000"/>
+                </a:solidFill>
+                <a:latin typeface="Times New Roman" panose="02020603050405020304" pitchFamily="18" charset="0"/>
+                <a:ea typeface="黑体" panose="02010609060101010101" pitchFamily="49" charset="-122"/>
+              </a:rPr>
+              <a:t>启动过程组</a:t>
+            </a:r>
+            <a:r>
+              <a:rPr lang="zh-CN" altLang="en-US" sz="2400" dirty="0">
+                <a:latin typeface="Times New Roman" panose="02020603050405020304" pitchFamily="18" charset="0"/>
+                <a:ea typeface="黑体" panose="02010609060101010101" pitchFamily="49" charset="-122"/>
+              </a:rPr>
+              <a:t>：定义了新项目或者现有项目的新阶段，启动过程组授权一个项目或者阶段的开始；</a:t>
+            </a:r>
+            <a:endParaRPr lang="en-US" altLang="zh-CN" sz="2400" dirty="0">
+              <a:latin typeface="Times New Roman" panose="02020603050405020304" pitchFamily="18" charset="0"/>
+              <a:ea typeface="黑体" panose="02010609060101010101" pitchFamily="49" charset="-122"/>
+            </a:endParaRPr>
+          </a:p>
+          <a:p>
+            <a:pPr marL="0" indent="0" algn="just">
+              <a:buNone/>
+            </a:pPr>
+            <a:r>
+              <a:rPr lang="en-US" altLang="zh-CN" sz="2400" dirty="0">
+                <a:solidFill>
+                  <a:srgbClr val="FF0000"/>
+                </a:solidFill>
+                <a:latin typeface="Times New Roman" panose="02020603050405020304" pitchFamily="18" charset="0"/>
+                <a:ea typeface="黑体" panose="02010609060101010101" pitchFamily="49" charset="-122"/>
+              </a:rPr>
+              <a:t>(2)</a:t>
+            </a:r>
+            <a:r>
+              <a:rPr lang="zh-CN" altLang="en-US" sz="2400" dirty="0">
+                <a:solidFill>
+                  <a:srgbClr val="FF0000"/>
+                </a:solidFill>
+                <a:latin typeface="Times New Roman" panose="02020603050405020304" pitchFamily="18" charset="0"/>
+                <a:ea typeface="黑体" panose="02010609060101010101" pitchFamily="49" charset="-122"/>
+              </a:rPr>
+              <a:t>计划过程组</a:t>
+            </a:r>
+            <a:r>
+              <a:rPr lang="zh-CN" altLang="en-US" sz="2400" dirty="0">
+                <a:latin typeface="Times New Roman" panose="02020603050405020304" pitchFamily="18" charset="0"/>
+                <a:ea typeface="黑体" panose="02010609060101010101" pitchFamily="49" charset="-122"/>
+              </a:rPr>
+              <a:t>：明确项目范围、优化目标，并为实现目标制定行动计划；</a:t>
+            </a:r>
+            <a:endParaRPr lang="en-US" altLang="zh-CN" sz="2400" dirty="0">
+              <a:latin typeface="Times New Roman" panose="02020603050405020304" pitchFamily="18" charset="0"/>
+              <a:ea typeface="黑体" panose="02010609060101010101" pitchFamily="49" charset="-122"/>
+            </a:endParaRPr>
+          </a:p>
+          <a:p>
+            <a:pPr marL="0" indent="0" algn="just">
+              <a:buNone/>
+            </a:pPr>
+            <a:r>
+              <a:rPr lang="en-US" altLang="zh-CN" sz="2400" dirty="0">
+                <a:solidFill>
+                  <a:srgbClr val="FF0000"/>
+                </a:solidFill>
+                <a:latin typeface="Times New Roman" panose="02020603050405020304" pitchFamily="18" charset="0"/>
+                <a:ea typeface="黑体" panose="02010609060101010101" pitchFamily="49" charset="-122"/>
+              </a:rPr>
+              <a:t>(3)</a:t>
+            </a:r>
+            <a:r>
+              <a:rPr lang="zh-CN" altLang="en-US" sz="2400" dirty="0">
+                <a:solidFill>
+                  <a:srgbClr val="FF0000"/>
+                </a:solidFill>
+                <a:latin typeface="Times New Roman" panose="02020603050405020304" pitchFamily="18" charset="0"/>
+                <a:ea typeface="黑体" panose="02010609060101010101" pitchFamily="49" charset="-122"/>
+              </a:rPr>
+              <a:t>执行过程组</a:t>
+            </a:r>
+            <a:r>
+              <a:rPr lang="zh-CN" altLang="en-US" sz="2400" dirty="0">
+                <a:latin typeface="Times New Roman" panose="02020603050405020304" pitchFamily="18" charset="0"/>
+                <a:ea typeface="黑体" panose="02010609060101010101" pitchFamily="49" charset="-122"/>
+              </a:rPr>
+              <a:t>：完成项目管理计划中明确的工作，以满足项目要求；</a:t>
+            </a:r>
+            <a:endParaRPr lang="en-US" altLang="zh-CN" sz="2400" dirty="0">
+              <a:latin typeface="Times New Roman" panose="02020603050405020304" pitchFamily="18" charset="0"/>
+              <a:ea typeface="黑体" panose="02010609060101010101" pitchFamily="49" charset="-122"/>
+            </a:endParaRPr>
+          </a:p>
+          <a:p>
+            <a:pPr marL="0" indent="0" algn="just">
+              <a:buNone/>
+            </a:pPr>
+            <a:r>
+              <a:rPr lang="en-US" altLang="zh-CN" sz="2400" dirty="0">
+                <a:solidFill>
+                  <a:srgbClr val="FF0000"/>
+                </a:solidFill>
+                <a:latin typeface="Times New Roman" panose="02020603050405020304" pitchFamily="18" charset="0"/>
+                <a:ea typeface="黑体" panose="02010609060101010101" pitchFamily="49" charset="-122"/>
+              </a:rPr>
+              <a:t>(4)</a:t>
+            </a:r>
+            <a:r>
+              <a:rPr lang="zh-CN" altLang="en-US" sz="2400" dirty="0">
+                <a:solidFill>
+                  <a:srgbClr val="FF0000"/>
+                </a:solidFill>
+                <a:latin typeface="Times New Roman" panose="02020603050405020304" pitchFamily="18" charset="0"/>
+                <a:ea typeface="黑体" panose="02010609060101010101" pitchFamily="49" charset="-122"/>
+              </a:rPr>
+              <a:t>控制过程组</a:t>
+            </a:r>
+            <a:r>
+              <a:rPr lang="zh-CN" altLang="en-US" sz="2400" dirty="0">
+                <a:latin typeface="Times New Roman" panose="02020603050405020304" pitchFamily="18" charset="0"/>
+                <a:ea typeface="黑体" panose="02010609060101010101" pitchFamily="49" charset="-122"/>
+              </a:rPr>
+              <a:t>：跟踪、审查和调整项目进度和绩效，识别变更并启动相应的变更；</a:t>
+            </a:r>
+            <a:endParaRPr lang="en-US" altLang="zh-CN" sz="2400" dirty="0">
+              <a:latin typeface="Times New Roman" panose="02020603050405020304" pitchFamily="18" charset="0"/>
+              <a:ea typeface="黑体" panose="02010609060101010101" pitchFamily="49" charset="-122"/>
+            </a:endParaRPr>
+          </a:p>
+          <a:p>
+            <a:pPr marL="0" indent="0" algn="just">
+              <a:buNone/>
+            </a:pPr>
+            <a:r>
+              <a:rPr lang="en-US" altLang="zh-CN" sz="2400" dirty="0">
+                <a:solidFill>
+                  <a:srgbClr val="FF0000"/>
+                </a:solidFill>
+                <a:latin typeface="Times New Roman" panose="02020603050405020304" pitchFamily="18" charset="0"/>
+                <a:ea typeface="黑体" panose="02010609060101010101" pitchFamily="49" charset="-122"/>
+              </a:rPr>
+              <a:t>(5)</a:t>
+            </a:r>
+            <a:r>
+              <a:rPr lang="zh-CN" altLang="en-US" sz="2400" dirty="0">
+                <a:solidFill>
+                  <a:srgbClr val="FF0000"/>
+                </a:solidFill>
+                <a:latin typeface="Times New Roman" panose="02020603050405020304" pitchFamily="18" charset="0"/>
+                <a:ea typeface="黑体" panose="02010609060101010101" pitchFamily="49" charset="-122"/>
+              </a:rPr>
+              <a:t>收尾过程组</a:t>
+            </a:r>
+            <a:r>
+              <a:rPr lang="zh-CN" altLang="en-US" sz="2400" dirty="0">
+                <a:latin typeface="Times New Roman" panose="02020603050405020304" pitchFamily="18" charset="0"/>
+                <a:ea typeface="黑体" panose="02010609060101010101" pitchFamily="49" charset="-122"/>
+              </a:rPr>
+              <a:t>：正式完成或者结束项目、阶段和合同。</a:t>
+            </a:r>
+            <a:endParaRPr lang="en-US" altLang="zh-CN" sz="2400" b="1" dirty="0"/>
+          </a:p>
+          <a:p>
+            <a:pPr marL="0" indent="0" algn="just" eaLnBrk="1" hangingPunct="1">
+              <a:buNone/>
+            </a:pPr>
+            <a:endParaRPr lang="en-US" altLang="zh-CN" sz="2400" dirty="0"/>
+          </a:p>
+          <a:p>
+            <a:pPr marL="0" indent="0" algn="just" eaLnBrk="1" hangingPunct="1">
+              <a:buNone/>
+            </a:pPr>
+            <a:endParaRPr lang="en-US" altLang="zh-CN" sz="2400" dirty="0"/>
+          </a:p>
+          <a:p>
+            <a:pPr marL="0" indent="0" algn="just" eaLnBrk="1" hangingPunct="1">
+              <a:buNone/>
+            </a:pPr>
+            <a:endParaRPr lang="en-US" altLang="zh-CN" sz="2400" dirty="0"/>
+          </a:p>
+        </p:txBody>
+      </p:sp>
+      <p:sp>
+        <p:nvSpPr>
+          <p:cNvPr id="64516" name="Rectangle 4">
+            <a:extLst>
+              <a:ext uri="{FF2B5EF4-FFF2-40B4-BE49-F238E27FC236}">
+                <a16:creationId xmlns:a16="http://schemas.microsoft.com/office/drawing/2014/main" id="{952CBE8A-464E-4568-8040-E58AE0D21881}"/>
+              </a:ext>
+            </a:extLst>
+          </p:cNvPr>
+          <p:cNvSpPr>
+            <a:spLocks noGrp="1" noChangeArrowheads="1"/>
+          </p:cNvSpPr>
+          <p:nvPr>
+            <p:ph type="title" idx="4294967295"/>
+          </p:nvPr>
+        </p:nvSpPr>
+        <p:spPr>
+          <a:xfrm>
+            <a:off x="914400" y="130175"/>
+            <a:ext cx="8229600" cy="346075"/>
+          </a:xfrm>
+          <a:noFill/>
+        </p:spPr>
+        <p:txBody>
+          <a:bodyPr>
+            <a:normAutofit fontScale="90000"/>
+          </a:bodyPr>
+          <a:lstStyle/>
+          <a:p>
+            <a:pPr eaLnBrk="1" hangingPunct="1"/>
+            <a:r>
+              <a:rPr lang="zh-CN" altLang="en-US" sz="2000" b="1">
+                <a:solidFill>
+                  <a:srgbClr val="0000FF"/>
+                </a:solidFill>
+              </a:rPr>
+              <a:t>十一五规划教材                                          </a:t>
+            </a:r>
+            <a:r>
+              <a:rPr lang="en-US" altLang="zh-CN" sz="2000" b="1">
+                <a:solidFill>
+                  <a:srgbClr val="0000FF"/>
+                </a:solidFill>
+              </a:rPr>
+              <a:t>《</a:t>
+            </a:r>
+            <a:r>
+              <a:rPr lang="zh-CN" altLang="en-US" sz="2000" b="1">
+                <a:solidFill>
+                  <a:srgbClr val="0000FF"/>
+                </a:solidFill>
+              </a:rPr>
+              <a:t>信息系统项目管理</a:t>
+            </a:r>
+            <a:r>
+              <a:rPr lang="en-US" altLang="zh-CN" sz="2000" b="1">
+                <a:solidFill>
+                  <a:srgbClr val="0000FF"/>
+                </a:solidFill>
+              </a:rPr>
+              <a:t>》</a:t>
+            </a:r>
+            <a:r>
+              <a:rPr lang="zh-CN" altLang="en-US" sz="2000" b="1">
+                <a:solidFill>
+                  <a:srgbClr val="0000FF"/>
+                </a:solidFill>
+              </a:rPr>
+              <a:t>讲义</a:t>
+            </a:r>
+          </a:p>
+        </p:txBody>
+      </p:sp>
+      <p:sp>
+        <p:nvSpPr>
+          <p:cNvPr id="64517" name="Line 5">
+            <a:extLst>
+              <a:ext uri="{FF2B5EF4-FFF2-40B4-BE49-F238E27FC236}">
+                <a16:creationId xmlns:a16="http://schemas.microsoft.com/office/drawing/2014/main" id="{EFFAC4BB-5621-4E3A-84C5-C8A27146567D}"/>
+              </a:ext>
+            </a:extLst>
+          </p:cNvPr>
+          <p:cNvSpPr>
+            <a:spLocks noChangeShapeType="1"/>
+          </p:cNvSpPr>
+          <p:nvPr/>
+        </p:nvSpPr>
+        <p:spPr bwMode="auto">
+          <a:xfrm>
+            <a:off x="0" y="476250"/>
+            <a:ext cx="9144000" cy="0"/>
+          </a:xfrm>
+          <a:prstGeom prst="line">
+            <a:avLst/>
+          </a:prstGeom>
+          <a:noFill/>
+          <a:ln w="9525">
+            <a:solidFill>
+              <a:srgbClr val="9900CC"/>
+            </a:solidFill>
+            <a:round/>
+            <a:headEnd/>
+            <a:tailEnd/>
+          </a:ln>
+          <a:extLst>
+            <a:ext uri="{909E8E84-426E-40DD-AFC4-6F175D3DCCD1}">
+              <a14:hiddenFill xmlns:a14="http://schemas.microsoft.com/office/drawing/2010/main">
+                <a:noFill/>
+              </a14:hiddenFill>
+            </a:ext>
+          </a:extLst>
+        </p:spPr>
+        <p:txBody>
+          <a:bodyPr/>
+          <a:lstStyle/>
+          <a:p>
+            <a:endParaRPr lang="zh-CN" altLang="en-US"/>
+          </a:p>
+        </p:txBody>
+      </p:sp>
     </p:spTree>
     <p:extLst>
       <p:ext uri="{BB962C8B-B14F-4D97-AF65-F5344CB8AC3E}">
@@ -40698,7 +42330,7 @@
 </p:sld>
 </file>
 
-<file path=ppt/slides/slide53.xml><?xml version="1.0" encoding="utf-8"?>
+<file path=ppt/slides/slide54.xml><?xml version="1.0" encoding="utf-8"?>
 <p:sld xmlns:a="http://schemas.openxmlformats.org/drawingml/2006/main" xmlns:r="http://schemas.openxmlformats.org/officeDocument/2006/relationships" xmlns:p="http://schemas.openxmlformats.org/presentationml/2006/main">
   <p:cSld>
     <p:spTree>
@@ -40908,7 +42540,7 @@
 </p:sld>
 </file>
 
-<file path=ppt/slides/slide54.xml><?xml version="1.0" encoding="utf-8"?>
+<file path=ppt/slides/slide55.xml><?xml version="1.0" encoding="utf-8"?>
 <p:sld xmlns:a="http://schemas.openxmlformats.org/drawingml/2006/main" xmlns:r="http://schemas.openxmlformats.org/officeDocument/2006/relationships" xmlns:p="http://schemas.openxmlformats.org/presentationml/2006/main">
   <p:cSld>
     <p:spTree>
@@ -41341,7 +42973,7 @@
 </p:sld>
 </file>
 
-<file path=ppt/slides/slide55.xml><?xml version="1.0" encoding="utf-8"?>
+<file path=ppt/slides/slide56.xml><?xml version="1.0" encoding="utf-8"?>
 <p:sld xmlns:a="http://schemas.openxmlformats.org/drawingml/2006/main" xmlns:r="http://schemas.openxmlformats.org/officeDocument/2006/relationships" xmlns:p="http://schemas.openxmlformats.org/presentationml/2006/main">
   <p:cSld>
     <p:spTree>
@@ -41705,7 +43337,7 @@
 </p:sld>
 </file>
 
-<file path=ppt/slides/slide56.xml><?xml version="1.0" encoding="utf-8"?>
+<file path=ppt/slides/slide57.xml><?xml version="1.0" encoding="utf-8"?>
 <p:sld xmlns:a="http://schemas.openxmlformats.org/drawingml/2006/main" xmlns:r="http://schemas.openxmlformats.org/officeDocument/2006/relationships" xmlns:p="http://schemas.openxmlformats.org/presentationml/2006/main">
   <p:cSld>
     <p:spTree>
@@ -41983,7 +43615,7 @@
 </p:sld>
 </file>
 
-<file path=ppt/slides/slide57.xml><?xml version="1.0" encoding="utf-8"?>
+<file path=ppt/slides/slide58.xml><?xml version="1.0" encoding="utf-8"?>
 <p:sld xmlns:a="http://schemas.openxmlformats.org/drawingml/2006/main" xmlns:r="http://schemas.openxmlformats.org/officeDocument/2006/relationships" xmlns:p="http://schemas.openxmlformats.org/presentationml/2006/main">
   <p:cSld>
     <p:spTree>
@@ -42049,9 +43681,16 @@
             <p:ph idx="1"/>
           </p:nvPr>
         </p:nvSpPr>
-        <p:spPr/>
+        <p:spPr>
+          <a:xfrm>
+            <a:off x="467544" y="1412776"/>
+            <a:ext cx="8352928" cy="4896544"/>
+          </a:xfrm>
+        </p:spPr>
         <p:txBody>
-          <a:bodyPr/>
+          <a:bodyPr>
+            <a:noAutofit/>
+          </a:bodyPr>
           <a:lstStyle/>
           <a:p>
             <a:pPr eaLnBrk="1" hangingPunct="1">
@@ -42067,6 +43706,7 @@
               <a:rPr lang="zh-CN" altLang="en-US" sz="2400" dirty="0"/>
               <a:t>项目名称 </a:t>
             </a:r>
+            <a:endParaRPr lang="en-US" altLang="zh-CN" sz="2400" dirty="0"/>
           </a:p>
           <a:p>
             <a:pPr eaLnBrk="1" hangingPunct="1">
@@ -42075,13 +43715,14 @@
               </a:lnSpc>
             </a:pPr>
             <a:r>
-              <a:rPr lang="en-US" altLang="zh-CN" sz="2400" dirty="0"/>
-              <a:t>2. </a:t>
-            </a:r>
-            <a:r>
-              <a:rPr lang="zh-CN" altLang="en-US" sz="2400" dirty="0"/>
-              <a:t>项目背景</a:t>
-            </a:r>
+              <a:rPr lang="en-US" altLang="zh-CN" sz="1600" dirty="0"/>
+              <a:t>××</a:t>
+            </a:r>
+            <a:r>
+              <a:rPr lang="zh-CN" altLang="en-US" sz="1600" dirty="0"/>
+              <a:t>大学商学院网站的建设</a:t>
+            </a:r>
+            <a:endParaRPr lang="zh-CN" altLang="en-US" sz="2400" dirty="0"/>
           </a:p>
           <a:p>
             <a:pPr eaLnBrk="1" hangingPunct="1">
@@ -42091,12 +43732,13 @@
             </a:pPr>
             <a:r>
               <a:rPr lang="en-US" altLang="zh-CN" sz="2400" dirty="0"/>
-              <a:t>3. </a:t>
+              <a:t>2. </a:t>
             </a:r>
             <a:r>
               <a:rPr lang="zh-CN" altLang="en-US" sz="2400" dirty="0"/>
-              <a:t>项目目标 </a:t>
-            </a:r>
+              <a:t>项目背景</a:t>
+            </a:r>
+            <a:endParaRPr lang="en-US" altLang="zh-CN" sz="2400" dirty="0"/>
           </a:p>
           <a:p>
             <a:pPr eaLnBrk="1" hangingPunct="1">
@@ -42105,72 +43747,77 @@
               </a:lnSpc>
             </a:pPr>
             <a:r>
-              <a:rPr lang="en-US" altLang="zh-CN" sz="2400" dirty="0"/>
-              <a:t>4. </a:t>
-            </a:r>
-            <a:r>
-              <a:rPr lang="zh-CN" altLang="en-US" sz="2400" dirty="0"/>
-              <a:t>项目主要内容</a:t>
-            </a:r>
-          </a:p>
-          <a:p>
-            <a:pPr eaLnBrk="1" hangingPunct="1">
-              <a:lnSpc>
-                <a:spcPct val="90000"/>
-              </a:lnSpc>
-            </a:pPr>
-            <a:r>
-              <a:rPr lang="en-US" altLang="zh-CN" sz="2400" dirty="0"/>
-              <a:t>5. </a:t>
-            </a:r>
-            <a:r>
-              <a:rPr lang="zh-CN" altLang="en-US" sz="2400" dirty="0"/>
-              <a:t>项目的约束条件</a:t>
-            </a:r>
-          </a:p>
-          <a:p>
-            <a:pPr eaLnBrk="1" hangingPunct="1">
-              <a:lnSpc>
-                <a:spcPct val="90000"/>
-              </a:lnSpc>
-            </a:pPr>
-            <a:r>
-              <a:rPr lang="en-US" altLang="zh-CN" sz="2400" dirty="0"/>
-              <a:t>6. </a:t>
-            </a:r>
-            <a:r>
-              <a:rPr lang="zh-CN" altLang="en-US" sz="2400" dirty="0"/>
-              <a:t>项目的人员组成与职责分配 </a:t>
-            </a:r>
-          </a:p>
-          <a:p>
-            <a:pPr eaLnBrk="1" hangingPunct="1">
-              <a:lnSpc>
-                <a:spcPct val="90000"/>
-              </a:lnSpc>
-            </a:pPr>
-            <a:r>
-              <a:rPr lang="en-US" altLang="zh-CN" sz="2400" dirty="0"/>
-              <a:t>7. </a:t>
-            </a:r>
-            <a:r>
-              <a:rPr lang="zh-CN" altLang="en-US" sz="2400" dirty="0"/>
-              <a:t>相关部门的支持</a:t>
-            </a:r>
-          </a:p>
-          <a:p>
-            <a:pPr eaLnBrk="1" hangingPunct="1">
-              <a:lnSpc>
-                <a:spcPct val="90000"/>
-              </a:lnSpc>
-            </a:pPr>
-            <a:r>
-              <a:rPr lang="en-US" altLang="zh-CN" sz="2400" dirty="0"/>
-              <a:t>8. </a:t>
-            </a:r>
-            <a:r>
-              <a:rPr lang="zh-CN" altLang="en-US" sz="2400" dirty="0"/>
-              <a:t>签发人和签发日期</a:t>
+              <a:rPr lang="zh-CN" altLang="en-US" sz="1600" dirty="0"/>
+              <a:t>近年来，随着信息技术的飞速发展，</a:t>
+            </a:r>
+            <a:r>
+              <a:rPr lang="en-US" altLang="zh-CN" sz="1600" dirty="0"/>
+              <a:t>××</a:t>
+            </a:r>
+            <a:r>
+              <a:rPr lang="zh-CN" altLang="en-US" sz="1600" dirty="0"/>
+              <a:t>大学积极开展信息化建设，信息化水平始终走在我国高校的前列。</a:t>
+            </a:r>
+            <a:r>
+              <a:rPr lang="en-US" altLang="zh-CN" sz="1600" dirty="0"/>
+              <a:t>2013</a:t>
+            </a:r>
+            <a:r>
+              <a:rPr lang="zh-CN" altLang="en-US" sz="1600" dirty="0"/>
+              <a:t>年，该校启动了“数字校园”项目，计划用五年时间建成一个便于资源共享的个性化服务数字校园网。该校商学院网站的建设需要与全校信息化总体规划接轨，服从此框架，并为本院学生提供技术上集成的、内容上更贴近学生需求的服务。而 </a:t>
+            </a:r>
+            <a:r>
+              <a:rPr lang="en-US" altLang="zh-CN" sz="1600" dirty="0"/>
+              <a:t>Web 2.0</a:t>
+            </a:r>
+            <a:r>
+              <a:rPr lang="zh-CN" altLang="en-US" sz="1600" dirty="0"/>
+              <a:t>、云计算、大数据等技术的广泛应用，也为网站功能和形式的完善提供了可靠的技术支持，使得建设一个集数据收集、共享为一体的耳目一新、广受欢迎的学院网站成为可能。</a:t>
+            </a:r>
+            <a:endParaRPr lang="en-US" altLang="zh-CN" sz="1600" dirty="0"/>
+          </a:p>
+          <a:p>
+            <a:r>
+              <a:rPr lang="zh-CN" altLang="en-US" sz="1600" dirty="0"/>
+              <a:t>该商学院现有的网站虽然在很大程度上满足了各方面的信息需求，但仍存在如下几点不足。 （</a:t>
+            </a:r>
+            <a:r>
+              <a:rPr lang="en-US" altLang="zh-CN" sz="1600" dirty="0"/>
+              <a:t>1</a:t>
+            </a:r>
+            <a:r>
+              <a:rPr lang="zh-CN" altLang="en-US" sz="1600" dirty="0"/>
+              <a:t>）网站响应速度较慢； （</a:t>
+            </a:r>
+            <a:r>
+              <a:rPr lang="en-US" altLang="zh-CN" sz="1600" dirty="0"/>
+              <a:t>2</a:t>
+            </a:r>
+            <a:r>
+              <a:rPr lang="zh-CN" altLang="en-US" sz="1600" dirty="0"/>
+              <a:t>）网站更新较慢，信息时效性较差； （</a:t>
+            </a:r>
+            <a:r>
+              <a:rPr lang="en-US" altLang="zh-CN" sz="1600" dirty="0"/>
+              <a:t>3</a:t>
+            </a:r>
+            <a:r>
+              <a:rPr lang="zh-CN" altLang="en-US" sz="1600" dirty="0"/>
+              <a:t>）网站功能较少、缺乏互动性； （</a:t>
+            </a:r>
+            <a:r>
+              <a:rPr lang="en-US" altLang="zh-CN" sz="1600" dirty="0"/>
+              <a:t>4</a:t>
+            </a:r>
+            <a:r>
+              <a:rPr lang="zh-CN" altLang="en-US" sz="1600" dirty="0"/>
+              <a:t>）网站不能整合学院现有的教学资源并为教学互动提供良好支持。</a:t>
+            </a:r>
+          </a:p>
+          <a:p>
+            <a:r>
+              <a:rPr lang="zh-CN" altLang="en-US" sz="1600" dirty="0"/>
+              <a:t>总之，新的服务理念、新的应用技术都对原有网站提出了更高要求，迫切需要建设一个全新的网站，为该校商学院师生和其他访问者提供更好的服务。</a:t>
             </a:r>
           </a:p>
         </p:txBody>
@@ -42303,7 +43950,7 @@
 </p:sld>
 </file>
 
-<file path=ppt/slides/slide58.xml><?xml version="1.0" encoding="utf-8"?>
+<file path=ppt/slides/slide59.xml><?xml version="1.0" encoding="utf-8"?>
 <p:sld xmlns:a="http://schemas.openxmlformats.org/drawingml/2006/main" xmlns:r="http://schemas.openxmlformats.org/officeDocument/2006/relationships" xmlns:p="http://schemas.openxmlformats.org/presentationml/2006/main">
   <p:cSld>
     <p:spTree>
@@ -42322,157 +43969,10 @@
       </p:grpSpPr>
       <p:sp>
         <p:nvSpPr>
-          <p:cNvPr id="68610" name="WordArt 4">
+          <p:cNvPr id="66562" name="Rectangle 2">
             <a:extLst>
               <a:ext uri="{FF2B5EF4-FFF2-40B4-BE49-F238E27FC236}">
-                <a16:creationId xmlns:a16="http://schemas.microsoft.com/office/drawing/2014/main" id="{BC5E390A-87FF-4A22-9247-206CB6FEE59F}"/>
-              </a:ext>
-            </a:extLst>
-          </p:cNvPr>
-          <p:cNvSpPr>
-            <a:spLocks noChangeArrowheads="1" noChangeShapeType="1" noTextEdit="1"/>
-          </p:cNvSpPr>
-          <p:nvPr/>
-        </p:nvSpPr>
-        <p:spPr bwMode="auto">
-          <a:xfrm>
-            <a:off x="3205163" y="2997200"/>
-            <a:ext cx="2879725" cy="1163638"/>
-          </a:xfrm>
-          <a:prstGeom prst="rect">
-            <a:avLst/>
-          </a:prstGeom>
-          <a:extLst>
-            <a:ext uri="{91240B29-F687-4F45-9708-019B960494DF}">
-              <a14:hiddenLine xmlns:a14="http://schemas.microsoft.com/office/drawing/2010/main" w="9525">
-                <a:solidFill>
-                  <a:srgbClr val="000000"/>
-                </a:solidFill>
-                <a:round/>
-                <a:headEnd/>
-                <a:tailEnd/>
-              </a14:hiddenLine>
-            </a:ext>
-          </a:extLst>
-        </p:spPr>
-        <p:txBody>
-          <a:bodyPr wrap="none" fromWordArt="1">
-            <a:prstTxWarp prst="textPlain">
-              <a:avLst>
-                <a:gd name="adj" fmla="val 50000"/>
-              </a:avLst>
-            </a:prstTxWarp>
-          </a:bodyPr>
-          <a:lstStyle/>
-          <a:p>
-            <a:r>
-              <a:rPr lang="zh-CN" altLang="en-US" sz="3600" kern="10">
-                <a:gradFill rotWithShape="1">
-                  <a:gsLst>
-                    <a:gs pos="0">
-                      <a:srgbClr val="FFFF00"/>
-                    </a:gs>
-                    <a:gs pos="100000">
-                      <a:srgbClr val="FF9933"/>
-                    </a:gs>
-                  </a:gsLst>
-                  <a:path path="rect">
-                    <a:fillToRect l="50000" t="50000" r="50000" b="50000"/>
-                  </a:path>
-                </a:gradFill>
-                <a:effectLst>
-                  <a:outerShdw dist="35921" dir="2700000" algn="ctr" rotWithShape="0">
-                    <a:srgbClr val="C0C0C0">
-                      <a:alpha val="79999"/>
-                    </a:srgbClr>
-                  </a:outerShdw>
-                </a:effectLst>
-                <a:latin typeface="宋体" panose="02010600030101010101" pitchFamily="2" charset="-122"/>
-              </a:rPr>
-              <a:t>谢谢！</a:t>
-            </a:r>
-          </a:p>
-        </p:txBody>
-      </p:sp>
-      <p:sp>
-        <p:nvSpPr>
-          <p:cNvPr id="68611" name="Rectangle 5">
-            <a:extLst>
-              <a:ext uri="{FF2B5EF4-FFF2-40B4-BE49-F238E27FC236}">
-                <a16:creationId xmlns:a16="http://schemas.microsoft.com/office/drawing/2014/main" id="{2AA774BF-147A-4E93-9529-8CB74844CA3A}"/>
-              </a:ext>
-            </a:extLst>
-          </p:cNvPr>
-          <p:cNvSpPr>
-            <a:spLocks noGrp="1" noChangeArrowheads="1"/>
-          </p:cNvSpPr>
-          <p:nvPr>
-            <p:ph type="title"/>
-          </p:nvPr>
-        </p:nvSpPr>
-        <p:spPr>
-          <a:xfrm>
-            <a:off x="611188" y="836613"/>
-            <a:ext cx="7772400" cy="1143000"/>
-          </a:xfrm>
-        </p:spPr>
-        <p:txBody>
-          <a:bodyPr/>
-          <a:lstStyle/>
-          <a:p>
-            <a:pPr algn="l" eaLnBrk="1" hangingPunct="1"/>
-            <a:r>
-              <a:rPr lang="zh-CN" altLang="en-US" b="1">
-                <a:solidFill>
-                  <a:srgbClr val="FF0000"/>
-                </a:solidFill>
-              </a:rPr>
-              <a:t>欢迎讨论</a:t>
-            </a:r>
-            <a:r>
-              <a:rPr lang="en-US" altLang="zh-CN" sz="4600" b="1">
-                <a:solidFill>
-                  <a:srgbClr val="FF0000"/>
-                </a:solidFill>
-                <a:ea typeface="楷体_GB2312" pitchFamily="49" charset="-122"/>
-              </a:rPr>
-              <a:t>……</a:t>
-            </a:r>
-          </a:p>
-        </p:txBody>
-      </p:sp>
-    </p:spTree>
-  </p:cSld>
-  <p:clrMapOvr>
-    <a:masterClrMapping/>
-  </p:clrMapOvr>
-  <p:transition spd="slow" advTm="5748"/>
-</p:sld>
-</file>
-
-<file path=ppt/slides/slide6.xml><?xml version="1.0" encoding="utf-8"?>
-<p:sld xmlns:a="http://schemas.openxmlformats.org/drawingml/2006/main" xmlns:r="http://schemas.openxmlformats.org/officeDocument/2006/relationships" xmlns:p="http://schemas.openxmlformats.org/presentationml/2006/main">
-  <p:cSld>
-    <p:spTree>
-      <p:nvGrpSpPr>
-        <p:cNvPr id="1" name=""/>
-        <p:cNvGrpSpPr/>
-        <p:nvPr/>
-      </p:nvGrpSpPr>
-      <p:grpSpPr>
-        <a:xfrm>
-          <a:off x="0" y="0"/>
-          <a:ext cx="0" cy="0"/>
-          <a:chOff x="0" y="0"/>
-          <a:chExt cx="0" cy="0"/>
-        </a:xfrm>
-      </p:grpSpPr>
-      <p:sp>
-        <p:nvSpPr>
-          <p:cNvPr id="13314" name="Rectangle 2">
-            <a:extLst>
-              <a:ext uri="{FF2B5EF4-FFF2-40B4-BE49-F238E27FC236}">
-                <a16:creationId xmlns:a16="http://schemas.microsoft.com/office/drawing/2014/main" id="{BCF5866D-1E6A-4C29-8FF3-73C57E918680}"/>
+                <a16:creationId xmlns:a16="http://schemas.microsoft.com/office/drawing/2014/main" id="{B0501DB5-196D-46F8-8844-34CD6174ABC1}"/>
               </a:ext>
             </a:extLst>
           </p:cNvPr>
@@ -42488,24 +43988,24 @@
           <a:bodyPr/>
           <a:lstStyle/>
           <a:p>
-            <a:pPr algn="l" eaLnBrk="1" hangingPunct="1"/>
-            <a:r>
-              <a:rPr lang="en-US" altLang="zh-CN" sz="4000" b="1"/>
-              <a:t>2.1.2  CIO</a:t>
-            </a:r>
-            <a:r>
-              <a:rPr lang="zh-CN" altLang="en-US" sz="4000" b="1"/>
-              <a:t>的角色与信息系统项目</a:t>
+            <a:pPr marL="838200" indent="-838200" algn="l" eaLnBrk="1" hangingPunct="1"/>
+            <a:r>
+              <a:rPr lang="en-US" altLang="zh-CN" sz="3200" b="1"/>
+              <a:t>2.4.4 </a:t>
+            </a:r>
+            <a:r>
+              <a:rPr lang="zh-CN" altLang="en-US" sz="3200" b="1"/>
+              <a:t>案例：学院网站建设项目的项目章程</a:t>
             </a:r>
           </a:p>
         </p:txBody>
       </p:sp>
       <p:sp>
         <p:nvSpPr>
-          <p:cNvPr id="13315" name="Rectangle 3">
+          <p:cNvPr id="66563" name="Rectangle 3">
             <a:extLst>
               <a:ext uri="{FF2B5EF4-FFF2-40B4-BE49-F238E27FC236}">
-                <a16:creationId xmlns:a16="http://schemas.microsoft.com/office/drawing/2014/main" id="{EC295DC7-CDAD-4A6A-BA94-0024DB52A720}"/>
+                <a16:creationId xmlns:a16="http://schemas.microsoft.com/office/drawing/2014/main" id="{7796420C-5F49-477E-9E2F-A17189C940F2}"/>
               </a:ext>
             </a:extLst>
           </p:cNvPr>
@@ -42516,52 +44016,113 @@
             <p:ph idx="1"/>
           </p:nvPr>
         </p:nvSpPr>
-        <p:spPr/>
+        <p:spPr>
+          <a:xfrm>
+            <a:off x="628650" y="1825625"/>
+            <a:ext cx="7886700" cy="3619599"/>
+          </a:xfrm>
+        </p:spPr>
         <p:txBody>
-          <a:bodyPr/>
+          <a:bodyPr>
+            <a:noAutofit/>
+          </a:bodyPr>
           <a:lstStyle/>
           <a:p>
-            <a:pPr eaLnBrk="1" hangingPunct="1"/>
-            <a:endParaRPr lang="en-US" altLang="zh-CN" sz="2400"/>
-          </a:p>
-          <a:p>
-            <a:pPr eaLnBrk="1" hangingPunct="1"/>
-            <a:r>
-              <a:rPr lang="en-US" altLang="zh-CN" sz="2400"/>
-              <a:t>CIO</a:t>
-            </a:r>
-            <a:r>
-              <a:rPr lang="zh-CN" altLang="en-US" sz="2400"/>
-              <a:t>既要负责领导信息系统项目的发起、可行性分析、决策制定、信息系统项目的规划和组织监督。</a:t>
-            </a:r>
-          </a:p>
-          <a:p>
-            <a:pPr eaLnBrk="1" hangingPunct="1"/>
-            <a:endParaRPr lang="en-US" altLang="zh-CN" sz="2400"/>
-          </a:p>
-          <a:p>
-            <a:pPr eaLnBrk="1" hangingPunct="1"/>
-            <a:r>
-              <a:rPr lang="zh-CN" altLang="en-US" sz="2400"/>
-              <a:t>又要负责信息系统的稳定可靠经济运行，</a:t>
-            </a:r>
-            <a:r>
-              <a:rPr lang="en-US" altLang="zh-CN" sz="2400"/>
-              <a:t>CIO</a:t>
-            </a:r>
-            <a:r>
-              <a:rPr lang="zh-CN" altLang="en-US" sz="2400"/>
-              <a:t>是信息系统正常可靠运行的管理者和保障者。 </a:t>
-            </a:r>
+            <a:pPr eaLnBrk="1" hangingPunct="1">
+              <a:lnSpc>
+                <a:spcPct val="90000"/>
+              </a:lnSpc>
+            </a:pPr>
+            <a:r>
+              <a:rPr lang="en-US" altLang="zh-CN" sz="2400" dirty="0"/>
+              <a:t>3. </a:t>
+            </a:r>
+            <a:r>
+              <a:rPr lang="zh-CN" altLang="en-US" sz="2400" dirty="0"/>
+              <a:t>项目目标 </a:t>
+            </a:r>
+            <a:endParaRPr lang="en-US" altLang="zh-CN" sz="2400" dirty="0"/>
+          </a:p>
+          <a:p>
+            <a:pPr eaLnBrk="1" hangingPunct="1">
+              <a:lnSpc>
+                <a:spcPct val="90000"/>
+              </a:lnSpc>
+            </a:pPr>
+            <a:r>
+              <a:rPr lang="zh-CN" altLang="en-US" sz="1600" dirty="0"/>
+              <a:t>本项目目标是为商学院建设一个全新的网站，对外打造一个宣传沟通、交流合作的信息平台，对内为师生互动、学习交流、资源共享提供一个方便快捷的方式。网站把众多分散的资源统一集成，展示到通用的学院门户平台框架之中；根据行政人员、教师、学生三种用户角色的不同，形成个性化的应用界面，建立一站式的信息服务平台、事务处理平台与互动沟通平台；同时实现网站的用户自我维护功能，节省网站的运维费用。</a:t>
+            </a:r>
+            <a:endParaRPr lang="zh-CN" altLang="en-US" sz="2400" dirty="0"/>
+          </a:p>
+          <a:p>
+            <a:pPr eaLnBrk="1" hangingPunct="1">
+              <a:lnSpc>
+                <a:spcPct val="90000"/>
+              </a:lnSpc>
+            </a:pPr>
+            <a:r>
+              <a:rPr lang="en-US" altLang="zh-CN" sz="2400" dirty="0"/>
+              <a:t>4. </a:t>
+            </a:r>
+            <a:r>
+              <a:rPr lang="zh-CN" altLang="en-US" sz="2400" dirty="0"/>
+              <a:t>项目主要内容</a:t>
+            </a:r>
+            <a:endParaRPr lang="en-US" altLang="zh-CN" sz="2400" dirty="0"/>
+          </a:p>
+          <a:p>
+            <a:pPr eaLnBrk="1" hangingPunct="1">
+              <a:lnSpc>
+                <a:spcPct val="90000"/>
+              </a:lnSpc>
+            </a:pPr>
+            <a:r>
+              <a:rPr lang="zh-CN" altLang="en-US" sz="1600" dirty="0"/>
+              <a:t>（</a:t>
+            </a:r>
+            <a:r>
+              <a:rPr lang="en-US" altLang="zh-CN" sz="1600" dirty="0"/>
+              <a:t>1</a:t>
+            </a:r>
+            <a:r>
+              <a:rPr lang="zh-CN" altLang="en-US" sz="1600" dirty="0"/>
+              <a:t>）实现信息的发布、展示、动态更新等功能，向校内外提供一个信息交流窗口； （</a:t>
+            </a:r>
+            <a:r>
+              <a:rPr lang="en-US" altLang="zh-CN" sz="1600" dirty="0"/>
+              <a:t>2</a:t>
+            </a:r>
+            <a:r>
+              <a:rPr lang="zh-CN" altLang="en-US" sz="1600" dirty="0"/>
+              <a:t>）实现学院内教学资源共享，学院事务处理的平台； （</a:t>
+            </a:r>
+            <a:r>
+              <a:rPr lang="en-US" altLang="zh-CN" sz="1600" dirty="0"/>
+              <a:t>3</a:t>
+            </a:r>
+            <a:r>
+              <a:rPr lang="zh-CN" altLang="en-US" sz="1600" dirty="0"/>
+              <a:t>）实现学院内师生互动沟通等功能，为学院师生打造一个教学互动的平台； （</a:t>
+            </a:r>
+            <a:r>
+              <a:rPr lang="en-US" altLang="zh-CN" sz="1600" dirty="0"/>
+              <a:t>4</a:t>
+            </a:r>
+            <a:r>
+              <a:rPr lang="zh-CN" altLang="en-US" sz="1600" dirty="0"/>
+              <a:t>）实现用户自助管理和维护，节约后期运维费用。</a:t>
+            </a:r>
+            <a:endParaRPr lang="zh-CN" altLang="en-US" sz="2400" dirty="0"/>
           </a:p>
         </p:txBody>
       </p:sp>
       <p:sp>
         <p:nvSpPr>
-          <p:cNvPr id="13316" name="Rectangle 4">
+          <p:cNvPr id="66564" name="Rectangle 4">
             <a:extLst>
               <a:ext uri="{FF2B5EF4-FFF2-40B4-BE49-F238E27FC236}">
-                <a16:creationId xmlns:a16="http://schemas.microsoft.com/office/drawing/2014/main" id="{E9429D4A-B59A-425C-BEEC-331BBFD095C3}"/>
+                <a16:creationId xmlns:a16="http://schemas.microsoft.com/office/drawing/2014/main" id="{CAB7742A-B051-4A63-8F6B-96215A3A531F}"/>
               </a:ext>
             </a:extLst>
           </p:cNvPr>
@@ -42631,10 +44192,10 @@
       </p:sp>
       <p:sp>
         <p:nvSpPr>
-          <p:cNvPr id="13317" name="Line 5">
+          <p:cNvPr id="66565" name="Line 5">
             <a:extLst>
               <a:ext uri="{FF2B5EF4-FFF2-40B4-BE49-F238E27FC236}">
-                <a16:creationId xmlns:a16="http://schemas.microsoft.com/office/drawing/2014/main" id="{09FA7011-33E4-4B79-B0F9-B308F3D0BE16}"/>
+                <a16:creationId xmlns:a16="http://schemas.microsoft.com/office/drawing/2014/main" id="{1544192B-DD46-4BAA-BA33-7A4170E2C938}"/>
               </a:ext>
             </a:extLst>
           </p:cNvPr>
@@ -42677,10 +44238,2774 @@
         </p:txBody>
       </p:sp>
     </p:spTree>
+    <p:extLst>
+      <p:ext uri="{BB962C8B-B14F-4D97-AF65-F5344CB8AC3E}">
+        <p14:creationId xmlns:p14="http://schemas.microsoft.com/office/powerpoint/2010/main" val="84491450"/>
+      </p:ext>
+    </p:extLst>
   </p:cSld>
   <p:clrMapOvr>
     <a:masterClrMapping/>
   </p:clrMapOvr>
+</p:sld>
+</file>
+
+<file path=ppt/slides/slide6.xml><?xml version="1.0" encoding="utf-8"?>
+<p:sld xmlns:a="http://schemas.openxmlformats.org/drawingml/2006/main" xmlns:r="http://schemas.openxmlformats.org/officeDocument/2006/relationships" xmlns:p="http://schemas.openxmlformats.org/presentationml/2006/main">
+  <p:cSld>
+    <p:spTree>
+      <p:nvGrpSpPr>
+        <p:cNvPr id="1" name=""/>
+        <p:cNvGrpSpPr/>
+        <p:nvPr/>
+      </p:nvGrpSpPr>
+      <p:grpSpPr>
+        <a:xfrm>
+          <a:off x="0" y="0"/>
+          <a:ext cx="0" cy="0"/>
+          <a:chOff x="0" y="0"/>
+          <a:chExt cx="0" cy="0"/>
+        </a:xfrm>
+      </p:grpSpPr>
+      <p:sp>
+        <p:nvSpPr>
+          <p:cNvPr id="13314" name="Rectangle 2">
+            <a:extLst>
+              <a:ext uri="{FF2B5EF4-FFF2-40B4-BE49-F238E27FC236}">
+                <a16:creationId xmlns:a16="http://schemas.microsoft.com/office/drawing/2014/main" id="{BCF5866D-1E6A-4C29-8FF3-73C57E918680}"/>
+              </a:ext>
+            </a:extLst>
+          </p:cNvPr>
+          <p:cNvSpPr>
+            <a:spLocks noGrp="1" noChangeArrowheads="1"/>
+          </p:cNvSpPr>
+          <p:nvPr>
+            <p:ph type="title"/>
+          </p:nvPr>
+        </p:nvSpPr>
+        <p:spPr/>
+        <p:txBody>
+          <a:bodyPr/>
+          <a:lstStyle/>
+          <a:p>
+            <a:pPr algn="l" eaLnBrk="1" hangingPunct="1"/>
+            <a:r>
+              <a:rPr lang="en-US" altLang="zh-CN" sz="4000" b="1"/>
+              <a:t>2.1.2  CIO</a:t>
+            </a:r>
+            <a:r>
+              <a:rPr lang="zh-CN" altLang="en-US" sz="4000" b="1"/>
+              <a:t>的角色与信息系统项目</a:t>
+            </a:r>
+          </a:p>
+        </p:txBody>
+      </p:sp>
+      <p:sp>
+        <p:nvSpPr>
+          <p:cNvPr id="13315" name="Rectangle 3">
+            <a:extLst>
+              <a:ext uri="{FF2B5EF4-FFF2-40B4-BE49-F238E27FC236}">
+                <a16:creationId xmlns:a16="http://schemas.microsoft.com/office/drawing/2014/main" id="{EC295DC7-CDAD-4A6A-BA94-0024DB52A720}"/>
+              </a:ext>
+            </a:extLst>
+          </p:cNvPr>
+          <p:cNvSpPr>
+            <a:spLocks noGrp="1" noChangeArrowheads="1"/>
+          </p:cNvSpPr>
+          <p:nvPr>
+            <p:ph idx="1"/>
+          </p:nvPr>
+        </p:nvSpPr>
+        <p:spPr/>
+        <p:txBody>
+          <a:bodyPr/>
+          <a:lstStyle/>
+          <a:p>
+            <a:pPr eaLnBrk="1" hangingPunct="1"/>
+            <a:endParaRPr lang="en-US" altLang="zh-CN" sz="2400"/>
+          </a:p>
+          <a:p>
+            <a:pPr eaLnBrk="1" hangingPunct="1"/>
+            <a:r>
+              <a:rPr lang="en-US" altLang="zh-CN" sz="2400"/>
+              <a:t>CIO</a:t>
+            </a:r>
+            <a:r>
+              <a:rPr lang="zh-CN" altLang="en-US" sz="2400"/>
+              <a:t>既要负责领导信息系统项目的发起、可行性分析、决策制定、信息系统项目的规划和组织监督。</a:t>
+            </a:r>
+          </a:p>
+          <a:p>
+            <a:pPr eaLnBrk="1" hangingPunct="1"/>
+            <a:endParaRPr lang="en-US" altLang="zh-CN" sz="2400"/>
+          </a:p>
+          <a:p>
+            <a:pPr eaLnBrk="1" hangingPunct="1"/>
+            <a:r>
+              <a:rPr lang="zh-CN" altLang="en-US" sz="2400"/>
+              <a:t>又要负责信息系统的稳定可靠经济运行，</a:t>
+            </a:r>
+            <a:r>
+              <a:rPr lang="en-US" altLang="zh-CN" sz="2400"/>
+              <a:t>CIO</a:t>
+            </a:r>
+            <a:r>
+              <a:rPr lang="zh-CN" altLang="en-US" sz="2400"/>
+              <a:t>是信息系统正常可靠运行的管理者和保障者。 </a:t>
+            </a:r>
+          </a:p>
+        </p:txBody>
+      </p:sp>
+      <p:sp>
+        <p:nvSpPr>
+          <p:cNvPr id="13316" name="Rectangle 4">
+            <a:extLst>
+              <a:ext uri="{FF2B5EF4-FFF2-40B4-BE49-F238E27FC236}">
+                <a16:creationId xmlns:a16="http://schemas.microsoft.com/office/drawing/2014/main" id="{E9429D4A-B59A-425C-BEEC-331BBFD095C3}"/>
+              </a:ext>
+            </a:extLst>
+          </p:cNvPr>
+          <p:cNvSpPr>
+            <a:spLocks noGrp="1" noChangeArrowheads="1"/>
+          </p:cNvSpPr>
+          <p:nvPr>
+            <p:ph type="title" idx="4294967295"/>
+          </p:nvPr>
+        </p:nvSpPr>
+        <p:spPr>
+          <a:xfrm>
+            <a:off x="914400" y="130175"/>
+            <a:ext cx="8229600" cy="346075"/>
+          </a:xfrm>
+          <a:noFill/>
+        </p:spPr>
+        <p:txBody>
+          <a:bodyPr>
+            <a:normAutofit fontScale="90000"/>
+          </a:bodyPr>
+          <a:lstStyle/>
+          <a:p>
+            <a:pPr eaLnBrk="1" hangingPunct="1"/>
+            <a:r>
+              <a:rPr lang="zh-CN" altLang="en-US" sz="2000" b="1">
+                <a:solidFill>
+                  <a:srgbClr val="0000FF"/>
+                </a:solidFill>
+              </a:rPr>
+              <a:t>十一五规划教材                                          </a:t>
+            </a:r>
+            <a:r>
+              <a:rPr lang="en-US" altLang="zh-CN" sz="2000" b="1">
+                <a:solidFill>
+                  <a:srgbClr val="0000FF"/>
+                </a:solidFill>
+              </a:rPr>
+              <a:t>《</a:t>
+            </a:r>
+            <a:r>
+              <a:rPr lang="zh-CN" altLang="en-US" sz="2000" b="1">
+                <a:solidFill>
+                  <a:srgbClr val="0000FF"/>
+                </a:solidFill>
+              </a:rPr>
+              <a:t>信息系统项目管理</a:t>
+            </a:r>
+            <a:r>
+              <a:rPr lang="en-US" altLang="zh-CN" sz="2000" b="1">
+                <a:solidFill>
+                  <a:srgbClr val="0000FF"/>
+                </a:solidFill>
+              </a:rPr>
+              <a:t>》</a:t>
+            </a:r>
+            <a:r>
+              <a:rPr lang="zh-CN" altLang="en-US" sz="2000" b="1">
+                <a:solidFill>
+                  <a:srgbClr val="0000FF"/>
+                </a:solidFill>
+              </a:rPr>
+              <a:t>讲义</a:t>
+            </a:r>
+          </a:p>
+        </p:txBody>
+      </p:sp>
+      <p:sp>
+        <p:nvSpPr>
+          <p:cNvPr id="13317" name="Line 5">
+            <a:extLst>
+              <a:ext uri="{FF2B5EF4-FFF2-40B4-BE49-F238E27FC236}">
+                <a16:creationId xmlns:a16="http://schemas.microsoft.com/office/drawing/2014/main" id="{09FA7011-33E4-4B79-B0F9-B308F3D0BE16}"/>
+              </a:ext>
+            </a:extLst>
+          </p:cNvPr>
+          <p:cNvSpPr>
+            <a:spLocks noChangeShapeType="1"/>
+          </p:cNvSpPr>
+          <p:nvPr/>
+        </p:nvSpPr>
+        <p:spPr bwMode="auto">
+          <a:xfrm>
+            <a:off x="0" y="476250"/>
+            <a:ext cx="9144000" cy="0"/>
+          </a:xfrm>
+          <a:prstGeom prst="line">
+            <a:avLst/>
+          </a:prstGeom>
+          <a:noFill/>
+          <a:ln w="9525">
+            <a:solidFill>
+              <a:srgbClr val="9900CC"/>
+            </a:solidFill>
+            <a:round/>
+            <a:headEnd/>
+            <a:tailEnd/>
+          </a:ln>
+          <a:extLst>
+            <a:ext uri="{909E8E84-426E-40DD-AFC4-6F175D3DCCD1}">
+              <a14:hiddenFill xmlns:a14="http://schemas.microsoft.com/office/drawing/2010/main">
+                <a:noFill/>
+              </a14:hiddenFill>
+            </a:ext>
+          </a:extLst>
+        </p:spPr>
+        <p:txBody>
+          <a:bodyPr/>
+          <a:lstStyle/>
+          <a:p>
+            <a:endParaRPr lang="zh-CN" altLang="en-US"/>
+          </a:p>
+        </p:txBody>
+      </p:sp>
+    </p:spTree>
+  </p:cSld>
+  <p:clrMapOvr>
+    <a:masterClrMapping/>
+  </p:clrMapOvr>
+</p:sld>
+</file>
+
+<file path=ppt/slides/slide60.xml><?xml version="1.0" encoding="utf-8"?>
+<p:sld xmlns:a="http://schemas.openxmlformats.org/drawingml/2006/main" xmlns:r="http://schemas.openxmlformats.org/officeDocument/2006/relationships" xmlns:p="http://schemas.openxmlformats.org/presentationml/2006/main">
+  <p:cSld>
+    <p:spTree>
+      <p:nvGrpSpPr>
+        <p:cNvPr id="1" name=""/>
+        <p:cNvGrpSpPr/>
+        <p:nvPr/>
+      </p:nvGrpSpPr>
+      <p:grpSpPr>
+        <a:xfrm>
+          <a:off x="0" y="0"/>
+          <a:ext cx="0" cy="0"/>
+          <a:chOff x="0" y="0"/>
+          <a:chExt cx="0" cy="0"/>
+        </a:xfrm>
+      </p:grpSpPr>
+      <p:sp>
+        <p:nvSpPr>
+          <p:cNvPr id="66562" name="Rectangle 2">
+            <a:extLst>
+              <a:ext uri="{FF2B5EF4-FFF2-40B4-BE49-F238E27FC236}">
+                <a16:creationId xmlns:a16="http://schemas.microsoft.com/office/drawing/2014/main" id="{B0501DB5-196D-46F8-8844-34CD6174ABC1}"/>
+              </a:ext>
+            </a:extLst>
+          </p:cNvPr>
+          <p:cNvSpPr>
+            <a:spLocks noGrp="1" noChangeArrowheads="1"/>
+          </p:cNvSpPr>
+          <p:nvPr>
+            <p:ph type="title"/>
+          </p:nvPr>
+        </p:nvSpPr>
+        <p:spPr/>
+        <p:txBody>
+          <a:bodyPr/>
+          <a:lstStyle/>
+          <a:p>
+            <a:pPr marL="838200" indent="-838200" algn="l" eaLnBrk="1" hangingPunct="1"/>
+            <a:r>
+              <a:rPr lang="en-US" altLang="zh-CN" sz="3200" b="1"/>
+              <a:t>2.4.4 </a:t>
+            </a:r>
+            <a:r>
+              <a:rPr lang="zh-CN" altLang="en-US" sz="3200" b="1"/>
+              <a:t>案例：学院网站建设项目的项目章程</a:t>
+            </a:r>
+          </a:p>
+        </p:txBody>
+      </p:sp>
+      <p:sp>
+        <p:nvSpPr>
+          <p:cNvPr id="66563" name="Rectangle 3">
+            <a:extLst>
+              <a:ext uri="{FF2B5EF4-FFF2-40B4-BE49-F238E27FC236}">
+                <a16:creationId xmlns:a16="http://schemas.microsoft.com/office/drawing/2014/main" id="{7796420C-5F49-477E-9E2F-A17189C940F2}"/>
+              </a:ext>
+            </a:extLst>
+          </p:cNvPr>
+          <p:cNvSpPr>
+            <a:spLocks noGrp="1" noChangeArrowheads="1"/>
+          </p:cNvSpPr>
+          <p:nvPr>
+            <p:ph idx="1"/>
+          </p:nvPr>
+        </p:nvSpPr>
+        <p:spPr>
+          <a:xfrm>
+            <a:off x="628650" y="1825625"/>
+            <a:ext cx="7886700" cy="3619599"/>
+          </a:xfrm>
+        </p:spPr>
+        <p:txBody>
+          <a:bodyPr>
+            <a:noAutofit/>
+          </a:bodyPr>
+          <a:lstStyle/>
+          <a:p>
+            <a:pPr eaLnBrk="1" hangingPunct="1">
+              <a:lnSpc>
+                <a:spcPct val="90000"/>
+              </a:lnSpc>
+            </a:pPr>
+            <a:r>
+              <a:rPr lang="en-US" altLang="zh-CN" sz="2400" dirty="0"/>
+              <a:t>5. </a:t>
+            </a:r>
+            <a:r>
+              <a:rPr lang="zh-CN" altLang="en-US" sz="2400" dirty="0"/>
+              <a:t>项目的约束条件</a:t>
+            </a:r>
+            <a:endParaRPr lang="en-US" altLang="zh-CN" sz="2400" dirty="0"/>
+          </a:p>
+          <a:p>
+            <a:pPr eaLnBrk="1" hangingPunct="1">
+              <a:lnSpc>
+                <a:spcPct val="90000"/>
+              </a:lnSpc>
+            </a:pPr>
+            <a:r>
+              <a:rPr lang="zh-CN" altLang="en-US" sz="1600" dirty="0"/>
+              <a:t>（</a:t>
+            </a:r>
+            <a:r>
+              <a:rPr lang="en-US" altLang="zh-CN" sz="1600" dirty="0"/>
+              <a:t>1</a:t>
+            </a:r>
+            <a:r>
+              <a:rPr lang="zh-CN" altLang="en-US" sz="1600" dirty="0"/>
+              <a:t>）时间约束：本项目从 </a:t>
+            </a:r>
+            <a:r>
+              <a:rPr lang="en-US" altLang="zh-CN" sz="1600" dirty="0"/>
+              <a:t>2013 </a:t>
+            </a:r>
+            <a:r>
+              <a:rPr lang="zh-CN" altLang="en-US" sz="1600" dirty="0"/>
+              <a:t>年 </a:t>
+            </a:r>
+            <a:r>
+              <a:rPr lang="en-US" altLang="zh-CN" sz="1600" dirty="0"/>
+              <a:t>10 </a:t>
+            </a:r>
+            <a:r>
+              <a:rPr lang="zh-CN" altLang="en-US" sz="1600" dirty="0"/>
+              <a:t>月 </a:t>
+            </a:r>
+            <a:r>
+              <a:rPr lang="en-US" altLang="zh-CN" sz="1600" dirty="0"/>
+              <a:t>1 </a:t>
+            </a:r>
+            <a:r>
+              <a:rPr lang="zh-CN" altLang="en-US" sz="1600" dirty="0"/>
+              <a:t>日开始到 </a:t>
+            </a:r>
+            <a:r>
+              <a:rPr lang="en-US" altLang="zh-CN" sz="1600" dirty="0"/>
+              <a:t>2013 </a:t>
+            </a:r>
+            <a:r>
+              <a:rPr lang="zh-CN" altLang="en-US" sz="1600" dirty="0"/>
+              <a:t>年 </a:t>
+            </a:r>
+            <a:r>
+              <a:rPr lang="en-US" altLang="zh-CN" sz="1600" dirty="0"/>
+              <a:t>12 </a:t>
+            </a:r>
+            <a:r>
+              <a:rPr lang="zh-CN" altLang="en-US" sz="1600" dirty="0"/>
+              <a:t>月 </a:t>
+            </a:r>
+            <a:r>
+              <a:rPr lang="en-US" altLang="zh-CN" sz="1600" dirty="0"/>
+              <a:t>20 </a:t>
+            </a:r>
+            <a:r>
+              <a:rPr lang="zh-CN" altLang="en-US" sz="1600" dirty="0"/>
+              <a:t>日结束并交付最终成果。 （</a:t>
+            </a:r>
+            <a:r>
+              <a:rPr lang="en-US" altLang="zh-CN" sz="1600" dirty="0"/>
+              <a:t>2</a:t>
+            </a:r>
+            <a:r>
+              <a:rPr lang="zh-CN" altLang="en-US" sz="1600" dirty="0"/>
+              <a:t>）质量约束： ① 操作简便、界面友好，用户满意度比现有网站提高 </a:t>
+            </a:r>
+            <a:r>
+              <a:rPr lang="en-US" altLang="zh-CN" sz="1600" dirty="0"/>
+              <a:t>30%</a:t>
+            </a:r>
+            <a:r>
+              <a:rPr lang="zh-CN" altLang="en-US" sz="1600" dirty="0"/>
+              <a:t>，访问满意率提高 </a:t>
+            </a:r>
+            <a:r>
+              <a:rPr lang="en-US" altLang="zh-CN" sz="1600" dirty="0"/>
+              <a:t>50%</a:t>
+            </a:r>
+            <a:r>
+              <a:rPr lang="zh-CN" altLang="en-US" sz="1600" dirty="0"/>
+              <a:t>； ② 系统正式上线后运行故障率低于 </a:t>
+            </a:r>
+            <a:r>
+              <a:rPr lang="en-US" altLang="zh-CN" sz="1600" dirty="0"/>
+              <a:t>5%</a:t>
+            </a:r>
+            <a:r>
+              <a:rPr lang="zh-CN" altLang="en-US" sz="1600" dirty="0"/>
+              <a:t>，并能持续运行三个月无重大软件故障； ③ 系统可承受的并发连接数达到 </a:t>
+            </a:r>
+            <a:r>
+              <a:rPr lang="en-US" altLang="zh-CN" sz="1600" dirty="0"/>
+              <a:t>500 </a:t>
+            </a:r>
+            <a:r>
+              <a:rPr lang="zh-CN" altLang="en-US" sz="1600" dirty="0"/>
+              <a:t>个； ④ 项目进行中所确立的各文档版本清晰，内容完整、明确； ⑤ 系统编码的一致性，便于推广重用和自维护。 （</a:t>
+            </a:r>
+            <a:r>
+              <a:rPr lang="en-US" altLang="zh-CN" sz="1600" dirty="0"/>
+              <a:t>3</a:t>
+            </a:r>
+            <a:r>
+              <a:rPr lang="zh-CN" altLang="en-US" sz="1600" dirty="0"/>
+              <a:t>）费用预算：项目总费用 </a:t>
+            </a:r>
+            <a:r>
+              <a:rPr lang="en-US" altLang="zh-CN" sz="1600" dirty="0"/>
+              <a:t>30 000 </a:t>
+            </a:r>
+            <a:r>
+              <a:rPr lang="zh-CN" altLang="en-US" sz="1600" dirty="0"/>
+              <a:t>元人民币，其中软件开发费用 </a:t>
+            </a:r>
+            <a:r>
+              <a:rPr lang="en-US" altLang="zh-CN" sz="1600" dirty="0"/>
+              <a:t>10 000 </a:t>
+            </a:r>
+            <a:r>
+              <a:rPr lang="zh-CN" altLang="en-US" sz="1600" dirty="0"/>
+              <a:t>元，硬件采购费用 </a:t>
+            </a:r>
+            <a:r>
+              <a:rPr lang="en-US" altLang="zh-CN" sz="1600" dirty="0"/>
+              <a:t>15 000 </a:t>
+            </a:r>
+            <a:r>
+              <a:rPr lang="zh-CN" altLang="en-US" sz="1600" dirty="0"/>
+              <a:t>元，维护费用 </a:t>
+            </a:r>
+            <a:r>
+              <a:rPr lang="en-US" altLang="zh-CN" sz="1600" dirty="0"/>
+              <a:t>5000 </a:t>
+            </a:r>
+            <a:r>
+              <a:rPr lang="zh-CN" altLang="en-US" sz="1600" dirty="0"/>
+              <a:t>元。因而开发合同金额为 </a:t>
+            </a:r>
+            <a:r>
+              <a:rPr lang="en-US" altLang="zh-CN" sz="1600" dirty="0"/>
+              <a:t>25 000 </a:t>
+            </a:r>
+            <a:r>
+              <a:rPr lang="zh-CN" altLang="en-US" sz="1600" dirty="0"/>
+              <a:t>元人民币。</a:t>
+            </a:r>
+            <a:endParaRPr lang="zh-CN" altLang="en-US" sz="2400" dirty="0"/>
+          </a:p>
+          <a:p>
+            <a:pPr eaLnBrk="1" hangingPunct="1">
+              <a:lnSpc>
+                <a:spcPct val="90000"/>
+              </a:lnSpc>
+            </a:pPr>
+            <a:endParaRPr lang="zh-CN" altLang="en-US" sz="2400" dirty="0"/>
+          </a:p>
+        </p:txBody>
+      </p:sp>
+      <p:sp>
+        <p:nvSpPr>
+          <p:cNvPr id="66564" name="Rectangle 4">
+            <a:extLst>
+              <a:ext uri="{FF2B5EF4-FFF2-40B4-BE49-F238E27FC236}">
+                <a16:creationId xmlns:a16="http://schemas.microsoft.com/office/drawing/2014/main" id="{CAB7742A-B051-4A63-8F6B-96215A3A531F}"/>
+              </a:ext>
+            </a:extLst>
+          </p:cNvPr>
+          <p:cNvSpPr>
+            <a:spLocks noGrp="1" noChangeArrowheads="1"/>
+          </p:cNvSpPr>
+          <p:nvPr>
+            <p:ph type="title" idx="4294967295"/>
+          </p:nvPr>
+        </p:nvSpPr>
+        <p:spPr>
+          <a:xfrm>
+            <a:off x="914400" y="130175"/>
+            <a:ext cx="8229600" cy="346075"/>
+          </a:xfrm>
+          <a:noFill/>
+        </p:spPr>
+        <p:txBody>
+          <a:bodyPr>
+            <a:normAutofit fontScale="90000"/>
+          </a:bodyPr>
+          <a:lstStyle/>
+          <a:p>
+            <a:pPr eaLnBrk="1" hangingPunct="1"/>
+            <a:r>
+              <a:rPr lang="zh-CN" altLang="en-US" sz="2000" b="1">
+                <a:solidFill>
+                  <a:srgbClr val="0000FF"/>
+                </a:solidFill>
+              </a:rPr>
+              <a:t>十一五规划教材                                          </a:t>
+            </a:r>
+            <a:r>
+              <a:rPr lang="en-US" altLang="zh-CN" sz="2000" b="1">
+                <a:solidFill>
+                  <a:srgbClr val="0000FF"/>
+                </a:solidFill>
+              </a:rPr>
+              <a:t>《</a:t>
+            </a:r>
+            <a:r>
+              <a:rPr lang="zh-CN" altLang="en-US" sz="2000" b="1">
+                <a:solidFill>
+                  <a:srgbClr val="0000FF"/>
+                </a:solidFill>
+              </a:rPr>
+              <a:t>信息系统项目管理</a:t>
+            </a:r>
+            <a:r>
+              <a:rPr lang="en-US" altLang="zh-CN" sz="2000" b="1">
+                <a:solidFill>
+                  <a:srgbClr val="0000FF"/>
+                </a:solidFill>
+              </a:rPr>
+              <a:t>》</a:t>
+            </a:r>
+            <a:r>
+              <a:rPr lang="zh-CN" altLang="en-US" sz="2000" b="1">
+                <a:solidFill>
+                  <a:srgbClr val="0000FF"/>
+                </a:solidFill>
+              </a:rPr>
+              <a:t>讲义</a:t>
+            </a:r>
+          </a:p>
+        </p:txBody>
+      </p:sp>
+      <p:sp>
+        <p:nvSpPr>
+          <p:cNvPr id="66565" name="Line 5">
+            <a:extLst>
+              <a:ext uri="{FF2B5EF4-FFF2-40B4-BE49-F238E27FC236}">
+                <a16:creationId xmlns:a16="http://schemas.microsoft.com/office/drawing/2014/main" id="{1544192B-DD46-4BAA-BA33-7A4170E2C938}"/>
+              </a:ext>
+            </a:extLst>
+          </p:cNvPr>
+          <p:cNvSpPr>
+            <a:spLocks noChangeShapeType="1"/>
+          </p:cNvSpPr>
+          <p:nvPr/>
+        </p:nvSpPr>
+        <p:spPr bwMode="auto">
+          <a:xfrm>
+            <a:off x="0" y="476250"/>
+            <a:ext cx="9144000" cy="0"/>
+          </a:xfrm>
+          <a:prstGeom prst="line">
+            <a:avLst/>
+          </a:prstGeom>
+          <a:noFill/>
+          <a:ln w="9525">
+            <a:solidFill>
+              <a:srgbClr val="9900CC"/>
+            </a:solidFill>
+            <a:round/>
+            <a:headEnd/>
+            <a:tailEnd/>
+          </a:ln>
+          <a:extLst>
+            <a:ext uri="{909E8E84-426E-40DD-AFC4-6F175D3DCCD1}">
+              <a14:hiddenFill xmlns:a14="http://schemas.microsoft.com/office/drawing/2010/main">
+                <a:noFill/>
+              </a14:hiddenFill>
+            </a:ext>
+          </a:extLst>
+        </p:spPr>
+        <p:txBody>
+          <a:bodyPr/>
+          <a:lstStyle/>
+          <a:p>
+            <a:endParaRPr lang="zh-CN" altLang="en-US"/>
+          </a:p>
+        </p:txBody>
+      </p:sp>
+    </p:spTree>
+    <p:extLst>
+      <p:ext uri="{BB962C8B-B14F-4D97-AF65-F5344CB8AC3E}">
+        <p14:creationId xmlns:p14="http://schemas.microsoft.com/office/powerpoint/2010/main" val="3116604503"/>
+      </p:ext>
+    </p:extLst>
+  </p:cSld>
+  <p:clrMapOvr>
+    <a:masterClrMapping/>
+  </p:clrMapOvr>
+</p:sld>
+</file>
+
+<file path=ppt/slides/slide61.xml><?xml version="1.0" encoding="utf-8"?>
+<p:sld xmlns:a="http://schemas.openxmlformats.org/drawingml/2006/main" xmlns:r="http://schemas.openxmlformats.org/officeDocument/2006/relationships" xmlns:p="http://schemas.openxmlformats.org/presentationml/2006/main">
+  <p:cSld>
+    <p:spTree>
+      <p:nvGrpSpPr>
+        <p:cNvPr id="1" name=""/>
+        <p:cNvGrpSpPr/>
+        <p:nvPr/>
+      </p:nvGrpSpPr>
+      <p:grpSpPr>
+        <a:xfrm>
+          <a:off x="0" y="0"/>
+          <a:ext cx="0" cy="0"/>
+          <a:chOff x="0" y="0"/>
+          <a:chExt cx="0" cy="0"/>
+        </a:xfrm>
+      </p:grpSpPr>
+      <p:sp>
+        <p:nvSpPr>
+          <p:cNvPr id="66562" name="Rectangle 2">
+            <a:extLst>
+              <a:ext uri="{FF2B5EF4-FFF2-40B4-BE49-F238E27FC236}">
+                <a16:creationId xmlns:a16="http://schemas.microsoft.com/office/drawing/2014/main" id="{B0501DB5-196D-46F8-8844-34CD6174ABC1}"/>
+              </a:ext>
+            </a:extLst>
+          </p:cNvPr>
+          <p:cNvSpPr>
+            <a:spLocks noGrp="1" noChangeArrowheads="1"/>
+          </p:cNvSpPr>
+          <p:nvPr>
+            <p:ph type="title"/>
+          </p:nvPr>
+        </p:nvSpPr>
+        <p:spPr/>
+        <p:txBody>
+          <a:bodyPr/>
+          <a:lstStyle/>
+          <a:p>
+            <a:pPr marL="838200" indent="-838200" algn="l" eaLnBrk="1" hangingPunct="1"/>
+            <a:r>
+              <a:rPr lang="en-US" altLang="zh-CN" sz="3200" b="1"/>
+              <a:t>2.4.4 </a:t>
+            </a:r>
+            <a:r>
+              <a:rPr lang="zh-CN" altLang="en-US" sz="3200" b="1"/>
+              <a:t>案例：学院网站建设项目的项目章程</a:t>
+            </a:r>
+          </a:p>
+        </p:txBody>
+      </p:sp>
+      <p:sp>
+        <p:nvSpPr>
+          <p:cNvPr id="66563" name="Rectangle 3">
+            <a:extLst>
+              <a:ext uri="{FF2B5EF4-FFF2-40B4-BE49-F238E27FC236}">
+                <a16:creationId xmlns:a16="http://schemas.microsoft.com/office/drawing/2014/main" id="{7796420C-5F49-477E-9E2F-A17189C940F2}"/>
+              </a:ext>
+            </a:extLst>
+          </p:cNvPr>
+          <p:cNvSpPr>
+            <a:spLocks noGrp="1" noChangeArrowheads="1"/>
+          </p:cNvSpPr>
+          <p:nvPr>
+            <p:ph idx="1"/>
+          </p:nvPr>
+        </p:nvSpPr>
+        <p:spPr>
+          <a:xfrm>
+            <a:off x="395536" y="1556793"/>
+            <a:ext cx="7886700" cy="1325563"/>
+          </a:xfrm>
+        </p:spPr>
+        <p:txBody>
+          <a:bodyPr>
+            <a:noAutofit/>
+          </a:bodyPr>
+          <a:lstStyle/>
+          <a:p>
+            <a:pPr eaLnBrk="1" hangingPunct="1">
+              <a:lnSpc>
+                <a:spcPct val="90000"/>
+              </a:lnSpc>
+            </a:pPr>
+            <a:r>
+              <a:rPr lang="en-US" altLang="zh-CN" sz="2400" dirty="0"/>
+              <a:t>6. </a:t>
+            </a:r>
+            <a:r>
+              <a:rPr lang="zh-CN" altLang="en-US" sz="2400" dirty="0"/>
+              <a:t>项目的人员组成与职责分配 </a:t>
+            </a:r>
+            <a:endParaRPr lang="en-US" altLang="zh-CN" sz="2400" dirty="0"/>
+          </a:p>
+          <a:p>
+            <a:r>
+              <a:rPr lang="zh-CN" altLang="en-US" sz="1600" dirty="0"/>
+              <a:t>本项目的人员组成与职责分配如表 </a:t>
+            </a:r>
+            <a:r>
+              <a:rPr lang="en-US" altLang="zh-CN" sz="1600" dirty="0"/>
+              <a:t>2.1 </a:t>
+            </a:r>
+            <a:r>
+              <a:rPr lang="zh-CN" altLang="en-US" sz="1600" dirty="0"/>
+              <a:t>所示。</a:t>
+            </a:r>
+          </a:p>
+          <a:p>
+            <a:r>
+              <a:rPr lang="zh-CN" altLang="en-US" sz="1600" b="1" dirty="0"/>
+              <a:t>表 </a:t>
+            </a:r>
+            <a:r>
+              <a:rPr lang="en-US" altLang="zh-CN" sz="1600" b="1" dirty="0"/>
+              <a:t>2.1 </a:t>
+            </a:r>
+            <a:r>
+              <a:rPr lang="zh-CN" altLang="en-US" sz="1600" b="1" dirty="0"/>
+              <a:t>项目的人员组成与职责分配</a:t>
+            </a:r>
+            <a:endParaRPr lang="zh-CN" altLang="en-US" sz="1600" dirty="0"/>
+          </a:p>
+          <a:p>
+            <a:pPr eaLnBrk="1" hangingPunct="1">
+              <a:lnSpc>
+                <a:spcPct val="90000"/>
+              </a:lnSpc>
+            </a:pPr>
+            <a:endParaRPr lang="zh-CN" altLang="en-US" sz="2400" dirty="0"/>
+          </a:p>
+        </p:txBody>
+      </p:sp>
+      <p:sp>
+        <p:nvSpPr>
+          <p:cNvPr id="66564" name="Rectangle 4">
+            <a:extLst>
+              <a:ext uri="{FF2B5EF4-FFF2-40B4-BE49-F238E27FC236}">
+                <a16:creationId xmlns:a16="http://schemas.microsoft.com/office/drawing/2014/main" id="{CAB7742A-B051-4A63-8F6B-96215A3A531F}"/>
+              </a:ext>
+            </a:extLst>
+          </p:cNvPr>
+          <p:cNvSpPr>
+            <a:spLocks noGrp="1" noChangeArrowheads="1"/>
+          </p:cNvSpPr>
+          <p:nvPr>
+            <p:ph type="title" idx="4294967295"/>
+          </p:nvPr>
+        </p:nvSpPr>
+        <p:spPr>
+          <a:xfrm>
+            <a:off x="914400" y="130175"/>
+            <a:ext cx="8229600" cy="346075"/>
+          </a:xfrm>
+          <a:noFill/>
+        </p:spPr>
+        <p:txBody>
+          <a:bodyPr>
+            <a:normAutofit fontScale="90000"/>
+          </a:bodyPr>
+          <a:lstStyle/>
+          <a:p>
+            <a:pPr eaLnBrk="1" hangingPunct="1"/>
+            <a:r>
+              <a:rPr lang="zh-CN" altLang="en-US" sz="2000" b="1">
+                <a:solidFill>
+                  <a:srgbClr val="0000FF"/>
+                </a:solidFill>
+              </a:rPr>
+              <a:t>十一五规划教材                                          </a:t>
+            </a:r>
+            <a:r>
+              <a:rPr lang="en-US" altLang="zh-CN" sz="2000" b="1">
+                <a:solidFill>
+                  <a:srgbClr val="0000FF"/>
+                </a:solidFill>
+              </a:rPr>
+              <a:t>《</a:t>
+            </a:r>
+            <a:r>
+              <a:rPr lang="zh-CN" altLang="en-US" sz="2000" b="1">
+                <a:solidFill>
+                  <a:srgbClr val="0000FF"/>
+                </a:solidFill>
+              </a:rPr>
+              <a:t>信息系统项目管理</a:t>
+            </a:r>
+            <a:r>
+              <a:rPr lang="en-US" altLang="zh-CN" sz="2000" b="1">
+                <a:solidFill>
+                  <a:srgbClr val="0000FF"/>
+                </a:solidFill>
+              </a:rPr>
+              <a:t>》</a:t>
+            </a:r>
+            <a:r>
+              <a:rPr lang="zh-CN" altLang="en-US" sz="2000" b="1">
+                <a:solidFill>
+                  <a:srgbClr val="0000FF"/>
+                </a:solidFill>
+              </a:rPr>
+              <a:t>讲义</a:t>
+            </a:r>
+          </a:p>
+        </p:txBody>
+      </p:sp>
+      <p:sp>
+        <p:nvSpPr>
+          <p:cNvPr id="66565" name="Line 5">
+            <a:extLst>
+              <a:ext uri="{FF2B5EF4-FFF2-40B4-BE49-F238E27FC236}">
+                <a16:creationId xmlns:a16="http://schemas.microsoft.com/office/drawing/2014/main" id="{1544192B-DD46-4BAA-BA33-7A4170E2C938}"/>
+              </a:ext>
+            </a:extLst>
+          </p:cNvPr>
+          <p:cNvSpPr>
+            <a:spLocks noChangeShapeType="1"/>
+          </p:cNvSpPr>
+          <p:nvPr/>
+        </p:nvSpPr>
+        <p:spPr bwMode="auto">
+          <a:xfrm>
+            <a:off x="0" y="476250"/>
+            <a:ext cx="9144000" cy="0"/>
+          </a:xfrm>
+          <a:prstGeom prst="line">
+            <a:avLst/>
+          </a:prstGeom>
+          <a:noFill/>
+          <a:ln w="9525">
+            <a:solidFill>
+              <a:srgbClr val="9900CC"/>
+            </a:solidFill>
+            <a:round/>
+            <a:headEnd/>
+            <a:tailEnd/>
+          </a:ln>
+          <a:extLst>
+            <a:ext uri="{909E8E84-426E-40DD-AFC4-6F175D3DCCD1}">
+              <a14:hiddenFill xmlns:a14="http://schemas.microsoft.com/office/drawing/2010/main">
+                <a:noFill/>
+              </a14:hiddenFill>
+            </a:ext>
+          </a:extLst>
+        </p:spPr>
+        <p:txBody>
+          <a:bodyPr/>
+          <a:lstStyle/>
+          <a:p>
+            <a:endParaRPr lang="zh-CN" altLang="en-US"/>
+          </a:p>
+        </p:txBody>
+      </p:sp>
+      <p:graphicFrame>
+        <p:nvGraphicFramePr>
+          <p:cNvPr id="2" name="表格 1">
+            <a:extLst>
+              <a:ext uri="{FF2B5EF4-FFF2-40B4-BE49-F238E27FC236}">
+                <a16:creationId xmlns:a16="http://schemas.microsoft.com/office/drawing/2014/main" id="{8C82312A-EC36-4A5E-91A1-520B6615C90D}"/>
+              </a:ext>
+            </a:extLst>
+          </p:cNvPr>
+          <p:cNvGraphicFramePr>
+            <a:graphicFrameLocks noGrp="1"/>
+          </p:cNvGraphicFramePr>
+          <p:nvPr>
+            <p:extLst>
+              <p:ext uri="{D42A27DB-BD31-4B8C-83A1-F6EECF244321}">
+                <p14:modId xmlns:p14="http://schemas.microsoft.com/office/powerpoint/2010/main" val="2444928128"/>
+              </p:ext>
+            </p:extLst>
+          </p:nvPr>
+        </p:nvGraphicFramePr>
+        <p:xfrm>
+          <a:off x="1187624" y="2818809"/>
+          <a:ext cx="7632849" cy="3656794"/>
+        </p:xfrm>
+        <a:graphic>
+          <a:graphicData uri="http://schemas.openxmlformats.org/drawingml/2006/table">
+            <a:tbl>
+              <a:tblPr/>
+              <a:tblGrid>
+                <a:gridCol w="2112235">
+                  <a:extLst>
+                    <a:ext uri="{9D8B030D-6E8A-4147-A177-3AD203B41FA5}">
+                      <a16:colId xmlns:a16="http://schemas.microsoft.com/office/drawing/2014/main" val="2141437941"/>
+                    </a:ext>
+                  </a:extLst>
+                </a:gridCol>
+                <a:gridCol w="1488165">
+                  <a:extLst>
+                    <a:ext uri="{9D8B030D-6E8A-4147-A177-3AD203B41FA5}">
+                      <a16:colId xmlns:a16="http://schemas.microsoft.com/office/drawing/2014/main" val="3258643619"/>
+                    </a:ext>
+                  </a:extLst>
+                </a:gridCol>
+                <a:gridCol w="4032449">
+                  <a:extLst>
+                    <a:ext uri="{9D8B030D-6E8A-4147-A177-3AD203B41FA5}">
+                      <a16:colId xmlns:a16="http://schemas.microsoft.com/office/drawing/2014/main" val="604642985"/>
+                    </a:ext>
+                  </a:extLst>
+                </a:gridCol>
+              </a:tblGrid>
+              <a:tr h="328862">
+                <a:tc>
+                  <a:txBody>
+                    <a:bodyPr/>
+                    <a:lstStyle/>
+                    <a:p>
+                      <a:r>
+                        <a:rPr lang="zh-CN" altLang="en-US" b="1" dirty="0">
+                          <a:effectLst/>
+                          <a:latin typeface="Google Sans Text"/>
+                        </a:rPr>
+                        <a:t>人员组成</a:t>
+                      </a:r>
+                      <a:endParaRPr lang="zh-CN" altLang="en-US" dirty="0">
+                        <a:effectLst/>
+                        <a:latin typeface="Google Sans Text"/>
+                      </a:endParaRPr>
+                    </a:p>
+                  </a:txBody>
+                  <a:tcPr anchor="ctr">
+                    <a:lnL w="5443" cap="flat" cmpd="sng" algn="ctr">
+                      <a:solidFill>
+                        <a:schemeClr val="bg1"/>
+                      </a:solidFill>
+                      <a:prstDash val="solid"/>
+                      <a:round/>
+                      <a:headEnd type="none" w="med" len="med"/>
+                      <a:tailEnd type="none" w="med" len="med"/>
+                    </a:lnL>
+                    <a:lnR w="5443" cap="flat" cmpd="sng" algn="ctr">
+                      <a:solidFill>
+                        <a:schemeClr val="bg1"/>
+                      </a:solidFill>
+                      <a:prstDash val="solid"/>
+                      <a:round/>
+                      <a:headEnd type="none" w="med" len="med"/>
+                      <a:tailEnd type="none" w="med" len="med"/>
+                    </a:lnR>
+                    <a:lnT w="5443" cap="flat" cmpd="sng" algn="ctr">
+                      <a:solidFill>
+                        <a:schemeClr val="bg1"/>
+                      </a:solidFill>
+                      <a:prstDash val="solid"/>
+                      <a:round/>
+                      <a:headEnd type="none" w="med" len="med"/>
+                      <a:tailEnd type="none" w="med" len="med"/>
+                    </a:lnT>
+                    <a:lnB w="5443" cap="flat" cmpd="sng" algn="ctr">
+                      <a:solidFill>
+                        <a:schemeClr val="bg1"/>
+                      </a:solidFill>
+                      <a:prstDash val="solid"/>
+                      <a:round/>
+                      <a:headEnd type="none" w="med" len="med"/>
+                      <a:tailEnd type="none" w="med" len="med"/>
+                    </a:lnB>
+                  </a:tcPr>
+                </a:tc>
+                <a:tc>
+                  <a:txBody>
+                    <a:bodyPr/>
+                    <a:lstStyle/>
+                    <a:p>
+                      <a:r>
+                        <a:rPr lang="zh-CN" altLang="en-US" b="1" dirty="0">
+                          <a:effectLst/>
+                          <a:latin typeface="Google Sans Text"/>
+                        </a:rPr>
+                        <a:t>姓名</a:t>
+                      </a:r>
+                      <a:endParaRPr lang="zh-CN" altLang="en-US" dirty="0">
+                        <a:effectLst/>
+                        <a:latin typeface="Google Sans Text"/>
+                      </a:endParaRPr>
+                    </a:p>
+                  </a:txBody>
+                  <a:tcPr anchor="ctr">
+                    <a:lnL w="5443" cap="flat" cmpd="sng" algn="ctr">
+                      <a:solidFill>
+                        <a:schemeClr val="bg1"/>
+                      </a:solidFill>
+                      <a:prstDash val="solid"/>
+                      <a:round/>
+                      <a:headEnd type="none" w="med" len="med"/>
+                      <a:tailEnd type="none" w="med" len="med"/>
+                    </a:lnL>
+                    <a:lnR w="5443" cap="flat" cmpd="sng" algn="ctr">
+                      <a:solidFill>
+                        <a:schemeClr val="bg1"/>
+                      </a:solidFill>
+                      <a:prstDash val="solid"/>
+                      <a:round/>
+                      <a:headEnd type="none" w="med" len="med"/>
+                      <a:tailEnd type="none" w="med" len="med"/>
+                    </a:lnR>
+                    <a:lnT w="5443" cap="flat" cmpd="sng" algn="ctr">
+                      <a:solidFill>
+                        <a:schemeClr val="bg1"/>
+                      </a:solidFill>
+                      <a:prstDash val="solid"/>
+                      <a:round/>
+                      <a:headEnd type="none" w="med" len="med"/>
+                      <a:tailEnd type="none" w="med" len="med"/>
+                    </a:lnT>
+                    <a:lnB w="5443" cap="flat" cmpd="sng" algn="ctr">
+                      <a:solidFill>
+                        <a:schemeClr val="bg1"/>
+                      </a:solidFill>
+                      <a:prstDash val="solid"/>
+                      <a:round/>
+                      <a:headEnd type="none" w="med" len="med"/>
+                      <a:tailEnd type="none" w="med" len="med"/>
+                    </a:lnB>
+                  </a:tcPr>
+                </a:tc>
+                <a:tc>
+                  <a:txBody>
+                    <a:bodyPr/>
+                    <a:lstStyle/>
+                    <a:p>
+                      <a:r>
+                        <a:rPr lang="zh-CN" altLang="en-US" b="1">
+                          <a:effectLst/>
+                          <a:latin typeface="Google Sans Text"/>
+                        </a:rPr>
+                        <a:t>职责</a:t>
+                      </a:r>
+                      <a:endParaRPr lang="zh-CN" altLang="en-US">
+                        <a:effectLst/>
+                        <a:latin typeface="Google Sans Text"/>
+                      </a:endParaRPr>
+                    </a:p>
+                  </a:txBody>
+                  <a:tcPr anchor="ctr">
+                    <a:lnL w="5443" cap="flat" cmpd="sng" algn="ctr">
+                      <a:solidFill>
+                        <a:schemeClr val="bg1"/>
+                      </a:solidFill>
+                      <a:prstDash val="solid"/>
+                      <a:round/>
+                      <a:headEnd type="none" w="med" len="med"/>
+                      <a:tailEnd type="none" w="med" len="med"/>
+                    </a:lnL>
+                    <a:lnR w="5443" cap="flat" cmpd="sng" algn="ctr">
+                      <a:solidFill>
+                        <a:schemeClr val="bg1"/>
+                      </a:solidFill>
+                      <a:prstDash val="solid"/>
+                      <a:round/>
+                      <a:headEnd type="none" w="med" len="med"/>
+                      <a:tailEnd type="none" w="med" len="med"/>
+                    </a:lnR>
+                    <a:lnT w="5443" cap="flat" cmpd="sng" algn="ctr">
+                      <a:solidFill>
+                        <a:schemeClr val="bg1"/>
+                      </a:solidFill>
+                      <a:prstDash val="solid"/>
+                      <a:round/>
+                      <a:headEnd type="none" w="med" len="med"/>
+                      <a:tailEnd type="none" w="med" len="med"/>
+                    </a:lnT>
+                    <a:lnB w="5443" cap="flat" cmpd="sng" algn="ctr">
+                      <a:solidFill>
+                        <a:schemeClr val="bg1"/>
+                      </a:solidFill>
+                      <a:prstDash val="solid"/>
+                      <a:round/>
+                      <a:headEnd type="none" w="med" len="med"/>
+                      <a:tailEnd type="none" w="med" len="med"/>
+                    </a:lnB>
+                  </a:tcPr>
+                </a:tc>
+                <a:extLst>
+                  <a:ext uri="{0D108BD9-81ED-4DB2-BD59-A6C34878D82A}">
+                    <a16:rowId xmlns:a16="http://schemas.microsoft.com/office/drawing/2014/main" val="4234915313"/>
+                  </a:ext>
+                </a:extLst>
+              </a:tr>
+              <a:tr h="822154">
+                <a:tc>
+                  <a:txBody>
+                    <a:bodyPr/>
+                    <a:lstStyle/>
+                    <a:p>
+                      <a:r>
+                        <a:rPr lang="zh-CN" altLang="en-US">
+                          <a:effectLst/>
+                          <a:latin typeface="Google Sans Text"/>
+                        </a:rPr>
+                        <a:t>项目经理</a:t>
+                      </a:r>
+                    </a:p>
+                  </a:txBody>
+                  <a:tcPr anchor="ctr">
+                    <a:lnL w="5443" cap="flat" cmpd="sng" algn="ctr">
+                      <a:solidFill>
+                        <a:schemeClr val="bg1"/>
+                      </a:solidFill>
+                      <a:prstDash val="solid"/>
+                      <a:round/>
+                      <a:headEnd type="none" w="med" len="med"/>
+                      <a:tailEnd type="none" w="med" len="med"/>
+                    </a:lnL>
+                    <a:lnR w="5443" cap="flat" cmpd="sng" algn="ctr">
+                      <a:solidFill>
+                        <a:schemeClr val="bg1"/>
+                      </a:solidFill>
+                      <a:prstDash val="solid"/>
+                      <a:round/>
+                      <a:headEnd type="none" w="med" len="med"/>
+                      <a:tailEnd type="none" w="med" len="med"/>
+                    </a:lnR>
+                    <a:lnT w="5443" cap="flat" cmpd="sng" algn="ctr">
+                      <a:solidFill>
+                        <a:schemeClr val="bg1"/>
+                      </a:solidFill>
+                      <a:prstDash val="solid"/>
+                      <a:round/>
+                      <a:headEnd type="none" w="med" len="med"/>
+                      <a:tailEnd type="none" w="med" len="med"/>
+                    </a:lnT>
+                    <a:lnB w="5443" cap="flat" cmpd="sng" algn="ctr">
+                      <a:solidFill>
+                        <a:schemeClr val="bg1"/>
+                      </a:solidFill>
+                      <a:prstDash val="solid"/>
+                      <a:round/>
+                      <a:headEnd type="none" w="med" len="med"/>
+                      <a:tailEnd type="none" w="med" len="med"/>
+                    </a:lnB>
+                  </a:tcPr>
+                </a:tc>
+                <a:tc>
+                  <a:txBody>
+                    <a:bodyPr/>
+                    <a:lstStyle/>
+                    <a:p>
+                      <a:r>
+                        <a:rPr lang="zh-CN" altLang="en-US">
+                          <a:effectLst/>
+                          <a:latin typeface="Google Sans Text"/>
+                        </a:rPr>
+                        <a:t>靳</a:t>
+                      </a:r>
+                      <a:r>
+                        <a:rPr lang="en-US" altLang="zh-CN">
+                          <a:effectLst/>
+                          <a:latin typeface="Google Sans Text"/>
+                        </a:rPr>
+                        <a:t>××</a:t>
+                      </a:r>
+                    </a:p>
+                  </a:txBody>
+                  <a:tcPr anchor="ctr">
+                    <a:lnL w="5443" cap="flat" cmpd="sng" algn="ctr">
+                      <a:solidFill>
+                        <a:schemeClr val="bg1"/>
+                      </a:solidFill>
+                      <a:prstDash val="solid"/>
+                      <a:round/>
+                      <a:headEnd type="none" w="med" len="med"/>
+                      <a:tailEnd type="none" w="med" len="med"/>
+                    </a:lnL>
+                    <a:lnR w="5443" cap="flat" cmpd="sng" algn="ctr">
+                      <a:solidFill>
+                        <a:schemeClr val="bg1"/>
+                      </a:solidFill>
+                      <a:prstDash val="solid"/>
+                      <a:round/>
+                      <a:headEnd type="none" w="med" len="med"/>
+                      <a:tailEnd type="none" w="med" len="med"/>
+                    </a:lnR>
+                    <a:lnT w="5443" cap="flat" cmpd="sng" algn="ctr">
+                      <a:solidFill>
+                        <a:schemeClr val="bg1"/>
+                      </a:solidFill>
+                      <a:prstDash val="solid"/>
+                      <a:round/>
+                      <a:headEnd type="none" w="med" len="med"/>
+                      <a:tailEnd type="none" w="med" len="med"/>
+                    </a:lnT>
+                    <a:lnB w="5443" cap="flat" cmpd="sng" algn="ctr">
+                      <a:solidFill>
+                        <a:schemeClr val="bg1"/>
+                      </a:solidFill>
+                      <a:prstDash val="solid"/>
+                      <a:round/>
+                      <a:headEnd type="none" w="med" len="med"/>
+                      <a:tailEnd type="none" w="med" len="med"/>
+                    </a:lnB>
+                  </a:tcPr>
+                </a:tc>
+                <a:tc>
+                  <a:txBody>
+                    <a:bodyPr/>
+                    <a:lstStyle/>
+                    <a:p>
+                      <a:r>
+                        <a:rPr lang="zh-CN" altLang="en-US">
+                          <a:effectLst/>
+                          <a:latin typeface="Google Sans Text"/>
+                        </a:rPr>
+                        <a:t>负责项目分工、预算资金的分配、项目总体把握、召开主持例会等</a:t>
+                      </a:r>
+                    </a:p>
+                  </a:txBody>
+                  <a:tcPr anchor="ctr">
+                    <a:lnL w="5443" cap="flat" cmpd="sng" algn="ctr">
+                      <a:solidFill>
+                        <a:schemeClr val="bg1"/>
+                      </a:solidFill>
+                      <a:prstDash val="solid"/>
+                      <a:round/>
+                      <a:headEnd type="none" w="med" len="med"/>
+                      <a:tailEnd type="none" w="med" len="med"/>
+                    </a:lnL>
+                    <a:lnR w="5443" cap="flat" cmpd="sng" algn="ctr">
+                      <a:solidFill>
+                        <a:schemeClr val="bg1"/>
+                      </a:solidFill>
+                      <a:prstDash val="solid"/>
+                      <a:round/>
+                      <a:headEnd type="none" w="med" len="med"/>
+                      <a:tailEnd type="none" w="med" len="med"/>
+                    </a:lnR>
+                    <a:lnT w="5443" cap="flat" cmpd="sng" algn="ctr">
+                      <a:solidFill>
+                        <a:schemeClr val="bg1"/>
+                      </a:solidFill>
+                      <a:prstDash val="solid"/>
+                      <a:round/>
+                      <a:headEnd type="none" w="med" len="med"/>
+                      <a:tailEnd type="none" w="med" len="med"/>
+                    </a:lnT>
+                    <a:lnB w="5443" cap="flat" cmpd="sng" algn="ctr">
+                      <a:solidFill>
+                        <a:schemeClr val="bg1"/>
+                      </a:solidFill>
+                      <a:prstDash val="solid"/>
+                      <a:round/>
+                      <a:headEnd type="none" w="med" len="med"/>
+                      <a:tailEnd type="none" w="med" len="med"/>
+                    </a:lnB>
+                  </a:tcPr>
+                </a:tc>
+                <a:extLst>
+                  <a:ext uri="{0D108BD9-81ED-4DB2-BD59-A6C34878D82A}">
+                    <a16:rowId xmlns:a16="http://schemas.microsoft.com/office/drawing/2014/main" val="1342431550"/>
+                  </a:ext>
+                </a:extLst>
+              </a:tr>
+              <a:tr h="575508">
+                <a:tc>
+                  <a:txBody>
+                    <a:bodyPr/>
+                    <a:lstStyle/>
+                    <a:p>
+                      <a:r>
+                        <a:rPr lang="zh-CN" altLang="en-US">
+                          <a:effectLst/>
+                          <a:latin typeface="Google Sans Text"/>
+                        </a:rPr>
+                        <a:t>项目组员</a:t>
+                      </a:r>
+                    </a:p>
+                  </a:txBody>
+                  <a:tcPr anchor="ctr">
+                    <a:lnL w="5443" cap="flat" cmpd="sng" algn="ctr">
+                      <a:solidFill>
+                        <a:schemeClr val="bg1"/>
+                      </a:solidFill>
+                      <a:prstDash val="solid"/>
+                      <a:round/>
+                      <a:headEnd type="none" w="med" len="med"/>
+                      <a:tailEnd type="none" w="med" len="med"/>
+                    </a:lnL>
+                    <a:lnR w="5443" cap="flat" cmpd="sng" algn="ctr">
+                      <a:solidFill>
+                        <a:schemeClr val="bg1"/>
+                      </a:solidFill>
+                      <a:prstDash val="solid"/>
+                      <a:round/>
+                      <a:headEnd type="none" w="med" len="med"/>
+                      <a:tailEnd type="none" w="med" len="med"/>
+                    </a:lnR>
+                    <a:lnT w="5443" cap="flat" cmpd="sng" algn="ctr">
+                      <a:solidFill>
+                        <a:schemeClr val="bg1"/>
+                      </a:solidFill>
+                      <a:prstDash val="solid"/>
+                      <a:round/>
+                      <a:headEnd type="none" w="med" len="med"/>
+                      <a:tailEnd type="none" w="med" len="med"/>
+                    </a:lnT>
+                    <a:lnB w="5443" cap="flat" cmpd="sng" algn="ctr">
+                      <a:solidFill>
+                        <a:schemeClr val="bg1"/>
+                      </a:solidFill>
+                      <a:prstDash val="solid"/>
+                      <a:round/>
+                      <a:headEnd type="none" w="med" len="med"/>
+                      <a:tailEnd type="none" w="med" len="med"/>
+                    </a:lnB>
+                  </a:tcPr>
+                </a:tc>
+                <a:tc>
+                  <a:txBody>
+                    <a:bodyPr/>
+                    <a:lstStyle/>
+                    <a:p>
+                      <a:r>
+                        <a:rPr lang="zh-CN" altLang="en-US">
+                          <a:effectLst/>
+                          <a:latin typeface="Google Sans Text"/>
+                        </a:rPr>
+                        <a:t>张</a:t>
+                      </a:r>
+                      <a:r>
+                        <a:rPr lang="en-US" altLang="zh-CN">
+                          <a:effectLst/>
+                          <a:latin typeface="Google Sans Text"/>
+                        </a:rPr>
+                        <a:t>××</a:t>
+                      </a:r>
+                    </a:p>
+                  </a:txBody>
+                  <a:tcPr anchor="ctr">
+                    <a:lnL w="5443" cap="flat" cmpd="sng" algn="ctr">
+                      <a:solidFill>
+                        <a:schemeClr val="bg1"/>
+                      </a:solidFill>
+                      <a:prstDash val="solid"/>
+                      <a:round/>
+                      <a:headEnd type="none" w="med" len="med"/>
+                      <a:tailEnd type="none" w="med" len="med"/>
+                    </a:lnL>
+                    <a:lnR w="5443" cap="flat" cmpd="sng" algn="ctr">
+                      <a:solidFill>
+                        <a:schemeClr val="bg1"/>
+                      </a:solidFill>
+                      <a:prstDash val="solid"/>
+                      <a:round/>
+                      <a:headEnd type="none" w="med" len="med"/>
+                      <a:tailEnd type="none" w="med" len="med"/>
+                    </a:lnR>
+                    <a:lnT w="5443" cap="flat" cmpd="sng" algn="ctr">
+                      <a:solidFill>
+                        <a:schemeClr val="bg1"/>
+                      </a:solidFill>
+                      <a:prstDash val="solid"/>
+                      <a:round/>
+                      <a:headEnd type="none" w="med" len="med"/>
+                      <a:tailEnd type="none" w="med" len="med"/>
+                    </a:lnT>
+                    <a:lnB w="5443" cap="flat" cmpd="sng" algn="ctr">
+                      <a:solidFill>
+                        <a:schemeClr val="bg1"/>
+                      </a:solidFill>
+                      <a:prstDash val="solid"/>
+                      <a:round/>
+                      <a:headEnd type="none" w="med" len="med"/>
+                      <a:tailEnd type="none" w="med" len="med"/>
+                    </a:lnB>
+                  </a:tcPr>
+                </a:tc>
+                <a:tc>
+                  <a:txBody>
+                    <a:bodyPr/>
+                    <a:lstStyle/>
+                    <a:p>
+                      <a:r>
+                        <a:rPr lang="zh-CN" altLang="en-US">
+                          <a:effectLst/>
+                          <a:latin typeface="Google Sans Text"/>
+                        </a:rPr>
+                        <a:t>项目信息员，负责联系客户等外部干系人</a:t>
+                      </a:r>
+                    </a:p>
+                  </a:txBody>
+                  <a:tcPr anchor="ctr">
+                    <a:lnL w="5443" cap="flat" cmpd="sng" algn="ctr">
+                      <a:solidFill>
+                        <a:schemeClr val="bg1"/>
+                      </a:solidFill>
+                      <a:prstDash val="solid"/>
+                      <a:round/>
+                      <a:headEnd type="none" w="med" len="med"/>
+                      <a:tailEnd type="none" w="med" len="med"/>
+                    </a:lnL>
+                    <a:lnR w="5443" cap="flat" cmpd="sng" algn="ctr">
+                      <a:solidFill>
+                        <a:schemeClr val="bg1"/>
+                      </a:solidFill>
+                      <a:prstDash val="solid"/>
+                      <a:round/>
+                      <a:headEnd type="none" w="med" len="med"/>
+                      <a:tailEnd type="none" w="med" len="med"/>
+                    </a:lnR>
+                    <a:lnT w="5443" cap="flat" cmpd="sng" algn="ctr">
+                      <a:solidFill>
+                        <a:schemeClr val="bg1"/>
+                      </a:solidFill>
+                      <a:prstDash val="solid"/>
+                      <a:round/>
+                      <a:headEnd type="none" w="med" len="med"/>
+                      <a:tailEnd type="none" w="med" len="med"/>
+                    </a:lnT>
+                    <a:lnB w="5443" cap="flat" cmpd="sng" algn="ctr">
+                      <a:solidFill>
+                        <a:schemeClr val="bg1"/>
+                      </a:solidFill>
+                      <a:prstDash val="solid"/>
+                      <a:round/>
+                      <a:headEnd type="none" w="med" len="med"/>
+                      <a:tailEnd type="none" w="med" len="med"/>
+                    </a:lnB>
+                  </a:tcPr>
+                </a:tc>
+                <a:extLst>
+                  <a:ext uri="{0D108BD9-81ED-4DB2-BD59-A6C34878D82A}">
+                    <a16:rowId xmlns:a16="http://schemas.microsoft.com/office/drawing/2014/main" val="2005925176"/>
+                  </a:ext>
+                </a:extLst>
+              </a:tr>
+              <a:tr h="328862">
+                <a:tc>
+                  <a:txBody>
+                    <a:bodyPr/>
+                    <a:lstStyle/>
+                    <a:p>
+                      <a:endParaRPr lang="zh-CN" altLang="en-US">
+                        <a:effectLst/>
+                        <a:latin typeface="Google Sans Text"/>
+                      </a:endParaRPr>
+                    </a:p>
+                  </a:txBody>
+                  <a:tcPr anchor="ctr">
+                    <a:lnL w="5443" cap="flat" cmpd="sng" algn="ctr">
+                      <a:solidFill>
+                        <a:schemeClr val="bg1"/>
+                      </a:solidFill>
+                      <a:prstDash val="solid"/>
+                      <a:round/>
+                      <a:headEnd type="none" w="med" len="med"/>
+                      <a:tailEnd type="none" w="med" len="med"/>
+                    </a:lnL>
+                    <a:lnR w="5443" cap="flat" cmpd="sng" algn="ctr">
+                      <a:solidFill>
+                        <a:schemeClr val="bg1"/>
+                      </a:solidFill>
+                      <a:prstDash val="solid"/>
+                      <a:round/>
+                      <a:headEnd type="none" w="med" len="med"/>
+                      <a:tailEnd type="none" w="med" len="med"/>
+                    </a:lnR>
+                    <a:lnT w="5443" cap="flat" cmpd="sng" algn="ctr">
+                      <a:solidFill>
+                        <a:schemeClr val="bg1"/>
+                      </a:solidFill>
+                      <a:prstDash val="solid"/>
+                      <a:round/>
+                      <a:headEnd type="none" w="med" len="med"/>
+                      <a:tailEnd type="none" w="med" len="med"/>
+                    </a:lnT>
+                    <a:lnB w="5443" cap="flat" cmpd="sng" algn="ctr">
+                      <a:solidFill>
+                        <a:schemeClr val="bg1"/>
+                      </a:solidFill>
+                      <a:prstDash val="solid"/>
+                      <a:round/>
+                      <a:headEnd type="none" w="med" len="med"/>
+                      <a:tailEnd type="none" w="med" len="med"/>
+                    </a:lnB>
+                  </a:tcPr>
+                </a:tc>
+                <a:tc>
+                  <a:txBody>
+                    <a:bodyPr/>
+                    <a:lstStyle/>
+                    <a:p>
+                      <a:r>
+                        <a:rPr lang="zh-CN" altLang="en-US">
+                          <a:effectLst/>
+                          <a:latin typeface="Google Sans Text"/>
+                        </a:rPr>
+                        <a:t>朱</a:t>
+                      </a:r>
+                      <a:r>
+                        <a:rPr lang="en-US" altLang="zh-CN">
+                          <a:effectLst/>
+                          <a:latin typeface="Google Sans Text"/>
+                        </a:rPr>
+                        <a:t>××</a:t>
+                      </a:r>
+                    </a:p>
+                  </a:txBody>
+                  <a:tcPr anchor="ctr">
+                    <a:lnL w="5443" cap="flat" cmpd="sng" algn="ctr">
+                      <a:solidFill>
+                        <a:schemeClr val="bg1"/>
+                      </a:solidFill>
+                      <a:prstDash val="solid"/>
+                      <a:round/>
+                      <a:headEnd type="none" w="med" len="med"/>
+                      <a:tailEnd type="none" w="med" len="med"/>
+                    </a:lnL>
+                    <a:lnR w="5443" cap="flat" cmpd="sng" algn="ctr">
+                      <a:solidFill>
+                        <a:schemeClr val="bg1"/>
+                      </a:solidFill>
+                      <a:prstDash val="solid"/>
+                      <a:round/>
+                      <a:headEnd type="none" w="med" len="med"/>
+                      <a:tailEnd type="none" w="med" len="med"/>
+                    </a:lnR>
+                    <a:lnT w="5443" cap="flat" cmpd="sng" algn="ctr">
+                      <a:solidFill>
+                        <a:schemeClr val="bg1"/>
+                      </a:solidFill>
+                      <a:prstDash val="solid"/>
+                      <a:round/>
+                      <a:headEnd type="none" w="med" len="med"/>
+                      <a:tailEnd type="none" w="med" len="med"/>
+                    </a:lnT>
+                    <a:lnB w="5443" cap="flat" cmpd="sng" algn="ctr">
+                      <a:solidFill>
+                        <a:schemeClr val="bg1"/>
+                      </a:solidFill>
+                      <a:prstDash val="solid"/>
+                      <a:round/>
+                      <a:headEnd type="none" w="med" len="med"/>
+                      <a:tailEnd type="none" w="med" len="med"/>
+                    </a:lnB>
+                  </a:tcPr>
+                </a:tc>
+                <a:tc>
+                  <a:txBody>
+                    <a:bodyPr/>
+                    <a:lstStyle/>
+                    <a:p>
+                      <a:r>
+                        <a:rPr lang="zh-CN" altLang="en-US">
+                          <a:effectLst/>
+                          <a:latin typeface="Google Sans Text"/>
+                        </a:rPr>
+                        <a:t>需求调研，总体设计</a:t>
+                      </a:r>
+                    </a:p>
+                  </a:txBody>
+                  <a:tcPr anchor="ctr">
+                    <a:lnL w="5443" cap="flat" cmpd="sng" algn="ctr">
+                      <a:solidFill>
+                        <a:schemeClr val="bg1"/>
+                      </a:solidFill>
+                      <a:prstDash val="solid"/>
+                      <a:round/>
+                      <a:headEnd type="none" w="med" len="med"/>
+                      <a:tailEnd type="none" w="med" len="med"/>
+                    </a:lnL>
+                    <a:lnR w="5443" cap="flat" cmpd="sng" algn="ctr">
+                      <a:solidFill>
+                        <a:schemeClr val="bg1"/>
+                      </a:solidFill>
+                      <a:prstDash val="solid"/>
+                      <a:round/>
+                      <a:headEnd type="none" w="med" len="med"/>
+                      <a:tailEnd type="none" w="med" len="med"/>
+                    </a:lnR>
+                    <a:lnT w="5443" cap="flat" cmpd="sng" algn="ctr">
+                      <a:solidFill>
+                        <a:schemeClr val="bg1"/>
+                      </a:solidFill>
+                      <a:prstDash val="solid"/>
+                      <a:round/>
+                      <a:headEnd type="none" w="med" len="med"/>
+                      <a:tailEnd type="none" w="med" len="med"/>
+                    </a:lnT>
+                    <a:lnB w="5443" cap="flat" cmpd="sng" algn="ctr">
+                      <a:solidFill>
+                        <a:schemeClr val="bg1"/>
+                      </a:solidFill>
+                      <a:prstDash val="solid"/>
+                      <a:round/>
+                      <a:headEnd type="none" w="med" len="med"/>
+                      <a:tailEnd type="none" w="med" len="med"/>
+                    </a:lnB>
+                  </a:tcPr>
+                </a:tc>
+                <a:extLst>
+                  <a:ext uri="{0D108BD9-81ED-4DB2-BD59-A6C34878D82A}">
+                    <a16:rowId xmlns:a16="http://schemas.microsoft.com/office/drawing/2014/main" val="153087215"/>
+                  </a:ext>
+                </a:extLst>
+              </a:tr>
+              <a:tr h="328862">
+                <a:tc>
+                  <a:txBody>
+                    <a:bodyPr/>
+                    <a:lstStyle/>
+                    <a:p>
+                      <a:endParaRPr lang="zh-CN" altLang="en-US">
+                        <a:effectLst/>
+                        <a:latin typeface="Google Sans Text"/>
+                      </a:endParaRPr>
+                    </a:p>
+                  </a:txBody>
+                  <a:tcPr anchor="ctr">
+                    <a:lnL w="5443" cap="flat" cmpd="sng" algn="ctr">
+                      <a:solidFill>
+                        <a:schemeClr val="bg1"/>
+                      </a:solidFill>
+                      <a:prstDash val="solid"/>
+                      <a:round/>
+                      <a:headEnd type="none" w="med" len="med"/>
+                      <a:tailEnd type="none" w="med" len="med"/>
+                    </a:lnL>
+                    <a:lnR w="5443" cap="flat" cmpd="sng" algn="ctr">
+                      <a:solidFill>
+                        <a:schemeClr val="bg1"/>
+                      </a:solidFill>
+                      <a:prstDash val="solid"/>
+                      <a:round/>
+                      <a:headEnd type="none" w="med" len="med"/>
+                      <a:tailEnd type="none" w="med" len="med"/>
+                    </a:lnR>
+                    <a:lnT w="5443" cap="flat" cmpd="sng" algn="ctr">
+                      <a:solidFill>
+                        <a:schemeClr val="bg1"/>
+                      </a:solidFill>
+                      <a:prstDash val="solid"/>
+                      <a:round/>
+                      <a:headEnd type="none" w="med" len="med"/>
+                      <a:tailEnd type="none" w="med" len="med"/>
+                    </a:lnT>
+                    <a:lnB w="5443" cap="flat" cmpd="sng" algn="ctr">
+                      <a:solidFill>
+                        <a:schemeClr val="bg1"/>
+                      </a:solidFill>
+                      <a:prstDash val="solid"/>
+                      <a:round/>
+                      <a:headEnd type="none" w="med" len="med"/>
+                      <a:tailEnd type="none" w="med" len="med"/>
+                    </a:lnB>
+                  </a:tcPr>
+                </a:tc>
+                <a:tc>
+                  <a:txBody>
+                    <a:bodyPr/>
+                    <a:lstStyle/>
+                    <a:p>
+                      <a:r>
+                        <a:rPr lang="zh-CN" altLang="en-US">
+                          <a:effectLst/>
+                          <a:latin typeface="Google Sans Text"/>
+                        </a:rPr>
+                        <a:t>尹</a:t>
+                      </a:r>
+                      <a:r>
+                        <a:rPr lang="en-US" altLang="zh-CN">
+                          <a:effectLst/>
+                          <a:latin typeface="Google Sans Text"/>
+                        </a:rPr>
+                        <a:t>××</a:t>
+                      </a:r>
+                    </a:p>
+                  </a:txBody>
+                  <a:tcPr anchor="ctr">
+                    <a:lnL w="5443" cap="flat" cmpd="sng" algn="ctr">
+                      <a:solidFill>
+                        <a:schemeClr val="bg1"/>
+                      </a:solidFill>
+                      <a:prstDash val="solid"/>
+                      <a:round/>
+                      <a:headEnd type="none" w="med" len="med"/>
+                      <a:tailEnd type="none" w="med" len="med"/>
+                    </a:lnL>
+                    <a:lnR w="5443" cap="flat" cmpd="sng" algn="ctr">
+                      <a:solidFill>
+                        <a:schemeClr val="bg1"/>
+                      </a:solidFill>
+                      <a:prstDash val="solid"/>
+                      <a:round/>
+                      <a:headEnd type="none" w="med" len="med"/>
+                      <a:tailEnd type="none" w="med" len="med"/>
+                    </a:lnR>
+                    <a:lnT w="5443" cap="flat" cmpd="sng" algn="ctr">
+                      <a:solidFill>
+                        <a:schemeClr val="bg1"/>
+                      </a:solidFill>
+                      <a:prstDash val="solid"/>
+                      <a:round/>
+                      <a:headEnd type="none" w="med" len="med"/>
+                      <a:tailEnd type="none" w="med" len="med"/>
+                    </a:lnT>
+                    <a:lnB w="5443" cap="flat" cmpd="sng" algn="ctr">
+                      <a:solidFill>
+                        <a:schemeClr val="bg1"/>
+                      </a:solidFill>
+                      <a:prstDash val="solid"/>
+                      <a:round/>
+                      <a:headEnd type="none" w="med" len="med"/>
+                      <a:tailEnd type="none" w="med" len="med"/>
+                    </a:lnB>
+                  </a:tcPr>
+                </a:tc>
+                <a:tc>
+                  <a:txBody>
+                    <a:bodyPr/>
+                    <a:lstStyle/>
+                    <a:p>
+                      <a:r>
+                        <a:rPr lang="zh-CN" altLang="en-US">
+                          <a:effectLst/>
+                          <a:latin typeface="Google Sans Text"/>
+                        </a:rPr>
+                        <a:t>需求调研，总体设计</a:t>
+                      </a:r>
+                    </a:p>
+                  </a:txBody>
+                  <a:tcPr anchor="ctr">
+                    <a:lnL w="5443" cap="flat" cmpd="sng" algn="ctr">
+                      <a:solidFill>
+                        <a:schemeClr val="bg1"/>
+                      </a:solidFill>
+                      <a:prstDash val="solid"/>
+                      <a:round/>
+                      <a:headEnd type="none" w="med" len="med"/>
+                      <a:tailEnd type="none" w="med" len="med"/>
+                    </a:lnL>
+                    <a:lnR w="5443" cap="flat" cmpd="sng" algn="ctr">
+                      <a:solidFill>
+                        <a:schemeClr val="bg1"/>
+                      </a:solidFill>
+                      <a:prstDash val="solid"/>
+                      <a:round/>
+                      <a:headEnd type="none" w="med" len="med"/>
+                      <a:tailEnd type="none" w="med" len="med"/>
+                    </a:lnR>
+                    <a:lnT w="5443" cap="flat" cmpd="sng" algn="ctr">
+                      <a:solidFill>
+                        <a:schemeClr val="bg1"/>
+                      </a:solidFill>
+                      <a:prstDash val="solid"/>
+                      <a:round/>
+                      <a:headEnd type="none" w="med" len="med"/>
+                      <a:tailEnd type="none" w="med" len="med"/>
+                    </a:lnT>
+                    <a:lnB w="5443" cap="flat" cmpd="sng" algn="ctr">
+                      <a:solidFill>
+                        <a:schemeClr val="bg1"/>
+                      </a:solidFill>
+                      <a:prstDash val="solid"/>
+                      <a:round/>
+                      <a:headEnd type="none" w="med" len="med"/>
+                      <a:tailEnd type="none" w="med" len="med"/>
+                    </a:lnB>
+                  </a:tcPr>
+                </a:tc>
+                <a:extLst>
+                  <a:ext uri="{0D108BD9-81ED-4DB2-BD59-A6C34878D82A}">
+                    <a16:rowId xmlns:a16="http://schemas.microsoft.com/office/drawing/2014/main" val="2683640633"/>
+                  </a:ext>
+                </a:extLst>
+              </a:tr>
+              <a:tr h="328862">
+                <a:tc>
+                  <a:txBody>
+                    <a:bodyPr/>
+                    <a:lstStyle/>
+                    <a:p>
+                      <a:endParaRPr lang="zh-CN" altLang="en-US">
+                        <a:effectLst/>
+                        <a:latin typeface="Google Sans Text"/>
+                      </a:endParaRPr>
+                    </a:p>
+                  </a:txBody>
+                  <a:tcPr anchor="ctr">
+                    <a:lnL w="5443" cap="flat" cmpd="sng" algn="ctr">
+                      <a:solidFill>
+                        <a:schemeClr val="bg1"/>
+                      </a:solidFill>
+                      <a:prstDash val="solid"/>
+                      <a:round/>
+                      <a:headEnd type="none" w="med" len="med"/>
+                      <a:tailEnd type="none" w="med" len="med"/>
+                    </a:lnL>
+                    <a:lnR w="5443" cap="flat" cmpd="sng" algn="ctr">
+                      <a:solidFill>
+                        <a:schemeClr val="bg1"/>
+                      </a:solidFill>
+                      <a:prstDash val="solid"/>
+                      <a:round/>
+                      <a:headEnd type="none" w="med" len="med"/>
+                      <a:tailEnd type="none" w="med" len="med"/>
+                    </a:lnR>
+                    <a:lnT w="5443" cap="flat" cmpd="sng" algn="ctr">
+                      <a:solidFill>
+                        <a:schemeClr val="bg1"/>
+                      </a:solidFill>
+                      <a:prstDash val="solid"/>
+                      <a:round/>
+                      <a:headEnd type="none" w="med" len="med"/>
+                      <a:tailEnd type="none" w="med" len="med"/>
+                    </a:lnT>
+                    <a:lnB w="5443" cap="flat" cmpd="sng" algn="ctr">
+                      <a:solidFill>
+                        <a:schemeClr val="bg1"/>
+                      </a:solidFill>
+                      <a:prstDash val="solid"/>
+                      <a:round/>
+                      <a:headEnd type="none" w="med" len="med"/>
+                      <a:tailEnd type="none" w="med" len="med"/>
+                    </a:lnB>
+                  </a:tcPr>
+                </a:tc>
+                <a:tc>
+                  <a:txBody>
+                    <a:bodyPr/>
+                    <a:lstStyle/>
+                    <a:p>
+                      <a:r>
+                        <a:rPr lang="zh-CN" altLang="en-US">
+                          <a:effectLst/>
+                          <a:latin typeface="Google Sans Text"/>
+                        </a:rPr>
+                        <a:t>蔡</a:t>
+                      </a:r>
+                      <a:r>
+                        <a:rPr lang="en-US" altLang="zh-CN">
+                          <a:effectLst/>
+                          <a:latin typeface="Google Sans Text"/>
+                        </a:rPr>
+                        <a:t>××</a:t>
+                      </a:r>
+                    </a:p>
+                  </a:txBody>
+                  <a:tcPr anchor="ctr">
+                    <a:lnL w="5443" cap="flat" cmpd="sng" algn="ctr">
+                      <a:solidFill>
+                        <a:schemeClr val="bg1"/>
+                      </a:solidFill>
+                      <a:prstDash val="solid"/>
+                      <a:round/>
+                      <a:headEnd type="none" w="med" len="med"/>
+                      <a:tailEnd type="none" w="med" len="med"/>
+                    </a:lnL>
+                    <a:lnR w="5443" cap="flat" cmpd="sng" algn="ctr">
+                      <a:solidFill>
+                        <a:schemeClr val="bg1"/>
+                      </a:solidFill>
+                      <a:prstDash val="solid"/>
+                      <a:round/>
+                      <a:headEnd type="none" w="med" len="med"/>
+                      <a:tailEnd type="none" w="med" len="med"/>
+                    </a:lnR>
+                    <a:lnT w="5443" cap="flat" cmpd="sng" algn="ctr">
+                      <a:solidFill>
+                        <a:schemeClr val="bg1"/>
+                      </a:solidFill>
+                      <a:prstDash val="solid"/>
+                      <a:round/>
+                      <a:headEnd type="none" w="med" len="med"/>
+                      <a:tailEnd type="none" w="med" len="med"/>
+                    </a:lnT>
+                    <a:lnB w="5443" cap="flat" cmpd="sng" algn="ctr">
+                      <a:solidFill>
+                        <a:schemeClr val="bg1"/>
+                      </a:solidFill>
+                      <a:prstDash val="solid"/>
+                      <a:round/>
+                      <a:headEnd type="none" w="med" len="med"/>
+                      <a:tailEnd type="none" w="med" len="med"/>
+                    </a:lnB>
+                  </a:tcPr>
+                </a:tc>
+                <a:tc>
+                  <a:txBody>
+                    <a:bodyPr/>
+                    <a:lstStyle/>
+                    <a:p>
+                      <a:r>
+                        <a:rPr lang="zh-CN" altLang="en-US" dirty="0">
+                          <a:effectLst/>
+                          <a:latin typeface="Google Sans Text"/>
+                        </a:rPr>
+                        <a:t>详细设计，系统实施</a:t>
+                      </a:r>
+                    </a:p>
+                  </a:txBody>
+                  <a:tcPr anchor="ctr">
+                    <a:lnL w="5443" cap="flat" cmpd="sng" algn="ctr">
+                      <a:solidFill>
+                        <a:schemeClr val="bg1"/>
+                      </a:solidFill>
+                      <a:prstDash val="solid"/>
+                      <a:round/>
+                      <a:headEnd type="none" w="med" len="med"/>
+                      <a:tailEnd type="none" w="med" len="med"/>
+                    </a:lnL>
+                    <a:lnR w="5443" cap="flat" cmpd="sng" algn="ctr">
+                      <a:solidFill>
+                        <a:schemeClr val="bg1"/>
+                      </a:solidFill>
+                      <a:prstDash val="solid"/>
+                      <a:round/>
+                      <a:headEnd type="none" w="med" len="med"/>
+                      <a:tailEnd type="none" w="med" len="med"/>
+                    </a:lnR>
+                    <a:lnT w="5443" cap="flat" cmpd="sng" algn="ctr">
+                      <a:solidFill>
+                        <a:schemeClr val="bg1"/>
+                      </a:solidFill>
+                      <a:prstDash val="solid"/>
+                      <a:round/>
+                      <a:headEnd type="none" w="med" len="med"/>
+                      <a:tailEnd type="none" w="med" len="med"/>
+                    </a:lnT>
+                    <a:lnB w="5443" cap="flat" cmpd="sng" algn="ctr">
+                      <a:solidFill>
+                        <a:schemeClr val="bg1"/>
+                      </a:solidFill>
+                      <a:prstDash val="solid"/>
+                      <a:round/>
+                      <a:headEnd type="none" w="med" len="med"/>
+                      <a:tailEnd type="none" w="med" len="med"/>
+                    </a:lnB>
+                  </a:tcPr>
+                </a:tc>
+                <a:extLst>
+                  <a:ext uri="{0D108BD9-81ED-4DB2-BD59-A6C34878D82A}">
+                    <a16:rowId xmlns:a16="http://schemas.microsoft.com/office/drawing/2014/main" val="91101050"/>
+                  </a:ext>
+                </a:extLst>
+              </a:tr>
+              <a:tr h="328862">
+                <a:tc>
+                  <a:txBody>
+                    <a:bodyPr/>
+                    <a:lstStyle/>
+                    <a:p>
+                      <a:endParaRPr lang="zh-CN" altLang="en-US">
+                        <a:effectLst/>
+                        <a:latin typeface="Google Sans Text"/>
+                      </a:endParaRPr>
+                    </a:p>
+                  </a:txBody>
+                  <a:tcPr anchor="ctr">
+                    <a:lnL w="5443" cap="flat" cmpd="sng" algn="ctr">
+                      <a:solidFill>
+                        <a:schemeClr val="bg1"/>
+                      </a:solidFill>
+                      <a:prstDash val="solid"/>
+                      <a:round/>
+                      <a:headEnd type="none" w="med" len="med"/>
+                      <a:tailEnd type="none" w="med" len="med"/>
+                    </a:lnL>
+                    <a:lnR w="5443" cap="flat" cmpd="sng" algn="ctr">
+                      <a:solidFill>
+                        <a:schemeClr val="bg1"/>
+                      </a:solidFill>
+                      <a:prstDash val="solid"/>
+                      <a:round/>
+                      <a:headEnd type="none" w="med" len="med"/>
+                      <a:tailEnd type="none" w="med" len="med"/>
+                    </a:lnR>
+                    <a:lnT w="5443" cap="flat" cmpd="sng" algn="ctr">
+                      <a:solidFill>
+                        <a:schemeClr val="bg1"/>
+                      </a:solidFill>
+                      <a:prstDash val="solid"/>
+                      <a:round/>
+                      <a:headEnd type="none" w="med" len="med"/>
+                      <a:tailEnd type="none" w="med" len="med"/>
+                    </a:lnT>
+                    <a:lnB w="5443" cap="flat" cmpd="sng" algn="ctr">
+                      <a:solidFill>
+                        <a:schemeClr val="bg1"/>
+                      </a:solidFill>
+                      <a:prstDash val="solid"/>
+                      <a:round/>
+                      <a:headEnd type="none" w="med" len="med"/>
+                      <a:tailEnd type="none" w="med" len="med"/>
+                    </a:lnB>
+                  </a:tcPr>
+                </a:tc>
+                <a:tc>
+                  <a:txBody>
+                    <a:bodyPr/>
+                    <a:lstStyle/>
+                    <a:p>
+                      <a:r>
+                        <a:rPr lang="zh-CN" altLang="en-US">
+                          <a:effectLst/>
+                          <a:latin typeface="Google Sans Text"/>
+                        </a:rPr>
+                        <a:t>王</a:t>
+                      </a:r>
+                      <a:r>
+                        <a:rPr lang="en-US" altLang="zh-CN">
+                          <a:effectLst/>
+                          <a:latin typeface="Google Sans Text"/>
+                        </a:rPr>
+                        <a:t>××</a:t>
+                      </a:r>
+                    </a:p>
+                  </a:txBody>
+                  <a:tcPr anchor="ctr">
+                    <a:lnL w="5443" cap="flat" cmpd="sng" algn="ctr">
+                      <a:solidFill>
+                        <a:schemeClr val="bg1"/>
+                      </a:solidFill>
+                      <a:prstDash val="solid"/>
+                      <a:round/>
+                      <a:headEnd type="none" w="med" len="med"/>
+                      <a:tailEnd type="none" w="med" len="med"/>
+                    </a:lnL>
+                    <a:lnR w="5443" cap="flat" cmpd="sng" algn="ctr">
+                      <a:solidFill>
+                        <a:schemeClr val="bg1"/>
+                      </a:solidFill>
+                      <a:prstDash val="solid"/>
+                      <a:round/>
+                      <a:headEnd type="none" w="med" len="med"/>
+                      <a:tailEnd type="none" w="med" len="med"/>
+                    </a:lnR>
+                    <a:lnT w="5443" cap="flat" cmpd="sng" algn="ctr">
+                      <a:solidFill>
+                        <a:schemeClr val="bg1"/>
+                      </a:solidFill>
+                      <a:prstDash val="solid"/>
+                      <a:round/>
+                      <a:headEnd type="none" w="med" len="med"/>
+                      <a:tailEnd type="none" w="med" len="med"/>
+                    </a:lnT>
+                    <a:lnB w="5443" cap="flat" cmpd="sng" algn="ctr">
+                      <a:solidFill>
+                        <a:schemeClr val="bg1"/>
+                      </a:solidFill>
+                      <a:prstDash val="solid"/>
+                      <a:round/>
+                      <a:headEnd type="none" w="med" len="med"/>
+                      <a:tailEnd type="none" w="med" len="med"/>
+                    </a:lnB>
+                  </a:tcPr>
+                </a:tc>
+                <a:tc>
+                  <a:txBody>
+                    <a:bodyPr/>
+                    <a:lstStyle/>
+                    <a:p>
+                      <a:r>
+                        <a:rPr lang="zh-CN" altLang="en-US" dirty="0">
+                          <a:effectLst/>
+                          <a:latin typeface="Google Sans Text"/>
+                        </a:rPr>
+                        <a:t>详细设计，系统实施</a:t>
+                      </a:r>
+                    </a:p>
+                  </a:txBody>
+                  <a:tcPr anchor="ctr">
+                    <a:lnL w="5443" cap="flat" cmpd="sng" algn="ctr">
+                      <a:solidFill>
+                        <a:schemeClr val="bg1"/>
+                      </a:solidFill>
+                      <a:prstDash val="solid"/>
+                      <a:round/>
+                      <a:headEnd type="none" w="med" len="med"/>
+                      <a:tailEnd type="none" w="med" len="med"/>
+                    </a:lnL>
+                    <a:lnR w="5443" cap="flat" cmpd="sng" algn="ctr">
+                      <a:solidFill>
+                        <a:schemeClr val="bg1"/>
+                      </a:solidFill>
+                      <a:prstDash val="solid"/>
+                      <a:round/>
+                      <a:headEnd type="none" w="med" len="med"/>
+                      <a:tailEnd type="none" w="med" len="med"/>
+                    </a:lnR>
+                    <a:lnT w="5443" cap="flat" cmpd="sng" algn="ctr">
+                      <a:solidFill>
+                        <a:schemeClr val="bg1"/>
+                      </a:solidFill>
+                      <a:prstDash val="solid"/>
+                      <a:round/>
+                      <a:headEnd type="none" w="med" len="med"/>
+                      <a:tailEnd type="none" w="med" len="med"/>
+                    </a:lnT>
+                    <a:lnB w="5443" cap="flat" cmpd="sng" algn="ctr">
+                      <a:solidFill>
+                        <a:schemeClr val="bg1"/>
+                      </a:solidFill>
+                      <a:prstDash val="solid"/>
+                      <a:round/>
+                      <a:headEnd type="none" w="med" len="med"/>
+                      <a:tailEnd type="none" w="med" len="med"/>
+                    </a:lnB>
+                  </a:tcPr>
+                </a:tc>
+                <a:extLst>
+                  <a:ext uri="{0D108BD9-81ED-4DB2-BD59-A6C34878D82A}">
+                    <a16:rowId xmlns:a16="http://schemas.microsoft.com/office/drawing/2014/main" val="682584457"/>
+                  </a:ext>
+                </a:extLst>
+              </a:tr>
+              <a:tr h="328862">
+                <a:tc>
+                  <a:txBody>
+                    <a:bodyPr/>
+                    <a:lstStyle/>
+                    <a:p>
+                      <a:endParaRPr lang="zh-CN" altLang="en-US" dirty="0">
+                        <a:effectLst/>
+                        <a:latin typeface="Google Sans Text"/>
+                      </a:endParaRPr>
+                    </a:p>
+                  </a:txBody>
+                  <a:tcPr anchor="ctr">
+                    <a:lnL w="5443" cap="flat" cmpd="sng" algn="ctr">
+                      <a:solidFill>
+                        <a:schemeClr val="bg1"/>
+                      </a:solidFill>
+                      <a:prstDash val="solid"/>
+                      <a:round/>
+                      <a:headEnd type="none" w="med" len="med"/>
+                      <a:tailEnd type="none" w="med" len="med"/>
+                    </a:lnL>
+                    <a:lnR w="5443" cap="flat" cmpd="sng" algn="ctr">
+                      <a:solidFill>
+                        <a:schemeClr val="bg1"/>
+                      </a:solidFill>
+                      <a:prstDash val="solid"/>
+                      <a:round/>
+                      <a:headEnd type="none" w="med" len="med"/>
+                      <a:tailEnd type="none" w="med" len="med"/>
+                    </a:lnR>
+                    <a:lnT w="5443" cap="flat" cmpd="sng" algn="ctr">
+                      <a:solidFill>
+                        <a:schemeClr val="bg1"/>
+                      </a:solidFill>
+                      <a:prstDash val="solid"/>
+                      <a:round/>
+                      <a:headEnd type="none" w="med" len="med"/>
+                      <a:tailEnd type="none" w="med" len="med"/>
+                    </a:lnT>
+                    <a:lnB w="5443" cap="flat" cmpd="sng" algn="ctr">
+                      <a:solidFill>
+                        <a:schemeClr val="bg1"/>
+                      </a:solidFill>
+                      <a:prstDash val="solid"/>
+                      <a:round/>
+                      <a:headEnd type="none" w="med" len="med"/>
+                      <a:tailEnd type="none" w="med" len="med"/>
+                    </a:lnB>
+                  </a:tcPr>
+                </a:tc>
+                <a:tc>
+                  <a:txBody>
+                    <a:bodyPr/>
+                    <a:lstStyle/>
+                    <a:p>
+                      <a:r>
+                        <a:rPr lang="zh-CN" altLang="en-US" dirty="0">
+                          <a:effectLst/>
+                          <a:latin typeface="Google Sans Text"/>
+                        </a:rPr>
+                        <a:t>李</a:t>
+                      </a:r>
+                      <a:r>
+                        <a:rPr lang="en-US" altLang="zh-CN" dirty="0">
+                          <a:effectLst/>
+                          <a:latin typeface="Google Sans Text"/>
+                        </a:rPr>
+                        <a:t>××</a:t>
+                      </a:r>
+                    </a:p>
+                  </a:txBody>
+                  <a:tcPr anchor="ctr">
+                    <a:lnL w="5443" cap="flat" cmpd="sng" algn="ctr">
+                      <a:solidFill>
+                        <a:schemeClr val="bg1"/>
+                      </a:solidFill>
+                      <a:prstDash val="solid"/>
+                      <a:round/>
+                      <a:headEnd type="none" w="med" len="med"/>
+                      <a:tailEnd type="none" w="med" len="med"/>
+                    </a:lnL>
+                    <a:lnR w="5443" cap="flat" cmpd="sng" algn="ctr">
+                      <a:solidFill>
+                        <a:schemeClr val="bg1"/>
+                      </a:solidFill>
+                      <a:prstDash val="solid"/>
+                      <a:round/>
+                      <a:headEnd type="none" w="med" len="med"/>
+                      <a:tailEnd type="none" w="med" len="med"/>
+                    </a:lnR>
+                    <a:lnT w="5443" cap="flat" cmpd="sng" algn="ctr">
+                      <a:solidFill>
+                        <a:schemeClr val="bg1"/>
+                      </a:solidFill>
+                      <a:prstDash val="solid"/>
+                      <a:round/>
+                      <a:headEnd type="none" w="med" len="med"/>
+                      <a:tailEnd type="none" w="med" len="med"/>
+                    </a:lnT>
+                    <a:lnB w="5443" cap="flat" cmpd="sng" algn="ctr">
+                      <a:solidFill>
+                        <a:schemeClr val="bg1"/>
+                      </a:solidFill>
+                      <a:prstDash val="solid"/>
+                      <a:round/>
+                      <a:headEnd type="none" w="med" len="med"/>
+                      <a:tailEnd type="none" w="med" len="med"/>
+                    </a:lnB>
+                  </a:tcPr>
+                </a:tc>
+                <a:tc>
+                  <a:txBody>
+                    <a:bodyPr/>
+                    <a:lstStyle/>
+                    <a:p>
+                      <a:r>
+                        <a:rPr lang="zh-CN" altLang="en-US" dirty="0">
+                          <a:effectLst/>
+                          <a:latin typeface="Google Sans Text"/>
+                        </a:rPr>
+                        <a:t>详细设计，系统实施</a:t>
+                      </a:r>
+                    </a:p>
+                  </a:txBody>
+                  <a:tcPr anchor="ctr">
+                    <a:lnL w="5443" cap="flat" cmpd="sng" algn="ctr">
+                      <a:solidFill>
+                        <a:schemeClr val="bg1"/>
+                      </a:solidFill>
+                      <a:prstDash val="solid"/>
+                      <a:round/>
+                      <a:headEnd type="none" w="med" len="med"/>
+                      <a:tailEnd type="none" w="med" len="med"/>
+                    </a:lnL>
+                    <a:lnR w="5443" cap="flat" cmpd="sng" algn="ctr">
+                      <a:solidFill>
+                        <a:schemeClr val="bg1"/>
+                      </a:solidFill>
+                      <a:prstDash val="solid"/>
+                      <a:round/>
+                      <a:headEnd type="none" w="med" len="med"/>
+                      <a:tailEnd type="none" w="med" len="med"/>
+                    </a:lnR>
+                    <a:lnT w="5443" cap="flat" cmpd="sng" algn="ctr">
+                      <a:solidFill>
+                        <a:schemeClr val="bg1"/>
+                      </a:solidFill>
+                      <a:prstDash val="solid"/>
+                      <a:round/>
+                      <a:headEnd type="none" w="med" len="med"/>
+                      <a:tailEnd type="none" w="med" len="med"/>
+                    </a:lnT>
+                    <a:lnB w="5443" cap="flat" cmpd="sng" algn="ctr">
+                      <a:solidFill>
+                        <a:schemeClr val="bg1"/>
+                      </a:solidFill>
+                      <a:prstDash val="solid"/>
+                      <a:round/>
+                      <a:headEnd type="none" w="med" len="med"/>
+                      <a:tailEnd type="none" w="med" len="med"/>
+                    </a:lnB>
+                  </a:tcPr>
+                </a:tc>
+                <a:extLst>
+                  <a:ext uri="{0D108BD9-81ED-4DB2-BD59-A6C34878D82A}">
+                    <a16:rowId xmlns:a16="http://schemas.microsoft.com/office/drawing/2014/main" val="1497305901"/>
+                  </a:ext>
+                </a:extLst>
+              </a:tr>
+            </a:tbl>
+          </a:graphicData>
+        </a:graphic>
+      </p:graphicFrame>
+    </p:spTree>
+    <p:extLst>
+      <p:ext uri="{BB962C8B-B14F-4D97-AF65-F5344CB8AC3E}">
+        <p14:creationId xmlns:p14="http://schemas.microsoft.com/office/powerpoint/2010/main" val="2406565443"/>
+      </p:ext>
+    </p:extLst>
+  </p:cSld>
+  <p:clrMapOvr>
+    <a:masterClrMapping/>
+  </p:clrMapOvr>
+</p:sld>
+</file>
+
+<file path=ppt/slides/slide62.xml><?xml version="1.0" encoding="utf-8"?>
+<p:sld xmlns:a="http://schemas.openxmlformats.org/drawingml/2006/main" xmlns:r="http://schemas.openxmlformats.org/officeDocument/2006/relationships" xmlns:p="http://schemas.openxmlformats.org/presentationml/2006/main">
+  <p:cSld>
+    <p:spTree>
+      <p:nvGrpSpPr>
+        <p:cNvPr id="1" name=""/>
+        <p:cNvGrpSpPr/>
+        <p:nvPr/>
+      </p:nvGrpSpPr>
+      <p:grpSpPr>
+        <a:xfrm>
+          <a:off x="0" y="0"/>
+          <a:ext cx="0" cy="0"/>
+          <a:chOff x="0" y="0"/>
+          <a:chExt cx="0" cy="0"/>
+        </a:xfrm>
+      </p:grpSpPr>
+      <p:sp>
+        <p:nvSpPr>
+          <p:cNvPr id="66562" name="Rectangle 2">
+            <a:extLst>
+              <a:ext uri="{FF2B5EF4-FFF2-40B4-BE49-F238E27FC236}">
+                <a16:creationId xmlns:a16="http://schemas.microsoft.com/office/drawing/2014/main" id="{B0501DB5-196D-46F8-8844-34CD6174ABC1}"/>
+              </a:ext>
+            </a:extLst>
+          </p:cNvPr>
+          <p:cNvSpPr>
+            <a:spLocks noGrp="1" noChangeArrowheads="1"/>
+          </p:cNvSpPr>
+          <p:nvPr>
+            <p:ph type="title"/>
+          </p:nvPr>
+        </p:nvSpPr>
+        <p:spPr/>
+        <p:txBody>
+          <a:bodyPr/>
+          <a:lstStyle/>
+          <a:p>
+            <a:pPr marL="838200" indent="-838200" algn="l" eaLnBrk="1" hangingPunct="1"/>
+            <a:r>
+              <a:rPr lang="en-US" altLang="zh-CN" sz="3200" b="1"/>
+              <a:t>2.4.4 </a:t>
+            </a:r>
+            <a:r>
+              <a:rPr lang="zh-CN" altLang="en-US" sz="3200" b="1"/>
+              <a:t>案例：学院网站建设项目的项目章程</a:t>
+            </a:r>
+          </a:p>
+        </p:txBody>
+      </p:sp>
+      <p:sp>
+        <p:nvSpPr>
+          <p:cNvPr id="66563" name="Rectangle 3">
+            <a:extLst>
+              <a:ext uri="{FF2B5EF4-FFF2-40B4-BE49-F238E27FC236}">
+                <a16:creationId xmlns:a16="http://schemas.microsoft.com/office/drawing/2014/main" id="{7796420C-5F49-477E-9E2F-A17189C940F2}"/>
+              </a:ext>
+            </a:extLst>
+          </p:cNvPr>
+          <p:cNvSpPr>
+            <a:spLocks noGrp="1" noChangeArrowheads="1"/>
+          </p:cNvSpPr>
+          <p:nvPr>
+            <p:ph idx="1"/>
+          </p:nvPr>
+        </p:nvSpPr>
+        <p:spPr>
+          <a:xfrm>
+            <a:off x="628650" y="1825625"/>
+            <a:ext cx="7886700" cy="3619599"/>
+          </a:xfrm>
+        </p:spPr>
+        <p:txBody>
+          <a:bodyPr>
+            <a:noAutofit/>
+          </a:bodyPr>
+          <a:lstStyle/>
+          <a:p>
+            <a:pPr eaLnBrk="1" hangingPunct="1">
+              <a:lnSpc>
+                <a:spcPct val="90000"/>
+              </a:lnSpc>
+            </a:pPr>
+            <a:r>
+              <a:rPr lang="en-US" altLang="zh-CN" sz="2400" dirty="0"/>
+              <a:t>7. </a:t>
+            </a:r>
+            <a:r>
+              <a:rPr lang="zh-CN" altLang="en-US" sz="2400" dirty="0"/>
+              <a:t>相关部门的支持</a:t>
+            </a:r>
+            <a:endParaRPr lang="en-US" altLang="zh-CN" sz="2400" dirty="0"/>
+          </a:p>
+          <a:p>
+            <a:pPr eaLnBrk="1" hangingPunct="1">
+              <a:lnSpc>
+                <a:spcPct val="90000"/>
+              </a:lnSpc>
+            </a:pPr>
+            <a:r>
+              <a:rPr lang="zh-CN" altLang="en-US" sz="1600" dirty="0"/>
+              <a:t>由于项目组主要成员为本学院研究生，导师每周提供同学用于项目开发的时间不少于五小时；实验室应提供硬件支持，机器不少于七台；负责该项目领导工作的商学院党委应组织和配合本项目的需求调研。</a:t>
+            </a:r>
+            <a:endParaRPr lang="zh-CN" altLang="en-US" sz="2400" dirty="0"/>
+          </a:p>
+          <a:p>
+            <a:pPr eaLnBrk="1" hangingPunct="1">
+              <a:lnSpc>
+                <a:spcPct val="90000"/>
+              </a:lnSpc>
+            </a:pPr>
+            <a:r>
+              <a:rPr lang="en-US" altLang="zh-CN" sz="2400" dirty="0"/>
+              <a:t>8. </a:t>
+            </a:r>
+            <a:r>
+              <a:rPr lang="zh-CN" altLang="en-US" sz="2400" dirty="0"/>
+              <a:t>签发人和签发日期</a:t>
+            </a:r>
+            <a:endParaRPr lang="en-US" altLang="zh-CN" sz="2400" dirty="0"/>
+          </a:p>
+          <a:p>
+            <a:pPr eaLnBrk="1" hangingPunct="1">
+              <a:lnSpc>
+                <a:spcPct val="90000"/>
+              </a:lnSpc>
+            </a:pPr>
+            <a:r>
+              <a:rPr lang="zh-CN" altLang="en-US" sz="1600" dirty="0"/>
+              <a:t>签发人应是该项目发起方或组织方的代表，本项目由商学院党委书记签发。签发日期：</a:t>
+            </a:r>
+            <a:r>
+              <a:rPr lang="en-US" altLang="zh-CN" sz="1600" dirty="0"/>
+              <a:t>2013 </a:t>
+            </a:r>
+            <a:r>
+              <a:rPr lang="zh-CN" altLang="en-US" sz="1600" dirty="0"/>
+              <a:t>年 </a:t>
+            </a:r>
+            <a:r>
+              <a:rPr lang="en-US" altLang="zh-CN" sz="1600" dirty="0"/>
+              <a:t>9 </a:t>
+            </a:r>
+            <a:r>
+              <a:rPr lang="zh-CN" altLang="en-US" sz="1600" dirty="0"/>
+              <a:t>月 </a:t>
+            </a:r>
+            <a:r>
+              <a:rPr lang="en-US" altLang="zh-CN" sz="1600" dirty="0"/>
+              <a:t>25 </a:t>
+            </a:r>
+            <a:r>
+              <a:rPr lang="zh-CN" altLang="en-US" sz="1600" dirty="0"/>
+              <a:t>日。</a:t>
+            </a:r>
+            <a:endParaRPr lang="zh-CN" altLang="en-US" sz="2400" dirty="0"/>
+          </a:p>
+        </p:txBody>
+      </p:sp>
+      <p:sp>
+        <p:nvSpPr>
+          <p:cNvPr id="66564" name="Rectangle 4">
+            <a:extLst>
+              <a:ext uri="{FF2B5EF4-FFF2-40B4-BE49-F238E27FC236}">
+                <a16:creationId xmlns:a16="http://schemas.microsoft.com/office/drawing/2014/main" id="{CAB7742A-B051-4A63-8F6B-96215A3A531F}"/>
+              </a:ext>
+            </a:extLst>
+          </p:cNvPr>
+          <p:cNvSpPr>
+            <a:spLocks noGrp="1" noChangeArrowheads="1"/>
+          </p:cNvSpPr>
+          <p:nvPr>
+            <p:ph type="title" idx="4294967295"/>
+          </p:nvPr>
+        </p:nvSpPr>
+        <p:spPr>
+          <a:xfrm>
+            <a:off x="914400" y="130175"/>
+            <a:ext cx="8229600" cy="346075"/>
+          </a:xfrm>
+          <a:noFill/>
+        </p:spPr>
+        <p:txBody>
+          <a:bodyPr>
+            <a:normAutofit fontScale="90000"/>
+          </a:bodyPr>
+          <a:lstStyle/>
+          <a:p>
+            <a:pPr eaLnBrk="1" hangingPunct="1"/>
+            <a:r>
+              <a:rPr lang="zh-CN" altLang="en-US" sz="2000" b="1">
+                <a:solidFill>
+                  <a:srgbClr val="0000FF"/>
+                </a:solidFill>
+              </a:rPr>
+              <a:t>十一五规划教材                                          </a:t>
+            </a:r>
+            <a:r>
+              <a:rPr lang="en-US" altLang="zh-CN" sz="2000" b="1">
+                <a:solidFill>
+                  <a:srgbClr val="0000FF"/>
+                </a:solidFill>
+              </a:rPr>
+              <a:t>《</a:t>
+            </a:r>
+            <a:r>
+              <a:rPr lang="zh-CN" altLang="en-US" sz="2000" b="1">
+                <a:solidFill>
+                  <a:srgbClr val="0000FF"/>
+                </a:solidFill>
+              </a:rPr>
+              <a:t>信息系统项目管理</a:t>
+            </a:r>
+            <a:r>
+              <a:rPr lang="en-US" altLang="zh-CN" sz="2000" b="1">
+                <a:solidFill>
+                  <a:srgbClr val="0000FF"/>
+                </a:solidFill>
+              </a:rPr>
+              <a:t>》</a:t>
+            </a:r>
+            <a:r>
+              <a:rPr lang="zh-CN" altLang="en-US" sz="2000" b="1">
+                <a:solidFill>
+                  <a:srgbClr val="0000FF"/>
+                </a:solidFill>
+              </a:rPr>
+              <a:t>讲义</a:t>
+            </a:r>
+          </a:p>
+        </p:txBody>
+      </p:sp>
+      <p:sp>
+        <p:nvSpPr>
+          <p:cNvPr id="66565" name="Line 5">
+            <a:extLst>
+              <a:ext uri="{FF2B5EF4-FFF2-40B4-BE49-F238E27FC236}">
+                <a16:creationId xmlns:a16="http://schemas.microsoft.com/office/drawing/2014/main" id="{1544192B-DD46-4BAA-BA33-7A4170E2C938}"/>
+              </a:ext>
+            </a:extLst>
+          </p:cNvPr>
+          <p:cNvSpPr>
+            <a:spLocks noChangeShapeType="1"/>
+          </p:cNvSpPr>
+          <p:nvPr/>
+        </p:nvSpPr>
+        <p:spPr bwMode="auto">
+          <a:xfrm>
+            <a:off x="0" y="476250"/>
+            <a:ext cx="9144000" cy="0"/>
+          </a:xfrm>
+          <a:prstGeom prst="line">
+            <a:avLst/>
+          </a:prstGeom>
+          <a:noFill/>
+          <a:ln w="9525">
+            <a:solidFill>
+              <a:srgbClr val="9900CC"/>
+            </a:solidFill>
+            <a:round/>
+            <a:headEnd/>
+            <a:tailEnd/>
+          </a:ln>
+          <a:extLst>
+            <a:ext uri="{909E8E84-426E-40DD-AFC4-6F175D3DCCD1}">
+              <a14:hiddenFill xmlns:a14="http://schemas.microsoft.com/office/drawing/2010/main">
+                <a:noFill/>
+              </a14:hiddenFill>
+            </a:ext>
+          </a:extLst>
+        </p:spPr>
+        <p:txBody>
+          <a:bodyPr/>
+          <a:lstStyle/>
+          <a:p>
+            <a:endParaRPr lang="zh-CN" altLang="en-US"/>
+          </a:p>
+        </p:txBody>
+      </p:sp>
+    </p:spTree>
+    <p:extLst>
+      <p:ext uri="{BB962C8B-B14F-4D97-AF65-F5344CB8AC3E}">
+        <p14:creationId xmlns:p14="http://schemas.microsoft.com/office/powerpoint/2010/main" val="3161909627"/>
+      </p:ext>
+    </p:extLst>
+  </p:cSld>
+  <p:clrMapOvr>
+    <a:masterClrMapping/>
+  </p:clrMapOvr>
+</p:sld>
+</file>
+
+<file path=ppt/slides/slide63.xml><?xml version="1.0" encoding="utf-8"?>
+<p:sld xmlns:a="http://schemas.openxmlformats.org/drawingml/2006/main" xmlns:r="http://schemas.openxmlformats.org/officeDocument/2006/relationships" xmlns:p="http://schemas.openxmlformats.org/presentationml/2006/main">
+  <p:cSld>
+    <p:spTree>
+      <p:nvGrpSpPr>
+        <p:cNvPr id="1" name=""/>
+        <p:cNvGrpSpPr/>
+        <p:nvPr/>
+      </p:nvGrpSpPr>
+      <p:grpSpPr>
+        <a:xfrm>
+          <a:off x="0" y="0"/>
+          <a:ext cx="0" cy="0"/>
+          <a:chOff x="0" y="0"/>
+          <a:chExt cx="0" cy="0"/>
+        </a:xfrm>
+      </p:grpSpPr>
+      <p:sp>
+        <p:nvSpPr>
+          <p:cNvPr id="68610" name="WordArt 4">
+            <a:extLst>
+              <a:ext uri="{FF2B5EF4-FFF2-40B4-BE49-F238E27FC236}">
+                <a16:creationId xmlns:a16="http://schemas.microsoft.com/office/drawing/2014/main" id="{BC5E390A-87FF-4A22-9247-206CB6FEE59F}"/>
+              </a:ext>
+            </a:extLst>
+          </p:cNvPr>
+          <p:cNvSpPr>
+            <a:spLocks noChangeArrowheads="1" noChangeShapeType="1" noTextEdit="1"/>
+          </p:cNvSpPr>
+          <p:nvPr/>
+        </p:nvSpPr>
+        <p:spPr bwMode="auto">
+          <a:xfrm>
+            <a:off x="3205163" y="2997200"/>
+            <a:ext cx="2879725" cy="1163638"/>
+          </a:xfrm>
+          <a:prstGeom prst="rect">
+            <a:avLst/>
+          </a:prstGeom>
+          <a:extLst>
+            <a:ext uri="{91240B29-F687-4F45-9708-019B960494DF}">
+              <a14:hiddenLine xmlns:a14="http://schemas.microsoft.com/office/drawing/2010/main" w="9525">
+                <a:solidFill>
+                  <a:srgbClr val="000000"/>
+                </a:solidFill>
+                <a:round/>
+                <a:headEnd/>
+                <a:tailEnd/>
+              </a14:hiddenLine>
+            </a:ext>
+          </a:extLst>
+        </p:spPr>
+        <p:txBody>
+          <a:bodyPr wrap="none" fromWordArt="1">
+            <a:prstTxWarp prst="textPlain">
+              <a:avLst>
+                <a:gd name="adj" fmla="val 50000"/>
+              </a:avLst>
+            </a:prstTxWarp>
+          </a:bodyPr>
+          <a:lstStyle/>
+          <a:p>
+            <a:r>
+              <a:rPr lang="zh-CN" altLang="en-US" sz="3600" kern="10">
+                <a:gradFill rotWithShape="1">
+                  <a:gsLst>
+                    <a:gs pos="0">
+                      <a:srgbClr val="FFFF00"/>
+                    </a:gs>
+                    <a:gs pos="100000">
+                      <a:srgbClr val="FF9933"/>
+                    </a:gs>
+                  </a:gsLst>
+                  <a:path path="rect">
+                    <a:fillToRect l="50000" t="50000" r="50000" b="50000"/>
+                  </a:path>
+                </a:gradFill>
+                <a:effectLst>
+                  <a:outerShdw dist="35921" dir="2700000" algn="ctr" rotWithShape="0">
+                    <a:srgbClr val="C0C0C0">
+                      <a:alpha val="79999"/>
+                    </a:srgbClr>
+                  </a:outerShdw>
+                </a:effectLst>
+                <a:latin typeface="宋体" panose="02010600030101010101" pitchFamily="2" charset="-122"/>
+              </a:rPr>
+              <a:t>谢谢！</a:t>
+            </a:r>
+          </a:p>
+        </p:txBody>
+      </p:sp>
+      <p:sp>
+        <p:nvSpPr>
+          <p:cNvPr id="68611" name="Rectangle 5">
+            <a:extLst>
+              <a:ext uri="{FF2B5EF4-FFF2-40B4-BE49-F238E27FC236}">
+                <a16:creationId xmlns:a16="http://schemas.microsoft.com/office/drawing/2014/main" id="{2AA774BF-147A-4E93-9529-8CB74844CA3A}"/>
+              </a:ext>
+            </a:extLst>
+          </p:cNvPr>
+          <p:cNvSpPr>
+            <a:spLocks noGrp="1" noChangeArrowheads="1"/>
+          </p:cNvSpPr>
+          <p:nvPr>
+            <p:ph type="title"/>
+          </p:nvPr>
+        </p:nvSpPr>
+        <p:spPr>
+          <a:xfrm>
+            <a:off x="611188" y="836613"/>
+            <a:ext cx="7772400" cy="1143000"/>
+          </a:xfrm>
+        </p:spPr>
+        <p:txBody>
+          <a:bodyPr/>
+          <a:lstStyle/>
+          <a:p>
+            <a:pPr algn="l" eaLnBrk="1" hangingPunct="1"/>
+            <a:r>
+              <a:rPr lang="zh-CN" altLang="en-US" b="1">
+                <a:solidFill>
+                  <a:srgbClr val="FF0000"/>
+                </a:solidFill>
+              </a:rPr>
+              <a:t>欢迎讨论</a:t>
+            </a:r>
+            <a:r>
+              <a:rPr lang="en-US" altLang="zh-CN" sz="4600" b="1">
+                <a:solidFill>
+                  <a:srgbClr val="FF0000"/>
+                </a:solidFill>
+                <a:ea typeface="楷体_GB2312" pitchFamily="49" charset="-122"/>
+              </a:rPr>
+              <a:t>……</a:t>
+            </a:r>
+          </a:p>
+        </p:txBody>
+      </p:sp>
+    </p:spTree>
+  </p:cSld>
+  <p:clrMapOvr>
+    <a:masterClrMapping/>
+  </p:clrMapOvr>
+  <p:transition spd="slow" advTm="5748"/>
 </p:sld>
 </file>
 
